--- a/results/Semana2_Benchmark_Matrices.pptx
+++ b/results/Semana2_Benchmark_Matrices.pptx
@@ -122,17 +122,17 @@
   <p:extLst>
     <p:ext uri="{521415D9-36F7-43E2-AB2F-B90AF26B5E84}">
       <p14:sectionLst xmlns:p14="http://schemas.microsoft.com/office/powerpoint/2010/main">
-        <p14:section name="Portada" id="{182454ba-7c25-3ff5-aa32-0d07c0f41c22}">
+        <p14:section name="Portada" id="{dcef1fa8-997c-0e7e-d170-9acc98343e44}">
           <p14:sldIdLst>
             <p14:sldId id="256"/>
           </p14:sldIdLst>
         </p14:section>
-        <p14:section name="Agenda" id="{0923f082-0f07-d5bd-3d6e-59891908e0c9}">
+        <p14:section name="Agenda" id="{9114e0d2-ca5d-be9f-f047-e91fef5dd703}">
           <p14:sldIdLst>
             <p14:sldId id="257"/>
           </p14:sldIdLst>
         </p14:section>
-        <p14:section name="Implementaciones" id="{f3297b1d-bbb5-3b76-2352-3e65e1d15353}">
+        <p14:section name="Implementaciones" id="{7dbdc8ba-7c18-c705-a0d3-3c2b70bf7422}">
           <p14:sldIdLst>
             <p14:sldId id="258"/>
             <p14:sldId id="259"/>
@@ -140,20 +140,20 @@
             <p14:sldId id="261"/>
           </p14:sldIdLst>
         </p14:section>
-        <p14:section name="Decisiones de Diseno" id="{3d577777-c20d-e86c-e005-f25e65b47d95}">
+        <p14:section name="Decisiones de Diseno" id="{161745a9-40a2-8ae1-9290-532436ae3aa4}">
           <p14:sldIdLst>
             <p14:sldId id="262"/>
             <p14:sldId id="263"/>
             <p14:sldId id="264"/>
           </p14:sldIdLst>
         </p14:section>
-        <p14:section name="Entorno" id="{0b2486ff-79e9-ce48-e948-b641900e7489}">
+        <p14:section name="Entorno" id="{dfe858fa-6927-83cf-d263-7190d22a9314}">
           <p14:sldIdLst>
             <p14:sldId id="265"/>
             <p14:sldId id="266"/>
           </p14:sldIdLst>
         </p14:section>
-        <p14:section name="Resultados" id="{d686d999-8771-4ef6-f9e6-279480fe85bf}">
+        <p14:section name="Resultados" id="{51f9cfa5-df49-5448-454a-aa4f367f8fcb}">
           <p14:sldIdLst>
             <p14:sldId id="267"/>
             <p14:sldId id="268"/>
@@ -161,7 +161,7 @@
             <p14:sldId id="270"/>
           </p14:sldIdLst>
         </p14:section>
-        <p14:section name="Conclusiones" id="{2a0ef5a7-67e7-04b9-1f64-73a71744f17f}">
+        <p14:section name="Conclusiones" id="{97ce0a30-a967-e676-3f56-283f7673e582}">
           <p14:sldIdLst>
             <p14:sldId id="271"/>
           </p14:sldIdLst>
@@ -3702,8 +3702,8 @@
         </p:nvSpPr>
         <p:spPr>
           <a:xfrm>
-            <a:off x="640080" y="1737360"/>
-            <a:ext cx="3566160" cy="457200"/>
+            <a:off x="640080" y="1691640"/>
+            <a:ext cx="3566160" cy="411480"/>
           </a:xfrm>
           <a:prstGeom prst="rect">
             <a:avLst/>
@@ -3719,7 +3719,55 @@
               <a:buNone/>
             </a:pPr>
             <a:r>
-              <a:rPr lang="en-US" sz="1100" dirty="0">
+              <a:rPr lang="en-US" sz="1000" dirty="0">
+                <a:solidFill>
+                  <a:srgbClr val="1C7293"/>
+                </a:solidFill>
+              </a:rPr>
+              <a:t>Equipo
+</a:t>
+            </a:r>
+            <a:pPr indent="0" marL="0">
+              <a:buNone/>
+            </a:pPr>
+            <a:r>
+              <a:rPr lang="en-US" sz="1300" b="1" dirty="0">
+                <a:solidFill>
+                  <a:srgbClr val="1B2838"/>
+                </a:solidFill>
+              </a:rPr>
+              <a:t>Notebook</a:t>
+            </a:r>
+            <a:endParaRPr lang="en-US" sz="1000" dirty="0"/>
+          </a:p>
+        </p:txBody>
+      </p:sp>
+      <p:sp>
+        <p:nvSpPr>
+          <p:cNvPr id="6" name="Text 4"/>
+          <p:cNvSpPr txBox="1"/>
+          <p:nvPr/>
+        </p:nvSpPr>
+        <p:spPr>
+          <a:xfrm>
+            <a:off x="640080" y="2121408"/>
+            <a:ext cx="3566160" cy="411480"/>
+          </a:xfrm>
+          <a:prstGeom prst="rect">
+            <a:avLst/>
+          </a:prstGeom>
+          <a:noFill/>
+          <a:ln/>
+        </p:spPr>
+        <p:txBody>
+          <a:bodyPr wrap="square" lIns="0" tIns="0" rIns="0" bIns="0" rtlCol="0" anchor="ctr"/>
+          <a:lstStyle/>
+          <a:p>
+            <a:pPr indent="0" marL="0">
+              <a:buNone/>
+            </a:pPr>
+            <a:r>
+              <a:rPr lang="en-US" sz="1000" dirty="0">
                 <a:solidFill>
                   <a:srgbClr val="1C7293"/>
                 </a:solidFill>
@@ -3731,27 +3779,27 @@
               <a:buNone/>
             </a:pPr>
             <a:r>
-              <a:rPr lang="en-US" sz="1400" b="1" dirty="0">
+              <a:rPr lang="en-US" sz="1300" b="1" dirty="0">
                 <a:solidFill>
                   <a:srgbClr val="1B2838"/>
                 </a:solidFill>
               </a:rPr>
-              <a:t>Intel Xeon @ 2.80 GHz</a:t>
-            </a:r>
-            <a:endParaRPr lang="en-US" sz="1100" dirty="0"/>
-          </a:p>
-        </p:txBody>
-      </p:sp>
-      <p:sp>
-        <p:nvSpPr>
-          <p:cNvPr id="6" name="Text 4"/>
+              <a:t>Intel Core i7-1255U @ 2.60 GHz</a:t>
+            </a:r>
+            <a:endParaRPr lang="en-US" sz="1000" dirty="0"/>
+          </a:p>
+        </p:txBody>
+      </p:sp>
+      <p:sp>
+        <p:nvSpPr>
+          <p:cNvPr id="7" name="Text 5"/>
           <p:cNvSpPr txBox="1"/>
           <p:nvPr/>
         </p:nvSpPr>
         <p:spPr>
           <a:xfrm>
-            <a:off x="640080" y="2240280"/>
-            <a:ext cx="3566160" cy="457200"/>
+            <a:off x="640080" y="2551176"/>
+            <a:ext cx="3566160" cy="411480"/>
           </a:xfrm>
           <a:prstGeom prst="rect">
             <a:avLst/>
@@ -3767,7 +3815,7 @@
               <a:buNone/>
             </a:pPr>
             <a:r>
-              <a:rPr lang="en-US" sz="1100" dirty="0">
+              <a:rPr lang="en-US" sz="1000" dirty="0">
                 <a:solidFill>
                   <a:srgbClr val="1C7293"/>
                 </a:solidFill>
@@ -3779,27 +3827,27 @@
               <a:buNone/>
             </a:pPr>
             <a:r>
-              <a:rPr lang="en-US" sz="1400" b="1" dirty="0">
+              <a:rPr lang="en-US" sz="1300" b="1" dirty="0">
                 <a:solidFill>
                   <a:srgbClr val="1B2838"/>
                 </a:solidFill>
               </a:rPr>
-              <a:t>8 GB</a:t>
-            </a:r>
-            <a:endParaRPr lang="en-US" sz="1100" dirty="0"/>
-          </a:p>
-        </p:txBody>
-      </p:sp>
-      <p:sp>
-        <p:nvSpPr>
-          <p:cNvPr id="7" name="Text 5"/>
+              <a:t>16 GB DDR4</a:t>
+            </a:r>
+            <a:endParaRPr lang="en-US" sz="1000" dirty="0"/>
+          </a:p>
+        </p:txBody>
+      </p:sp>
+      <p:sp>
+        <p:nvSpPr>
+          <p:cNvPr id="8" name="Text 6"/>
           <p:cNvSpPr txBox="1"/>
           <p:nvPr/>
         </p:nvSpPr>
         <p:spPr>
           <a:xfrm>
-            <a:off x="640080" y="2743200"/>
-            <a:ext cx="3566160" cy="457200"/>
+            <a:off x="640080" y="2980944"/>
+            <a:ext cx="3566160" cy="411480"/>
           </a:xfrm>
           <a:prstGeom prst="rect">
             <a:avLst/>
@@ -3815,7 +3863,7 @@
               <a:buNone/>
             </a:pPr>
             <a:r>
-              <a:rPr lang="en-US" sz="1100" dirty="0">
+              <a:rPr lang="en-US" sz="1000" dirty="0">
                 <a:solidFill>
                   <a:srgbClr val="1C7293"/>
                 </a:solidFill>
@@ -3827,27 +3875,27 @@
               <a:buNone/>
             </a:pPr>
             <a:r>
-              <a:rPr lang="en-US" sz="1400" b="1" dirty="0">
+              <a:rPr lang="en-US" sz="1300" b="1" dirty="0">
                 <a:solidFill>
                   <a:srgbClr val="1B2838"/>
                 </a:solidFill>
               </a:rPr>
-              <a:t>Linux 6.18.44</a:t>
-            </a:r>
-            <a:endParaRPr lang="en-US" sz="1100" dirty="0"/>
-          </a:p>
-        </p:txBody>
-      </p:sp>
-      <p:sp>
-        <p:nvSpPr>
-          <p:cNvPr id="8" name="Text 6"/>
+              <a:t>Ubuntu 22.04.4 LTS</a:t>
+            </a:r>
+            <a:endParaRPr lang="en-US" sz="1000" dirty="0"/>
+          </a:p>
+        </p:txBody>
+      </p:sp>
+      <p:sp>
+        <p:nvSpPr>
+          <p:cNvPr id="9" name="Text 7"/>
           <p:cNvSpPr txBox="1"/>
           <p:nvPr/>
         </p:nvSpPr>
         <p:spPr>
           <a:xfrm>
-            <a:off x="640080" y="3246120"/>
-            <a:ext cx="3566160" cy="457200"/>
+            <a:off x="640080" y="3410712"/>
+            <a:ext cx="3566160" cy="411480"/>
           </a:xfrm>
           <a:prstGeom prst="rect">
             <a:avLst/>
@@ -3863,7 +3911,7 @@
               <a:buNone/>
             </a:pPr>
             <a:r>
-              <a:rPr lang="en-US" sz="1100" dirty="0">
+              <a:rPr lang="en-US" sz="1000" dirty="0">
                 <a:solidFill>
                   <a:srgbClr val="1C7293"/>
                 </a:solidFill>
@@ -3875,27 +3923,27 @@
               <a:buNone/>
             </a:pPr>
             <a:r>
-              <a:rPr lang="en-US" sz="1400" b="1" dirty="0">
+              <a:rPr lang="en-US" sz="1300" b="1" dirty="0">
                 <a:solidFill>
                   <a:srgbClr val="1B2838"/>
                 </a:solidFill>
               </a:rPr>
               <a:t>x86_64</a:t>
             </a:r>
-            <a:endParaRPr lang="en-US" sz="1100" dirty="0"/>
-          </a:p>
-        </p:txBody>
-      </p:sp>
-      <p:sp>
-        <p:nvSpPr>
-          <p:cNvPr id="9" name="Text 7"/>
+            <a:endParaRPr lang="en-US" sz="1000" dirty="0"/>
+          </a:p>
+        </p:txBody>
+      </p:sp>
+      <p:sp>
+        <p:nvSpPr>
+          <p:cNvPr id="10" name="Text 8"/>
           <p:cNvSpPr txBox="1"/>
           <p:nvPr/>
         </p:nvSpPr>
         <p:spPr>
           <a:xfrm>
-            <a:off x="640080" y="3749040"/>
-            <a:ext cx="3566160" cy="457200"/>
+            <a:off x="640080" y="3840480"/>
+            <a:ext cx="3566160" cy="411480"/>
           </a:xfrm>
           <a:prstGeom prst="rect">
             <a:avLst/>
@@ -3911,7 +3959,7 @@
               <a:buNone/>
             </a:pPr>
             <a:r>
-              <a:rPr lang="en-US" sz="1100" dirty="0">
+              <a:rPr lang="en-US" sz="1000" dirty="0">
                 <a:solidFill>
                   <a:srgbClr val="1C7293"/>
                 </a:solidFill>
@@ -3923,20 +3971,20 @@
               <a:buNone/>
             </a:pPr>
             <a:r>
-              <a:rPr lang="en-US" sz="1400" b="1" dirty="0">
+              <a:rPr lang="en-US" sz="1300" b="1" dirty="0">
                 <a:solidFill>
                   <a:srgbClr val="1B2838"/>
                 </a:solidFill>
               </a:rPr>
               <a:t>29.8.2</a:t>
             </a:r>
-            <a:endParaRPr lang="en-US" sz="1100" dirty="0"/>
-          </a:p>
-        </p:txBody>
-      </p:sp>
-      <p:sp>
-        <p:nvSpPr>
-          <p:cNvPr id="10" name="Shape 8"/>
+            <a:endParaRPr lang="en-US" sz="1000" dirty="0"/>
+          </a:p>
+        </p:txBody>
+      </p:sp>
+      <p:sp>
+        <p:nvSpPr>
+          <p:cNvPr id="11" name="Shape 9"/>
           <p:cNvSpPr/>
           <p:nvPr/>
         </p:nvSpPr>
@@ -3958,7 +4006,7 @@
       </p:sp>
       <p:sp>
         <p:nvSpPr>
-          <p:cNvPr id="11" name="Text 9"/>
+          <p:cNvPr id="12" name="Text 10"/>
           <p:cNvSpPr txBox="1"/>
           <p:nvPr/>
         </p:nvSpPr>
@@ -3994,7 +4042,7 @@
       </p:sp>
       <p:sp>
         <p:nvSpPr>
-          <p:cNvPr id="12" name="Shape 10"/>
+          <p:cNvPr id="13" name="Shape 11"/>
           <p:cNvSpPr/>
           <p:nvPr/>
         </p:nvSpPr>
@@ -4016,7 +4064,7 @@
       </p:sp>
       <p:sp>
         <p:nvSpPr>
-          <p:cNvPr id="13" name="Text 11"/>
+          <p:cNvPr id="14" name="Text 12"/>
           <p:cNvSpPr txBox="1"/>
           <p:nvPr/>
         </p:nvSpPr>
@@ -4078,7 +4126,7 @@
       </p:sp>
       <p:sp>
         <p:nvSpPr>
-          <p:cNvPr id="14" name="Shape 12"/>
+          <p:cNvPr id="15" name="Shape 13"/>
           <p:cNvSpPr/>
           <p:nvPr/>
         </p:nvSpPr>
@@ -4100,7 +4148,7 @@
       </p:sp>
       <p:sp>
         <p:nvSpPr>
-          <p:cNvPr id="15" name="Text 13"/>
+          <p:cNvPr id="16" name="Text 14"/>
           <p:cNvSpPr txBox="1"/>
           <p:nvPr/>
         </p:nvSpPr>
@@ -4162,7 +4210,7 @@
       </p:sp>
       <p:sp>
         <p:nvSpPr>
-          <p:cNvPr id="16" name="Shape 14"/>
+          <p:cNvPr id="17" name="Shape 15"/>
           <p:cNvSpPr/>
           <p:nvPr/>
         </p:nvSpPr>
@@ -4184,7 +4232,7 @@
       </p:sp>
       <p:sp>
         <p:nvSpPr>
-          <p:cNvPr id="17" name="Text 15"/>
+          <p:cNvPr id="18" name="Text 16"/>
           <p:cNvSpPr txBox="1"/>
           <p:nvPr/>
         </p:nvSpPr>
@@ -4246,7 +4294,7 @@
       </p:sp>
       <p:sp>
         <p:nvSpPr>
-          <p:cNvPr id="18" name="Shape 16"/>
+          <p:cNvPr id="19" name="Shape 17"/>
           <p:cNvSpPr/>
           <p:nvPr/>
         </p:nvSpPr>
@@ -4268,7 +4316,7 @@
       </p:sp>
       <p:sp>
         <p:nvSpPr>
-          <p:cNvPr id="19" name="Text 17"/>
+          <p:cNvPr id="20" name="Text 18"/>
           <p:cNvSpPr txBox="1"/>
           <p:nvPr/>
         </p:nvSpPr>

--- a/results/Semana2_Benchmark_Matrices.pptx
+++ b/results/Semana2_Benchmark_Matrices.pptx
@@ -21,9 +21,16 @@
     <p:sldId id="269" r:id="rId15"/>
     <p:sldId id="270" r:id="rId16"/>
     <p:sldId id="271" r:id="rId17"/>
+    <p:sldId id="272" r:id="rId18"/>
+    <p:sldId id="273" r:id="rId19"/>
+    <p:sldId id="274" r:id="rId20"/>
+    <p:sldId id="275" r:id="rId21"/>
+    <p:sldId id="276" r:id="rId22"/>
+    <p:sldId id="277" r:id="rId23"/>
+    <p:sldId id="278" r:id="rId24"/>
   </p:sldIdLst>
   <p:notesMasterIdLst>
-    <p:notesMasterId r:id="rId18"/>
+    <p:notesMasterId r:id="rId25"/>
   </p:notesMasterIdLst>
   <p:sldSz cx="9144000" cy="5143500"/>
   <p:notesSz cx="5143500" cy="9144000"/>
@@ -122,17 +129,17 @@
   <p:extLst>
     <p:ext uri="{521415D9-36F7-43E2-AB2F-B90AF26B5E84}">
       <p14:sectionLst xmlns:p14="http://schemas.microsoft.com/office/powerpoint/2010/main">
-        <p14:section name="Portada" id="{dcef1fa8-997c-0e7e-d170-9acc98343e44}">
+        <p14:section name="Portada" id="{4d07f2ee-60b2-9bbe-cadf-c67047fe17c8}">
           <p14:sldIdLst>
             <p14:sldId id="256"/>
           </p14:sldIdLst>
         </p14:section>
-        <p14:section name="Agenda" id="{9114e0d2-ca5d-be9f-f047-e91fef5dd703}">
+        <p14:section name="Agenda" id="{7de62346-ada3-3b94-0f72-6d5d1088a425}">
           <p14:sldIdLst>
             <p14:sldId id="257"/>
           </p14:sldIdLst>
         </p14:section>
-        <p14:section name="Implementaciones" id="{7dbdc8ba-7c18-c705-a0d3-3c2b70bf7422}">
+        <p14:section name="Implementaciones" id="{c09685fa-552a-8ebe-71c0-614f98ab79c5}">
           <p14:sldIdLst>
             <p14:sldId id="258"/>
             <p14:sldId id="259"/>
@@ -140,20 +147,20 @@
             <p14:sldId id="261"/>
           </p14:sldIdLst>
         </p14:section>
-        <p14:section name="Decisiones de Diseno" id="{161745a9-40a2-8ae1-9290-532436ae3aa4}">
+        <p14:section name="Decisiones de Diseno" id="{35dcc64c-8e82-1a11-1f4c-c79de774fced}">
           <p14:sldIdLst>
             <p14:sldId id="262"/>
             <p14:sldId id="263"/>
             <p14:sldId id="264"/>
           </p14:sldIdLst>
         </p14:section>
-        <p14:section name="Entorno" id="{dfe858fa-6927-83cf-d263-7190d22a9314}">
+        <p14:section name="Entorno" id="{a4f08b2e-56b7-4f02-7e33-8468e5457a21}">
           <p14:sldIdLst>
             <p14:sldId id="265"/>
             <p14:sldId id="266"/>
           </p14:sldIdLst>
         </p14:section>
-        <p14:section name="Resultados" id="{51f9cfa5-df49-5448-454a-aa4f367f8fcb}">
+        <p14:section name="Resultados" id="{53c46773-2d0b-6ffd-2ff1-177dcd597fd5}">
           <p14:sldIdLst>
             <p14:sldId id="267"/>
             <p14:sldId id="268"/>
@@ -161,9 +168,20 @@
             <p14:sldId id="270"/>
           </p14:sldIdLst>
         </p14:section>
-        <p14:section name="Conclusiones" id="{97ce0a30-a967-e676-3f56-283f7673e582}">
+        <p14:section name="Analisis Estadistico" id="{83462947-2403-c2a8-9616-a796589c1e57}">
           <p14:sldIdLst>
             <p14:sldId id="271"/>
+            <p14:sldId id="272"/>
+            <p14:sldId id="273"/>
+            <p14:sldId id="274"/>
+            <p14:sldId id="275"/>
+            <p14:sldId id="276"/>
+            <p14:sldId id="277"/>
+          </p14:sldIdLst>
+        </p14:section>
+        <p14:section name="Conclusiones" id="{67ad65ed-e7aa-5994-0c2b-004b6692eda8}">
+          <p14:sldIdLst>
+            <p14:sldId id="278"/>
           </p14:sldIdLst>
         </p14:section>
       </p14:sectionLst>
@@ -1721,7 +1739,7 @@
           <a:p>
             <a:r>
               <a:rPr lang="en-US" dirty="0"/>
-              <a:t>Cerrar con las conclusiones principales y anticipar las próximas semanas: análisis estadístico formal.</a:t>
+              <a:t/>
             </a:r>
             <a:endParaRPr lang="en-US" dirty="0"/>
           </a:p>
@@ -1745,6 +1763,270 @@
             <a:fld id="{F7021451-1387-4CA6-816F-3879F97B5CBC}" type="slidenum">
               <a:rPr lang="en-US"/>
               <a:t>16</a:t>
+            </a:fld>
+            <a:endParaRPr lang="en-US"/>
+          </a:p>
+        </p:txBody>
+      </p:sp>
+    </p:spTree>
+    <p:extLst>
+      <p:ext uri="{BB962C8B-B14F-4D97-AF65-F5344CB8AC3E}">
+        <p14:creationId xmlns:p14="http://schemas.microsoft.com/office/powerpoint/2010/main" val="1024086991"/>
+      </p:ext>
+    </p:extLst>
+  </p:cSld>
+  <p:clrMapOvr>
+    <a:masterClrMapping/>
+  </p:clrMapOvr>
+</p:notes>
+</file>
+
+<file path=ppt/notesSlides/notesSlide17.xml><?xml version="1.0" encoding="utf-8"?>
+<p:notes xmlns:a="http://schemas.openxmlformats.org/drawingml/2006/main" xmlns:r="http://schemas.openxmlformats.org/officeDocument/2006/relationships" xmlns:p="http://schemas.openxmlformats.org/presentationml/2006/main">
+  <p:cSld>
+    <p:spTree>
+      <p:nvGrpSpPr>
+        <p:cNvPr id="1" name=""/>
+        <p:cNvGrpSpPr/>
+        <p:nvPr/>
+      </p:nvGrpSpPr>
+      <p:grpSpPr>
+        <a:xfrm>
+          <a:off x="0" y="0"/>
+          <a:ext cx="0" cy="0"/>
+          <a:chOff x="0" y="0"/>
+          <a:chExt cx="0" cy="0"/>
+        </a:xfrm>
+      </p:grpSpPr>
+      <p:sp>
+        <p:nvSpPr>
+          <p:cNvPr id="2" name="Slide Image Placeholder 1"/>
+          <p:cNvSpPr>
+            <a:spLocks noGrp="1" noRot="1" noChangeAspect="1"/>
+          </p:cNvSpPr>
+          <p:nvPr>
+            <p:ph type="sldImg"/>
+          </p:nvPr>
+        </p:nvSpPr>
+        <p:spPr/>
+      </p:sp>
+      <p:sp>
+        <p:nvSpPr>
+          <p:cNvPr id="3" name="Notes Placeholder 2"/>
+          <p:cNvSpPr>
+            <a:spLocks noGrp="1"/>
+          </p:cNvSpPr>
+          <p:nvPr>
+            <p:ph type="body" idx="1"/>
+          </p:nvPr>
+        </p:nvSpPr>
+        <p:spPr/>
+        <p:txBody>
+          <a:bodyPr/>
+          <a:lstStyle/>
+          <a:p>
+            <a:r>
+              <a:rPr lang="en-US" dirty="0"/>
+              <a:t>Gráfico de barras con barras de error (media ± desviación estándar). Python domina por tiempos muy superiores. Go y Java son competitivos.</a:t>
+            </a:r>
+            <a:endParaRPr lang="en-US" dirty="0"/>
+          </a:p>
+        </p:txBody>
+      </p:sp>
+      <p:sp>
+        <p:nvSpPr>
+          <p:cNvPr id="4" name="Slide Number Placeholder 3"/>
+          <p:cNvSpPr>
+            <a:spLocks noGrp="1"/>
+          </p:cNvSpPr>
+          <p:nvPr>
+            <p:ph type="sldNum" sz="quarter" idx="10"/>
+          </p:nvPr>
+        </p:nvSpPr>
+        <p:spPr/>
+        <p:txBody>
+          <a:bodyPr/>
+          <a:lstStyle/>
+          <a:p>
+            <a:fld id="{F7021451-1387-4CA6-816F-3879F97B5CBC}" type="slidenum">
+              <a:rPr lang="en-US"/>
+              <a:t>17</a:t>
+            </a:fld>
+            <a:endParaRPr lang="en-US"/>
+          </a:p>
+        </p:txBody>
+      </p:sp>
+    </p:spTree>
+    <p:extLst>
+      <p:ext uri="{BB962C8B-B14F-4D97-AF65-F5344CB8AC3E}">
+        <p14:creationId xmlns:p14="http://schemas.microsoft.com/office/powerpoint/2010/main" val="1024086991"/>
+      </p:ext>
+    </p:extLst>
+  </p:cSld>
+  <p:clrMapOvr>
+    <a:masterClrMapping/>
+  </p:clrMapOvr>
+</p:notes>
+</file>
+
+<file path=ppt/notesSlides/notesSlide18.xml><?xml version="1.0" encoding="utf-8"?>
+<p:notes xmlns:a="http://schemas.openxmlformats.org/drawingml/2006/main" xmlns:r="http://schemas.openxmlformats.org/officeDocument/2006/relationships" xmlns:p="http://schemas.openxmlformats.org/presentationml/2006/main">
+  <p:cSld>
+    <p:spTree>
+      <p:nvGrpSpPr>
+        <p:cNvPr id="1" name=""/>
+        <p:cNvGrpSpPr/>
+        <p:nvPr/>
+      </p:nvGrpSpPr>
+      <p:grpSpPr>
+        <a:xfrm>
+          <a:off x="0" y="0"/>
+          <a:ext cx="0" cy="0"/>
+          <a:chOff x="0" y="0"/>
+          <a:chExt cx="0" cy="0"/>
+        </a:xfrm>
+      </p:grpSpPr>
+      <p:sp>
+        <p:nvSpPr>
+          <p:cNvPr id="2" name="Slide Image Placeholder 1"/>
+          <p:cNvSpPr>
+            <a:spLocks noGrp="1" noRot="1" noChangeAspect="1"/>
+          </p:cNvSpPr>
+          <p:nvPr>
+            <p:ph type="sldImg"/>
+          </p:nvPr>
+        </p:nvSpPr>
+        <p:spPr/>
+      </p:sp>
+      <p:sp>
+        <p:nvSpPr>
+          <p:cNvPr id="3" name="Notes Placeholder 2"/>
+          <p:cNvSpPr>
+            <a:spLocks noGrp="1"/>
+          </p:cNvSpPr>
+          <p:nvPr>
+            <p:ph type="body" idx="1"/>
+          </p:nvPr>
+        </p:nvSpPr>
+        <p:spPr/>
+        <p:txBody>
+          <a:bodyPr/>
+          <a:lstStyle/>
+          <a:p>
+            <a:r>
+              <a:rPr lang="en-US" dirty="0"/>
+              <a:t>Boxplots separados por tamaño de matriz. Se observa baja variabilidad y outliers mínimos.</a:t>
+            </a:r>
+            <a:endParaRPr lang="en-US" dirty="0"/>
+          </a:p>
+        </p:txBody>
+      </p:sp>
+      <p:sp>
+        <p:nvSpPr>
+          <p:cNvPr id="4" name="Slide Number Placeholder 3"/>
+          <p:cNvSpPr>
+            <a:spLocks noGrp="1"/>
+          </p:cNvSpPr>
+          <p:nvPr>
+            <p:ph type="sldNum" sz="quarter" idx="10"/>
+          </p:nvPr>
+        </p:nvSpPr>
+        <p:spPr/>
+        <p:txBody>
+          <a:bodyPr/>
+          <a:lstStyle/>
+          <a:p>
+            <a:fld id="{F7021451-1387-4CA6-816F-3879F97B5CBC}" type="slidenum">
+              <a:rPr lang="en-US"/>
+              <a:t>18</a:t>
+            </a:fld>
+            <a:endParaRPr lang="en-US"/>
+          </a:p>
+        </p:txBody>
+      </p:sp>
+    </p:spTree>
+    <p:extLst>
+      <p:ext uri="{BB962C8B-B14F-4D97-AF65-F5344CB8AC3E}">
+        <p14:creationId xmlns:p14="http://schemas.microsoft.com/office/powerpoint/2010/main" val="1024086991"/>
+      </p:ext>
+    </p:extLst>
+  </p:cSld>
+  <p:clrMapOvr>
+    <a:masterClrMapping/>
+  </p:clrMapOvr>
+</p:notes>
+</file>
+
+<file path=ppt/notesSlides/notesSlide19.xml><?xml version="1.0" encoding="utf-8"?>
+<p:notes xmlns:a="http://schemas.openxmlformats.org/drawingml/2006/main" xmlns:r="http://schemas.openxmlformats.org/officeDocument/2006/relationships" xmlns:p="http://schemas.openxmlformats.org/presentationml/2006/main">
+  <p:cSld>
+    <p:spTree>
+      <p:nvGrpSpPr>
+        <p:cNvPr id="1" name=""/>
+        <p:cNvGrpSpPr/>
+        <p:nvPr/>
+      </p:nvGrpSpPr>
+      <p:grpSpPr>
+        <a:xfrm>
+          <a:off x="0" y="0"/>
+          <a:ext cx="0" cy="0"/>
+          <a:chOff x="0" y="0"/>
+          <a:chExt cx="0" cy="0"/>
+        </a:xfrm>
+      </p:grpSpPr>
+      <p:sp>
+        <p:nvSpPr>
+          <p:cNvPr id="2" name="Slide Image Placeholder 1"/>
+          <p:cNvSpPr>
+            <a:spLocks noGrp="1" noRot="1" noChangeAspect="1"/>
+          </p:cNvSpPr>
+          <p:nvPr>
+            <p:ph type="sldImg"/>
+          </p:nvPr>
+        </p:nvSpPr>
+        <p:spPr/>
+      </p:sp>
+      <p:sp>
+        <p:nvSpPr>
+          <p:cNvPr id="3" name="Notes Placeholder 2"/>
+          <p:cNvSpPr>
+            <a:spLocks noGrp="1"/>
+          </p:cNvSpPr>
+          <p:nvPr>
+            <p:ph type="body" idx="1"/>
+          </p:nvPr>
+        </p:nvSpPr>
+        <p:spPr/>
+        <p:txBody>
+          <a:bodyPr/>
+          <a:lstStyle/>
+          <a:p>
+            <a:r>
+              <a:rPr lang="en-US" dirty="0"/>
+              <a:t>El gráfico de interacción muestra que las curvas NO son paralelas: la brecha entre Python y los demás se amplifica con N. Esto confirma interacción significativa entre factores.</a:t>
+            </a:r>
+            <a:endParaRPr lang="en-US" dirty="0"/>
+          </a:p>
+        </p:txBody>
+      </p:sp>
+      <p:sp>
+        <p:nvSpPr>
+          <p:cNvPr id="4" name="Slide Number Placeholder 3"/>
+          <p:cNvSpPr>
+            <a:spLocks noGrp="1"/>
+          </p:cNvSpPr>
+          <p:nvPr>
+            <p:ph type="sldNum" sz="quarter" idx="10"/>
+          </p:nvPr>
+        </p:nvSpPr>
+        <p:spPr/>
+        <p:txBody>
+          <a:bodyPr/>
+          <a:lstStyle/>
+          <a:p>
+            <a:fld id="{F7021451-1387-4CA6-816F-3879F97B5CBC}" type="slidenum">
+              <a:rPr lang="en-US"/>
+              <a:t>19</a:t>
             </a:fld>
             <a:endParaRPr lang="en-US"/>
           </a:p>
@@ -1833,6 +2115,358 @@
             <a:fld id="{F7021451-1387-4CA6-816F-3879F97B5CBC}" type="slidenum">
               <a:rPr lang="en-US"/>
               <a:t>2</a:t>
+            </a:fld>
+            <a:endParaRPr lang="en-US"/>
+          </a:p>
+        </p:txBody>
+      </p:sp>
+    </p:spTree>
+    <p:extLst>
+      <p:ext uri="{BB962C8B-B14F-4D97-AF65-F5344CB8AC3E}">
+        <p14:creationId xmlns:p14="http://schemas.microsoft.com/office/powerpoint/2010/main" val="1024086991"/>
+      </p:ext>
+    </p:extLst>
+  </p:cSld>
+  <p:clrMapOvr>
+    <a:masterClrMapping/>
+  </p:clrMapOvr>
+</p:notes>
+</file>
+
+<file path=ppt/notesSlides/notesSlide20.xml><?xml version="1.0" encoding="utf-8"?>
+<p:notes xmlns:a="http://schemas.openxmlformats.org/drawingml/2006/main" xmlns:r="http://schemas.openxmlformats.org/officeDocument/2006/relationships" xmlns:p="http://schemas.openxmlformats.org/presentationml/2006/main">
+  <p:cSld>
+    <p:spTree>
+      <p:nvGrpSpPr>
+        <p:cNvPr id="1" name=""/>
+        <p:cNvGrpSpPr/>
+        <p:nvPr/>
+      </p:nvGrpSpPr>
+      <p:grpSpPr>
+        <a:xfrm>
+          <a:off x="0" y="0"/>
+          <a:ext cx="0" cy="0"/>
+          <a:chOff x="0" y="0"/>
+          <a:chExt cx="0" cy="0"/>
+        </a:xfrm>
+      </p:grpSpPr>
+      <p:sp>
+        <p:nvSpPr>
+          <p:cNvPr id="2" name="Slide Image Placeholder 1"/>
+          <p:cNvSpPr>
+            <a:spLocks noGrp="1" noRot="1" noChangeAspect="1"/>
+          </p:cNvSpPr>
+          <p:nvPr>
+            <p:ph type="sldImg"/>
+          </p:nvPr>
+        </p:nvSpPr>
+        <p:spPr/>
+      </p:sp>
+      <p:sp>
+        <p:nvSpPr>
+          <p:cNvPr id="3" name="Notes Placeholder 2"/>
+          <p:cNvSpPr>
+            <a:spLocks noGrp="1"/>
+          </p:cNvSpPr>
+          <p:nvPr>
+            <p:ph type="body" idx="1"/>
+          </p:nvPr>
+        </p:nvSpPr>
+        <p:spPr/>
+        <p:txBody>
+          <a:bodyPr/>
+          <a:lstStyle/>
+          <a:p>
+            <a:r>
+              <a:rPr lang="en-US" dirty="0"/>
+              <a:t>Izquierda: mapa de calor con tiempos absolutos. Derecha: speedup relativo a Python. Java alcanza 48x en N=500 pero baja a 12x en N=1500.</a:t>
+            </a:r>
+            <a:endParaRPr lang="en-US" dirty="0"/>
+          </a:p>
+        </p:txBody>
+      </p:sp>
+      <p:sp>
+        <p:nvSpPr>
+          <p:cNvPr id="4" name="Slide Number Placeholder 3"/>
+          <p:cNvSpPr>
+            <a:spLocks noGrp="1"/>
+          </p:cNvSpPr>
+          <p:nvPr>
+            <p:ph type="sldNum" sz="quarter" idx="10"/>
+          </p:nvPr>
+        </p:nvSpPr>
+        <p:spPr/>
+        <p:txBody>
+          <a:bodyPr/>
+          <a:lstStyle/>
+          <a:p>
+            <a:fld id="{F7021451-1387-4CA6-816F-3879F97B5CBC}" type="slidenum">
+              <a:rPr lang="en-US"/>
+              <a:t>20</a:t>
+            </a:fld>
+            <a:endParaRPr lang="en-US"/>
+          </a:p>
+        </p:txBody>
+      </p:sp>
+    </p:spTree>
+    <p:extLst>
+      <p:ext uri="{BB962C8B-B14F-4D97-AF65-F5344CB8AC3E}">
+        <p14:creationId xmlns:p14="http://schemas.microsoft.com/office/powerpoint/2010/main" val="1024086991"/>
+      </p:ext>
+    </p:extLst>
+  </p:cSld>
+  <p:clrMapOvr>
+    <a:masterClrMapping/>
+  </p:clrMapOvr>
+</p:notes>
+</file>
+
+<file path=ppt/notesSlides/notesSlide21.xml><?xml version="1.0" encoding="utf-8"?>
+<p:notes xmlns:a="http://schemas.openxmlformats.org/drawingml/2006/main" xmlns:r="http://schemas.openxmlformats.org/officeDocument/2006/relationships" xmlns:p="http://schemas.openxmlformats.org/presentationml/2006/main">
+  <p:cSld>
+    <p:spTree>
+      <p:nvGrpSpPr>
+        <p:cNvPr id="1" name=""/>
+        <p:cNvGrpSpPr/>
+        <p:nvPr/>
+      </p:nvGrpSpPr>
+      <p:grpSpPr>
+        <a:xfrm>
+          <a:off x="0" y="0"/>
+          <a:ext cx="0" cy="0"/>
+          <a:chOff x="0" y="0"/>
+          <a:chExt cx="0" cy="0"/>
+        </a:xfrm>
+      </p:grpSpPr>
+      <p:sp>
+        <p:nvSpPr>
+          <p:cNvPr id="2" name="Slide Image Placeholder 1"/>
+          <p:cNvSpPr>
+            <a:spLocks noGrp="1" noRot="1" noChangeAspect="1"/>
+          </p:cNvSpPr>
+          <p:nvPr>
+            <p:ph type="sldImg"/>
+          </p:nvPr>
+        </p:nvSpPr>
+        <p:spPr/>
+      </p:sp>
+      <p:sp>
+        <p:nvSpPr>
+          <p:cNvPr id="3" name="Notes Placeholder 2"/>
+          <p:cNvSpPr>
+            <a:spLocks noGrp="1"/>
+          </p:cNvSpPr>
+          <p:nvPr>
+            <p:ph type="body" idx="1"/>
+          </p:nvPr>
+        </p:nvSpPr>
+        <p:spPr/>
+        <p:txBody>
+          <a:bodyPr/>
+          <a:lstStyle/>
+          <a:p>
+            <a:r>
+              <a:rPr lang="en-US" dirty="0"/>
+              <a:t>ANOVA de dos factores: los tres efectos son significativos. Se rechaza H₀. El efecto de interacción indica que las diferencias entre lenguajes cambian según N.</a:t>
+            </a:r>
+            <a:endParaRPr lang="en-US" dirty="0"/>
+          </a:p>
+        </p:txBody>
+      </p:sp>
+      <p:sp>
+        <p:nvSpPr>
+          <p:cNvPr id="4" name="Slide Number Placeholder 3"/>
+          <p:cNvSpPr>
+            <a:spLocks noGrp="1"/>
+          </p:cNvSpPr>
+          <p:nvPr>
+            <p:ph type="sldNum" sz="quarter" idx="10"/>
+          </p:nvPr>
+        </p:nvSpPr>
+        <p:spPr/>
+        <p:txBody>
+          <a:bodyPr/>
+          <a:lstStyle/>
+          <a:p>
+            <a:fld id="{F7021451-1387-4CA6-816F-3879F97B5CBC}" type="slidenum">
+              <a:rPr lang="en-US"/>
+              <a:t>21</a:t>
+            </a:fld>
+            <a:endParaRPr lang="en-US"/>
+          </a:p>
+        </p:txBody>
+      </p:sp>
+    </p:spTree>
+    <p:extLst>
+      <p:ext uri="{BB962C8B-B14F-4D97-AF65-F5344CB8AC3E}">
+        <p14:creationId xmlns:p14="http://schemas.microsoft.com/office/powerpoint/2010/main" val="1024086991"/>
+      </p:ext>
+    </p:extLst>
+  </p:cSld>
+  <p:clrMapOvr>
+    <a:masterClrMapping/>
+  </p:clrMapOvr>
+</p:notes>
+</file>
+
+<file path=ppt/notesSlides/notesSlide22.xml><?xml version="1.0" encoding="utf-8"?>
+<p:notes xmlns:a="http://schemas.openxmlformats.org/drawingml/2006/main" xmlns:r="http://schemas.openxmlformats.org/officeDocument/2006/relationships" xmlns:p="http://schemas.openxmlformats.org/presentationml/2006/main">
+  <p:cSld>
+    <p:spTree>
+      <p:nvGrpSpPr>
+        <p:cNvPr id="1" name=""/>
+        <p:cNvGrpSpPr/>
+        <p:nvPr/>
+      </p:nvGrpSpPr>
+      <p:grpSpPr>
+        <a:xfrm>
+          <a:off x="0" y="0"/>
+          <a:ext cx="0" cy="0"/>
+          <a:chOff x="0" y="0"/>
+          <a:chExt cx="0" cy="0"/>
+        </a:xfrm>
+      </p:grpSpPr>
+      <p:sp>
+        <p:nvSpPr>
+          <p:cNvPr id="2" name="Slide Image Placeholder 1"/>
+          <p:cNvSpPr>
+            <a:spLocks noGrp="1" noRot="1" noChangeAspect="1"/>
+          </p:cNvSpPr>
+          <p:nvPr>
+            <p:ph type="sldImg"/>
+          </p:nvPr>
+        </p:nvSpPr>
+        <p:spPr/>
+      </p:sp>
+      <p:sp>
+        <p:nvSpPr>
+          <p:cNvPr id="3" name="Notes Placeholder 2"/>
+          <p:cNvSpPr>
+            <a:spLocks noGrp="1"/>
+          </p:cNvSpPr>
+          <p:nvPr>
+            <p:ph type="body" idx="1"/>
+          </p:nvPr>
+        </p:nvSpPr>
+        <p:spPr/>
+        <p:txBody>
+          <a:bodyPr/>
+          <a:lstStyle/>
+          <a:p>
+            <a:r>
+              <a:rPr lang="en-US" dirty="0"/>
+              <a:t>Tukey HSD: C++, Go y Java forman un grupo homogéneo. Python es significativamente diferente de los tres.</a:t>
+            </a:r>
+            <a:endParaRPr lang="en-US" dirty="0"/>
+          </a:p>
+        </p:txBody>
+      </p:sp>
+      <p:sp>
+        <p:nvSpPr>
+          <p:cNvPr id="4" name="Slide Number Placeholder 3"/>
+          <p:cNvSpPr>
+            <a:spLocks noGrp="1"/>
+          </p:cNvSpPr>
+          <p:nvPr>
+            <p:ph type="sldNum" sz="quarter" idx="10"/>
+          </p:nvPr>
+        </p:nvSpPr>
+        <p:spPr/>
+        <p:txBody>
+          <a:bodyPr/>
+          <a:lstStyle/>
+          <a:p>
+            <a:fld id="{F7021451-1387-4CA6-816F-3879F97B5CBC}" type="slidenum">
+              <a:rPr lang="en-US"/>
+              <a:t>22</a:t>
+            </a:fld>
+            <a:endParaRPr lang="en-US"/>
+          </a:p>
+        </p:txBody>
+      </p:sp>
+    </p:spTree>
+    <p:extLst>
+      <p:ext uri="{BB962C8B-B14F-4D97-AF65-F5344CB8AC3E}">
+        <p14:creationId xmlns:p14="http://schemas.microsoft.com/office/powerpoint/2010/main" val="1024086991"/>
+      </p:ext>
+    </p:extLst>
+  </p:cSld>
+  <p:clrMapOvr>
+    <a:masterClrMapping/>
+  </p:clrMapOvr>
+</p:notes>
+</file>
+
+<file path=ppt/notesSlides/notesSlide23.xml><?xml version="1.0" encoding="utf-8"?>
+<p:notes xmlns:a="http://schemas.openxmlformats.org/drawingml/2006/main" xmlns:r="http://schemas.openxmlformats.org/officeDocument/2006/relationships" xmlns:p="http://schemas.openxmlformats.org/presentationml/2006/main">
+  <p:cSld>
+    <p:spTree>
+      <p:nvGrpSpPr>
+        <p:cNvPr id="1" name=""/>
+        <p:cNvGrpSpPr/>
+        <p:nvPr/>
+      </p:nvGrpSpPr>
+      <p:grpSpPr>
+        <a:xfrm>
+          <a:off x="0" y="0"/>
+          <a:ext cx="0" cy="0"/>
+          <a:chOff x="0" y="0"/>
+          <a:chExt cx="0" cy="0"/>
+        </a:xfrm>
+      </p:grpSpPr>
+      <p:sp>
+        <p:nvSpPr>
+          <p:cNvPr id="2" name="Slide Image Placeholder 1"/>
+          <p:cNvSpPr>
+            <a:spLocks noGrp="1" noRot="1" noChangeAspect="1"/>
+          </p:cNvSpPr>
+          <p:nvPr>
+            <p:ph type="sldImg"/>
+          </p:nvPr>
+        </p:nvSpPr>
+        <p:spPr/>
+      </p:sp>
+      <p:sp>
+        <p:nvSpPr>
+          <p:cNvPr id="3" name="Notes Placeholder 2"/>
+          <p:cNvSpPr>
+            <a:spLocks noGrp="1"/>
+          </p:cNvSpPr>
+          <p:nvPr>
+            <p:ph type="body" idx="1"/>
+          </p:nvPr>
+        </p:nvSpPr>
+        <p:spPr/>
+        <p:txBody>
+          <a:bodyPr/>
+          <a:lstStyle/>
+          <a:p>
+            <a:r>
+              <a:rPr lang="en-US" dirty="0"/>
+              <a:t>Conclusiones finales: H₀ rechazada. Python significativamente más lento. C++/Go/Java sin diferencias significativas colapsando N. Experimento reproducible y estable.</a:t>
+            </a:r>
+            <a:endParaRPr lang="en-US" dirty="0"/>
+          </a:p>
+        </p:txBody>
+      </p:sp>
+      <p:sp>
+        <p:nvSpPr>
+          <p:cNvPr id="4" name="Slide Number Placeholder 3"/>
+          <p:cNvSpPr>
+            <a:spLocks noGrp="1"/>
+          </p:cNvSpPr>
+          <p:nvPr>
+            <p:ph type="sldNum" sz="quarter" idx="10"/>
+          </p:nvPr>
+        </p:nvSpPr>
+        <p:spPr/>
+        <p:txBody>
+          <a:bodyPr/>
+          <a:lstStyle/>
+          <a:p>
+            <a:fld id="{F7021451-1387-4CA6-816F-3879F97B5CBC}" type="slidenum">
+              <a:rPr lang="en-US"/>
+              <a:t>23</a:t>
             </a:fld>
             <a:endParaRPr lang="en-US"/>
           </a:p>
@@ -6813,8 +7447,8 @@
         </p:nvSpPr>
         <p:spPr>
           <a:xfrm>
-            <a:off x="457200" y="365760"/>
-            <a:ext cx="8229600" cy="640080"/>
+            <a:off x="457200" y="1371600"/>
+            <a:ext cx="1828800" cy="640080"/>
           </a:xfrm>
           <a:prstGeom prst="rect">
             <a:avLst/>
@@ -6830,14 +7464,14 @@
               <a:buNone/>
             </a:pPr>
             <a:r>
-              <a:rPr lang="en-US" sz="3400" b="1" dirty="0">
+              <a:rPr lang="en-US" sz="4800" b="1" dirty="0">
                 <a:solidFill>
                   <a:srgbClr val="FFFFFF"/>
                 </a:solidFill>
               </a:rPr>
-              <a:t>Conclusiones y Próximos Pasos</a:t>
-            </a:r>
-            <a:endParaRPr lang="en-US" sz="3400" dirty="0"/>
+              <a:t>05</a:t>
+            </a:r>
+            <a:endParaRPr lang="en-US" sz="4800" dirty="0"/>
           </a:p>
         </p:txBody>
       </p:sp>
@@ -6849,8 +7483,8 @@
         </p:nvSpPr>
         <p:spPr>
           <a:xfrm>
-            <a:off x="457200" y="1371600"/>
-            <a:ext cx="3931920" cy="2926080"/>
+            <a:off x="457200" y="2926080"/>
+            <a:ext cx="7315200" cy="1097280"/>
           </a:xfrm>
           <a:prstGeom prst="rect">
             <a:avLst/>
@@ -6866,173 +7500,28 @@
               <a:buNone/>
             </a:pPr>
             <a:r>
-              <a:rPr lang="en-US" sz="1800" b="1" dirty="0">
-                <a:solidFill>
-                  <a:srgbClr val="1C7293"/>
-                </a:solidFill>
-              </a:rPr>
-              <a:t>Conclusiones
-</a:t>
-            </a:r>
-            <a:endParaRPr lang="en-US" sz="1800" dirty="0"/>
-          </a:p>
-          <a:p>
-            <a:pPr indent="0" marL="0">
-              <a:buNone/>
-            </a:pPr>
-            <a:r>
-              <a:rPr lang="en-US" sz="1300" dirty="0">
+              <a:rPr lang="en-US" sz="3200" b="1" dirty="0">
                 <a:solidFill>
                   <a:srgbClr val="FFFFFF"/>
                 </a:solidFill>
               </a:rPr>
-              <a:t>Las 4 implementaciones producen
-resultados numéricamente idénticos
-</a:t>
-            </a:r>
-            <a:endParaRPr lang="en-US" sz="1800" dirty="0"/>
-          </a:p>
-          <a:p>
-            <a:pPr indent="0" marL="0">
-              <a:buNone/>
-            </a:pPr>
-            <a:r>
-              <a:rPr lang="en-US" sz="1300" dirty="0">
+              <a:t>Análisis</a:t>
+            </a:r>
+            <a:endParaRPr lang="en-US" sz="3200" dirty="0"/>
+          </a:p>
+          <a:p>
+            <a:pPr indent="0" marL="0">
+              <a:buNone/>
+            </a:pPr>
+            <a:r>
+              <a:rPr lang="en-US" sz="3200" b="1" dirty="0">
                 <a:solidFill>
                   <a:srgbClr val="FFFFFF"/>
                 </a:solidFill>
               </a:rPr>
-              <a:t>Las diferencias de rendimiento se
-deben exclusivamente al runtime
-de cada lenguaje
-</a:t>
-            </a:r>
-            <a:endParaRPr lang="en-US" sz="1800" dirty="0"/>
-          </a:p>
-          <a:p>
-            <a:pPr indent="0" marL="0">
-              <a:buNone/>
-            </a:pPr>
-            <a:r>
-              <a:rPr lang="en-US" sz="1300" dirty="0">
-                <a:solidFill>
-                  <a:srgbClr val="EAF0F6"/>
-                </a:solidFill>
-              </a:rPr>
-              <a:t>Diseño experimental controlado</a:t>
-            </a:r>
-            <a:endParaRPr lang="en-US" sz="1800" dirty="0"/>
-          </a:p>
-          <a:p>
-            <a:pPr indent="0" marL="0">
-              <a:buNone/>
-            </a:pPr>
-            <a:r>
-              <a:rPr lang="en-US" sz="1300" dirty="0">
-                <a:solidFill>
-                  <a:srgbClr val="EAF0F6"/>
-                </a:solidFill>
-              </a:rPr>
-              <a:t>(Docker, LCG, -O0, medición aíslada)</a:t>
-            </a:r>
-            <a:endParaRPr lang="en-US" sz="1800" dirty="0"/>
-          </a:p>
-        </p:txBody>
-      </p:sp>
-      <p:sp>
-        <p:nvSpPr>
-          <p:cNvPr id="4" name="Text 2"/>
-          <p:cNvSpPr txBox="1"/>
-          <p:nvPr/>
-        </p:nvSpPr>
-        <p:spPr>
-          <a:xfrm>
-            <a:off x="4754880" y="1371600"/>
-            <a:ext cx="3931920" cy="2926080"/>
-          </a:xfrm>
-          <a:prstGeom prst="rect">
-            <a:avLst/>
-          </a:prstGeom>
-          <a:noFill/>
-          <a:ln/>
-        </p:spPr>
-        <p:txBody>
-          <a:bodyPr wrap="square" lIns="0" tIns="0" rIns="0" bIns="0" rtlCol="0" anchor="ctr"/>
-          <a:lstStyle/>
-          <a:p>
-            <a:pPr indent="0" marL="0">
-              <a:buNone/>
-            </a:pPr>
-            <a:r>
-              <a:rPr lang="en-US" sz="1800" b="1" dirty="0">
-                <a:solidFill>
-                  <a:srgbClr val="1C7293"/>
-                </a:solidFill>
-              </a:rPr>
-              <a:t>Próximos pasos
-</a:t>
-            </a:r>
-            <a:endParaRPr lang="en-US" sz="1800" dirty="0"/>
-          </a:p>
-          <a:p>
-            <a:pPr indent="0" marL="0">
-              <a:buNone/>
-            </a:pPr>
-            <a:r>
-              <a:rPr lang="en-US" sz="1300" dirty="0">
-                <a:solidFill>
-                  <a:srgbClr val="FFFFFF"/>
-                </a:solidFill>
-              </a:rPr>
-              <a:t>ANOVA de dos factores con
-interacción (lenguaje × tamaño)
-</a:t>
-            </a:r>
-            <a:endParaRPr lang="en-US" sz="1800" dirty="0"/>
-          </a:p>
-          <a:p>
-            <a:pPr indent="0" marL="0">
-              <a:buNone/>
-            </a:pPr>
-            <a:r>
-              <a:rPr lang="en-US" sz="1300" dirty="0">
-                <a:solidFill>
-                  <a:srgbClr val="FFFFFF"/>
-                </a:solidFill>
-              </a:rPr>
-              <a:t>Comparaciones post-hoc
-Tukey HSD
-</a:t>
-            </a:r>
-            <a:endParaRPr lang="en-US" sz="1800" dirty="0"/>
-          </a:p>
-          <a:p>
-            <a:pPr indent="0" marL="0">
-              <a:buNone/>
-            </a:pPr>
-            <a:r>
-              <a:rPr lang="en-US" sz="1300" dirty="0">
-                <a:solidFill>
-                  <a:srgbClr val="EAF0F6"/>
-                </a:solidFill>
-              </a:rPr>
-              <a:t>Validar hipótesis H₀ / H₁</a:t>
-            </a:r>
-            <a:endParaRPr lang="en-US" sz="1800" dirty="0"/>
-          </a:p>
-          <a:p>
-            <a:pPr indent="0" marL="0">
-              <a:buNone/>
-            </a:pPr>
-            <a:r>
-              <a:rPr lang="en-US" sz="1300" dirty="0">
-                <a:solidFill>
-                  <a:srgbClr val="EAF0F6"/>
-                </a:solidFill>
-              </a:rPr>
-              <a:t>con significancia estadística</a:t>
-            </a:r>
-            <a:endParaRPr lang="en-US" sz="1800" dirty="0"/>
+              <a:t>Estadístico</a:t>
+            </a:r>
+            <a:endParaRPr lang="en-US" sz="3200" dirty="0"/>
           </a:p>
         </p:txBody>
       </p:sp>
@@ -7076,6 +7565,443 @@
             <a:fld id="{F7021451-1387-4CA6-816F-3879F97B5CBC}" type="slidenum">
               <a:rPr b="0" lang="en-US"/>
               <a:t>16</a:t>
+            </a:fld>
+            <a:endParaRPr lang="en-US"/>
+          </a:p>
+        </p:txBody>
+      </p:sp>
+    </p:spTree>
+  </p:cSld>
+  <p:clrMapOvr>
+    <a:masterClrMapping/>
+  </p:clrMapOvr>
+</p:sld>
+</file>
+
+<file path=ppt/slides/slide17.xml><?xml version="1.0" encoding="utf-8"?>
+<p:sld xmlns:a="http://schemas.openxmlformats.org/drawingml/2006/main" xmlns:r="http://schemas.openxmlformats.org/officeDocument/2006/relationships" xmlns:p="http://schemas.openxmlformats.org/presentationml/2006/main">
+  <p:cSld name="Slide 17">
+    <p:spTree>
+      <p:nvGrpSpPr>
+        <p:cNvPr id="1" name=""/>
+        <p:cNvGrpSpPr/>
+        <p:nvPr/>
+      </p:nvGrpSpPr>
+      <p:grpSpPr>
+        <a:xfrm>
+          <a:off x="0" y="0"/>
+          <a:ext cx="0" cy="0"/>
+          <a:chOff x="0" y="0"/>
+          <a:chExt cx="0" cy="0"/>
+        </a:xfrm>
+      </p:grpSpPr>
+      <p:sp>
+        <p:nvSpPr>
+          <p:cNvPr id="2" name="Text 0"/>
+          <p:cNvSpPr txBox="1"/>
+          <p:nvPr/>
+        </p:nvSpPr>
+        <p:spPr>
+          <a:xfrm>
+            <a:off x="457200" y="274320"/>
+            <a:ext cx="8229600" cy="548640"/>
+          </a:xfrm>
+          <a:prstGeom prst="rect">
+            <a:avLst/>
+          </a:prstGeom>
+          <a:noFill/>
+          <a:ln/>
+        </p:spPr>
+        <p:txBody>
+          <a:bodyPr wrap="square" lIns="0" tIns="0" rIns="0" bIns="0" rtlCol="0" anchor="ctr"/>
+          <a:lstStyle/>
+          <a:p>
+            <a:pPr indent="0" marL="0">
+              <a:buNone/>
+            </a:pPr>
+            <a:r>
+              <a:rPr lang="en-US" sz="3400" b="1" dirty="0">
+                <a:solidFill>
+                  <a:srgbClr val="1B2838"/>
+                </a:solidFill>
+              </a:rPr>
+              <a:t>Comparación de Tiempos Promedio</a:t>
+            </a:r>
+            <a:endParaRPr lang="en-US" sz="3400" dirty="0"/>
+          </a:p>
+        </p:txBody>
+      </p:sp>
+      <p:pic>
+        <p:nvPicPr>
+          <p:cNvPr id="3" name="Image 0" descr="/home/claude/matrix-benchmark/results/bar_chart_comparison.png">    </p:cNvPr>
+          <p:cNvPicPr>
+            <a:picLocks noChangeAspect="1"/>
+          </p:cNvPicPr>
+          <p:nvPr/>
+        </p:nvPicPr>
+        <p:blipFill>
+          <a:blip r:embed="rId1"/>
+          <a:stretch>
+            <a:fillRect/>
+          </a:stretch>
+        </p:blipFill>
+        <p:spPr>
+          <a:xfrm>
+            <a:off x="274320" y="914400"/>
+            <a:ext cx="8595360" cy="3749040"/>
+          </a:xfrm>
+          <a:prstGeom prst="rect">
+            <a:avLst/>
+          </a:prstGeom>
+        </p:spPr>
+      </p:pic>
+      <p:sp>
+        <p:nvSpPr>
+          <p:cNvPr id="25" name="Slide Number Placeholder 0"/>
+          <p:cNvSpPr>
+            <a:spLocks noGrp="1"/>
+          </p:cNvSpPr>
+          <p:nvPr>
+            <p:ph type="sldNum" sz="quarter" idx="4294967295"/>
+          </p:nvPr>
+        </p:nvSpPr>
+        <p:spPr>
+          <a:xfrm>
+            <a:off x="8412480" y="4773168"/>
+            <a:ext cx="548640" cy="320040"/>
+          </a:xfrm>
+          <a:prstGeom prst="rect">
+            <a:avLst/>
+          </a:prstGeom>
+          <a:extLst>
+            <a:ext uri="{C572A759-6A51-4108-AA02-DFA0A04FC94B}">
+              <ma14:wrappingTextBoxFlag xmlns:ma14="http://schemas.microsoft.com/office/mac/drawingml/2011/main" val="0"/>
+            </a:ext>
+          </a:extLst>
+        </p:spPr>
+        <p:txBody>
+          <a:bodyPr/>
+          <a:lstStyle>
+            <a:lvl1pPr>
+              <a:defRPr sz="900">
+                <a:solidFill>
+                  <a:srgbClr val="1C7293"/>
+                </a:solidFill>
+              </a:defRPr>
+            </a:lvl1pPr>
+          </a:lstStyle>
+          <a:p>
+            <a:pPr algn="l"/>
+            <a:fld id="{F7021451-1387-4CA6-816F-3879F97B5CBC}" type="slidenum">
+              <a:rPr b="0" lang="en-US"/>
+              <a:t>17</a:t>
+            </a:fld>
+            <a:endParaRPr lang="en-US"/>
+          </a:p>
+        </p:txBody>
+      </p:sp>
+    </p:spTree>
+  </p:cSld>
+  <p:clrMapOvr>
+    <a:masterClrMapping/>
+  </p:clrMapOvr>
+</p:sld>
+</file>
+
+<file path=ppt/slides/slide18.xml><?xml version="1.0" encoding="utf-8"?>
+<p:sld xmlns:a="http://schemas.openxmlformats.org/drawingml/2006/main" xmlns:r="http://schemas.openxmlformats.org/officeDocument/2006/relationships" xmlns:p="http://schemas.openxmlformats.org/presentationml/2006/main">
+  <p:cSld name="Slide 18">
+    <p:spTree>
+      <p:nvGrpSpPr>
+        <p:cNvPr id="1" name=""/>
+        <p:cNvGrpSpPr/>
+        <p:nvPr/>
+      </p:nvGrpSpPr>
+      <p:grpSpPr>
+        <a:xfrm>
+          <a:off x="0" y="0"/>
+          <a:ext cx="0" cy="0"/>
+          <a:chOff x="0" y="0"/>
+          <a:chExt cx="0" cy="0"/>
+        </a:xfrm>
+      </p:grpSpPr>
+      <p:sp>
+        <p:nvSpPr>
+          <p:cNvPr id="2" name="Text 0"/>
+          <p:cNvSpPr txBox="1"/>
+          <p:nvPr/>
+        </p:nvSpPr>
+        <p:spPr>
+          <a:xfrm>
+            <a:off x="457200" y="274320"/>
+            <a:ext cx="8229600" cy="548640"/>
+          </a:xfrm>
+          <a:prstGeom prst="rect">
+            <a:avLst/>
+          </a:prstGeom>
+          <a:noFill/>
+          <a:ln/>
+        </p:spPr>
+        <p:txBody>
+          <a:bodyPr wrap="square" lIns="0" tIns="0" rIns="0" bIns="0" rtlCol="0" anchor="ctr"/>
+          <a:lstStyle/>
+          <a:p>
+            <a:pPr indent="0" marL="0">
+              <a:buNone/>
+            </a:pPr>
+            <a:r>
+              <a:rPr lang="en-US" sz="3400" b="1" dirty="0">
+                <a:solidFill>
+                  <a:srgbClr val="1B2838"/>
+                </a:solidFill>
+              </a:rPr>
+              <a:t>Distribución de Tiempos (Boxplot)</a:t>
+            </a:r>
+            <a:endParaRPr lang="en-US" sz="3400" dirty="0"/>
+          </a:p>
+        </p:txBody>
+      </p:sp>
+      <p:pic>
+        <p:nvPicPr>
+          <p:cNvPr id="3" name="Image 0" descr="/home/claude/matrix-benchmark/results/boxplot_comparison.png">    </p:cNvPr>
+          <p:cNvPicPr>
+            <a:picLocks noChangeAspect="1"/>
+          </p:cNvPicPr>
+          <p:nvPr/>
+        </p:nvPicPr>
+        <p:blipFill>
+          <a:blip r:embed="rId1"/>
+          <a:stretch>
+            <a:fillRect/>
+          </a:stretch>
+        </p:blipFill>
+        <p:spPr>
+          <a:xfrm>
+            <a:off x="182880" y="914400"/>
+            <a:ext cx="8778240" cy="3200400"/>
+          </a:xfrm>
+          <a:prstGeom prst="rect">
+            <a:avLst/>
+          </a:prstGeom>
+        </p:spPr>
+      </p:pic>
+      <p:sp>
+        <p:nvSpPr>
+          <p:cNvPr id="4" name="Text 1"/>
+          <p:cNvSpPr txBox="1"/>
+          <p:nvPr/>
+        </p:nvSpPr>
+        <p:spPr>
+          <a:xfrm>
+            <a:off x="457200" y="4160520"/>
+            <a:ext cx="8229600" cy="457200"/>
+          </a:xfrm>
+          <a:prstGeom prst="rect">
+            <a:avLst/>
+          </a:prstGeom>
+          <a:noFill/>
+          <a:ln/>
+        </p:spPr>
+        <p:txBody>
+          <a:bodyPr wrap="square" lIns="0" tIns="0" rIns="0" bIns="0" rtlCol="0" anchor="ctr"/>
+          <a:lstStyle/>
+          <a:p>
+            <a:pPr indent="0" marL="0">
+              <a:buNone/>
+            </a:pPr>
+            <a:r>
+              <a:rPr lang="en-US" sz="1200" b="1" dirty="0">
+                <a:solidFill>
+                  <a:srgbClr val="065A82"/>
+                </a:solidFill>
+              </a:rPr>
+              <a:t>Baja dispersión </a:t>
+            </a:r>
+            <a:pPr indent="0" marL="0">
+              <a:buNone/>
+            </a:pPr>
+            <a:r>
+              <a:rPr lang="en-US" sz="1200" dirty="0">
+                <a:solidFill>
+                  <a:srgbClr val="1B2838"/>
+                </a:solidFill>
+              </a:rPr>
+              <a:t>en todos los lenguajes (CV &lt; 5%). Las medianas son representativas de cada grupo.</a:t>
+            </a:r>
+            <a:endParaRPr lang="en-US" sz="1200" dirty="0"/>
+          </a:p>
+        </p:txBody>
+      </p:sp>
+      <p:sp>
+        <p:nvSpPr>
+          <p:cNvPr id="25" name="Slide Number Placeholder 0"/>
+          <p:cNvSpPr>
+            <a:spLocks noGrp="1"/>
+          </p:cNvSpPr>
+          <p:nvPr>
+            <p:ph type="sldNum" sz="quarter" idx="4294967295"/>
+          </p:nvPr>
+        </p:nvSpPr>
+        <p:spPr>
+          <a:xfrm>
+            <a:off x="8412480" y="4773168"/>
+            <a:ext cx="548640" cy="320040"/>
+          </a:xfrm>
+          <a:prstGeom prst="rect">
+            <a:avLst/>
+          </a:prstGeom>
+          <a:extLst>
+            <a:ext uri="{C572A759-6A51-4108-AA02-DFA0A04FC94B}">
+              <ma14:wrappingTextBoxFlag xmlns:ma14="http://schemas.microsoft.com/office/mac/drawingml/2011/main" val="0"/>
+            </a:ext>
+          </a:extLst>
+        </p:spPr>
+        <p:txBody>
+          <a:bodyPr/>
+          <a:lstStyle>
+            <a:lvl1pPr>
+              <a:defRPr sz="900">
+                <a:solidFill>
+                  <a:srgbClr val="1C7293"/>
+                </a:solidFill>
+              </a:defRPr>
+            </a:lvl1pPr>
+          </a:lstStyle>
+          <a:p>
+            <a:pPr algn="l"/>
+            <a:fld id="{F7021451-1387-4CA6-816F-3879F97B5CBC}" type="slidenum">
+              <a:rPr b="0" lang="en-US"/>
+              <a:t>18</a:t>
+            </a:fld>
+            <a:endParaRPr lang="en-US"/>
+          </a:p>
+        </p:txBody>
+      </p:sp>
+    </p:spTree>
+  </p:cSld>
+  <p:clrMapOvr>
+    <a:masterClrMapping/>
+  </p:clrMapOvr>
+</p:sld>
+</file>
+
+<file path=ppt/slides/slide19.xml><?xml version="1.0" encoding="utf-8"?>
+<p:sld xmlns:a="http://schemas.openxmlformats.org/drawingml/2006/main" xmlns:r="http://schemas.openxmlformats.org/officeDocument/2006/relationships" xmlns:p="http://schemas.openxmlformats.org/presentationml/2006/main">
+  <p:cSld name="Slide 19">
+    <p:spTree>
+      <p:nvGrpSpPr>
+        <p:cNvPr id="1" name=""/>
+        <p:cNvGrpSpPr/>
+        <p:nvPr/>
+      </p:nvGrpSpPr>
+      <p:grpSpPr>
+        <a:xfrm>
+          <a:off x="0" y="0"/>
+          <a:ext cx="0" cy="0"/>
+          <a:chOff x="0" y="0"/>
+          <a:chExt cx="0" cy="0"/>
+        </a:xfrm>
+      </p:grpSpPr>
+      <p:sp>
+        <p:nvSpPr>
+          <p:cNvPr id="2" name="Text 0"/>
+          <p:cNvSpPr txBox="1"/>
+          <p:nvPr/>
+        </p:nvSpPr>
+        <p:spPr>
+          <a:xfrm>
+            <a:off x="457200" y="274320"/>
+            <a:ext cx="8229600" cy="548640"/>
+          </a:xfrm>
+          <a:prstGeom prst="rect">
+            <a:avLst/>
+          </a:prstGeom>
+          <a:noFill/>
+          <a:ln/>
+        </p:spPr>
+        <p:txBody>
+          <a:bodyPr wrap="square" lIns="0" tIns="0" rIns="0" bIns="0" rtlCol="0" anchor="ctr"/>
+          <a:lstStyle/>
+          <a:p>
+            <a:pPr indent="0" marL="0">
+              <a:buNone/>
+            </a:pPr>
+            <a:r>
+              <a:rPr lang="en-US" sz="3400" b="1" dirty="0">
+                <a:solidFill>
+                  <a:srgbClr val="1B2838"/>
+                </a:solidFill>
+              </a:rPr>
+              <a:t>Interacción: Lenguaje × Tamaño</a:t>
+            </a:r>
+            <a:endParaRPr lang="en-US" sz="3400" dirty="0"/>
+          </a:p>
+        </p:txBody>
+      </p:sp>
+      <p:pic>
+        <p:nvPicPr>
+          <p:cNvPr id="3" name="Image 0" descr="/home/claude/matrix-benchmark/results/interaction_chart.png">    </p:cNvPr>
+          <p:cNvPicPr>
+            <a:picLocks noChangeAspect="1"/>
+          </p:cNvPicPr>
+          <p:nvPr/>
+        </p:nvPicPr>
+        <p:blipFill>
+          <a:blip r:embed="rId1"/>
+          <a:stretch>
+            <a:fillRect/>
+          </a:stretch>
+        </p:blipFill>
+        <p:spPr>
+          <a:xfrm>
+            <a:off x="457200" y="868680"/>
+            <a:ext cx="8229600" cy="3749040"/>
+          </a:xfrm>
+          <a:prstGeom prst="rect">
+            <a:avLst/>
+          </a:prstGeom>
+        </p:spPr>
+      </p:pic>
+      <p:sp>
+        <p:nvSpPr>
+          <p:cNvPr id="25" name="Slide Number Placeholder 0"/>
+          <p:cNvSpPr>
+            <a:spLocks noGrp="1"/>
+          </p:cNvSpPr>
+          <p:nvPr>
+            <p:ph type="sldNum" sz="quarter" idx="4294967295"/>
+          </p:nvPr>
+        </p:nvSpPr>
+        <p:spPr>
+          <a:xfrm>
+            <a:off x="8412480" y="4773168"/>
+            <a:ext cx="548640" cy="320040"/>
+          </a:xfrm>
+          <a:prstGeom prst="rect">
+            <a:avLst/>
+          </a:prstGeom>
+          <a:extLst>
+            <a:ext uri="{C572A759-6A51-4108-AA02-DFA0A04FC94B}">
+              <ma14:wrappingTextBoxFlag xmlns:ma14="http://schemas.microsoft.com/office/mac/drawingml/2011/main" val="0"/>
+            </a:ext>
+          </a:extLst>
+        </p:spPr>
+        <p:txBody>
+          <a:bodyPr/>
+          <a:lstStyle>
+            <a:lvl1pPr>
+              <a:defRPr sz="900">
+                <a:solidFill>
+                  <a:srgbClr val="1C7293"/>
+                </a:solidFill>
+              </a:defRPr>
+            </a:lvl1pPr>
+          </a:lstStyle>
+          <a:p>
+            <a:pPr algn="l"/>
+            <a:fld id="{F7021451-1387-4CA6-816F-3879F97B5CBC}" type="slidenum">
+              <a:rPr b="0" lang="en-US"/>
+              <a:t>19</a:t>
             </a:fld>
             <a:endParaRPr lang="en-US"/>
           </a:p>
@@ -7150,7 +8076,7 @@
         </p:nvSpPr>
         <p:spPr>
           <a:xfrm>
-            <a:off x="640080" y="1188720"/>
+            <a:off x="640080" y="1051560"/>
             <a:ext cx="502920" cy="502920"/>
           </a:xfrm>
           <a:prstGeom prst="ellipse">
@@ -7170,7 +8096,7 @@
         </p:nvSpPr>
         <p:spPr>
           <a:xfrm>
-            <a:off x="640080" y="1188720"/>
+            <a:off x="640080" y="1051560"/>
             <a:ext cx="502920" cy="502920"/>
           </a:xfrm>
           <a:prstGeom prst="rect">
@@ -7206,7 +8132,7 @@
         </p:nvSpPr>
         <p:spPr>
           <a:xfrm>
-            <a:off x="1371600" y="1188720"/>
+            <a:off x="1371600" y="1051560"/>
             <a:ext cx="6858000" cy="548640"/>
           </a:xfrm>
           <a:prstGeom prst="rect">
@@ -7254,7 +8180,7 @@
         </p:nvSpPr>
         <p:spPr>
           <a:xfrm>
-            <a:off x="640080" y="2103120"/>
+            <a:off x="640080" y="1828800"/>
             <a:ext cx="502920" cy="502920"/>
           </a:xfrm>
           <a:prstGeom prst="ellipse">
@@ -7274,7 +8200,7 @@
         </p:nvSpPr>
         <p:spPr>
           <a:xfrm>
-            <a:off x="640080" y="2103120"/>
+            <a:off x="640080" y="1828800"/>
             <a:ext cx="502920" cy="502920"/>
           </a:xfrm>
           <a:prstGeom prst="rect">
@@ -7310,7 +8236,7 @@
         </p:nvSpPr>
         <p:spPr>
           <a:xfrm>
-            <a:off x="1371600" y="2103120"/>
+            <a:off x="1371600" y="1828800"/>
             <a:ext cx="6858000" cy="548640"/>
           </a:xfrm>
           <a:prstGeom prst="rect">
@@ -7358,7 +8284,7 @@
         </p:nvSpPr>
         <p:spPr>
           <a:xfrm>
-            <a:off x="640080" y="3017520"/>
+            <a:off x="640080" y="2606040"/>
             <a:ext cx="502920" cy="502920"/>
           </a:xfrm>
           <a:prstGeom prst="ellipse">
@@ -7378,7 +8304,7 @@
         </p:nvSpPr>
         <p:spPr>
           <a:xfrm>
-            <a:off x="640080" y="3017520"/>
+            <a:off x="640080" y="2606040"/>
             <a:ext cx="502920" cy="502920"/>
           </a:xfrm>
           <a:prstGeom prst="rect">
@@ -7414,7 +8340,7 @@
         </p:nvSpPr>
         <p:spPr>
           <a:xfrm>
-            <a:off x="1371600" y="3017520"/>
+            <a:off x="1371600" y="2606040"/>
             <a:ext cx="6858000" cy="548640"/>
           </a:xfrm>
           <a:prstGeom prst="rect">
@@ -7462,7 +8388,7 @@
         </p:nvSpPr>
         <p:spPr>
           <a:xfrm>
-            <a:off x="640080" y="3931920"/>
+            <a:off x="640080" y="3383280"/>
             <a:ext cx="502920" cy="502920"/>
           </a:xfrm>
           <a:prstGeom prst="ellipse">
@@ -7482,7 +8408,7 @@
         </p:nvSpPr>
         <p:spPr>
           <a:xfrm>
-            <a:off x="640080" y="3931920"/>
+            <a:off x="640080" y="3383280"/>
             <a:ext cx="502920" cy="502920"/>
           </a:xfrm>
           <a:prstGeom prst="rect">
@@ -7518,7 +8444,7 @@
         </p:nvSpPr>
         <p:spPr>
           <a:xfrm>
-            <a:off x="1371600" y="3931920"/>
+            <a:off x="1371600" y="3383280"/>
             <a:ext cx="6858000" cy="548640"/>
           </a:xfrm>
           <a:prstGeom prst="rect">
@@ -7553,6 +8479,110 @@
                 </a:solidFill>
               </a:rPr>
               <a:t>Estadísticas descriptivas y gráficos</a:t>
+            </a:r>
+            <a:endParaRPr lang="en-US" sz="1800" dirty="0"/>
+          </a:p>
+        </p:txBody>
+      </p:sp>
+      <p:sp>
+        <p:nvSpPr>
+          <p:cNvPr id="15" name="Shape 13"/>
+          <p:cNvSpPr/>
+          <p:nvPr/>
+        </p:nvSpPr>
+        <p:spPr>
+          <a:xfrm>
+            <a:off x="640080" y="4160520"/>
+            <a:ext cx="502920" cy="502920"/>
+          </a:xfrm>
+          <a:prstGeom prst="ellipse">
+            <a:avLst/>
+          </a:prstGeom>
+          <a:solidFill>
+            <a:srgbClr val="065A82"/>
+          </a:solidFill>
+          <a:ln/>
+        </p:spPr>
+      </p:sp>
+      <p:sp>
+        <p:nvSpPr>
+          <p:cNvPr id="16" name="Text 14"/>
+          <p:cNvSpPr txBox="1"/>
+          <p:nvPr/>
+        </p:nvSpPr>
+        <p:spPr>
+          <a:xfrm>
+            <a:off x="640080" y="4160520"/>
+            <a:ext cx="502920" cy="502920"/>
+          </a:xfrm>
+          <a:prstGeom prst="rect">
+            <a:avLst/>
+          </a:prstGeom>
+          <a:noFill/>
+          <a:ln/>
+        </p:spPr>
+        <p:txBody>
+          <a:bodyPr wrap="square" lIns="0" tIns="0" rIns="0" bIns="0" rtlCol="0" anchor="ctr"/>
+          <a:lstStyle/>
+          <a:p>
+            <a:pPr algn="ctr" indent="0" marL="0">
+              <a:buNone/>
+            </a:pPr>
+            <a:r>
+              <a:rPr lang="en-US" sz="1600" b="1" dirty="0">
+                <a:solidFill>
+                  <a:srgbClr val="FFFFFF"/>
+                </a:solidFill>
+              </a:rPr>
+              <a:t>05</a:t>
+            </a:r>
+            <a:endParaRPr lang="en-US" sz="1600" dirty="0"/>
+          </a:p>
+        </p:txBody>
+      </p:sp>
+      <p:sp>
+        <p:nvSpPr>
+          <p:cNvPr id="17" name="Text 15"/>
+          <p:cNvSpPr txBox="1"/>
+          <p:nvPr/>
+        </p:nvSpPr>
+        <p:spPr>
+          <a:xfrm>
+            <a:off x="1371600" y="4160520"/>
+            <a:ext cx="6858000" cy="548640"/>
+          </a:xfrm>
+          <a:prstGeom prst="rect">
+            <a:avLst/>
+          </a:prstGeom>
+          <a:noFill/>
+          <a:ln/>
+        </p:spPr>
+        <p:txBody>
+          <a:bodyPr wrap="square" lIns="0" tIns="0" rIns="0" bIns="0" rtlCol="0" anchor="ctr"/>
+          <a:lstStyle/>
+          <a:p>
+            <a:pPr indent="0" marL="0">
+              <a:buNone/>
+            </a:pPr>
+            <a:r>
+              <a:rPr lang="en-US" sz="1800" b="1" dirty="0">
+                <a:solidFill>
+                  <a:srgbClr val="1B2838"/>
+                </a:solidFill>
+              </a:rPr>
+              <a:t>Análisis Estadístico
+</a:t>
+            </a:r>
+            <a:pPr indent="0" marL="0">
+              <a:buNone/>
+            </a:pPr>
+            <a:r>
+              <a:rPr lang="en-US" sz="1300" dirty="0">
+                <a:solidFill>
+                  <a:srgbClr val="1C7293"/>
+                </a:solidFill>
+              </a:rPr>
+              <a:t>ANOVA, Tukey HSD, gráficas y conclusiones</a:t>
             </a:r>
             <a:endParaRPr lang="en-US" sz="1800" dirty="0"/>
           </a:p>
@@ -7598,6 +8628,3726 @@
             <a:fld id="{F7021451-1387-4CA6-816F-3879F97B5CBC}" type="slidenum">
               <a:rPr b="0" lang="en-US"/>
               <a:t>2</a:t>
+            </a:fld>
+            <a:endParaRPr lang="en-US"/>
+          </a:p>
+        </p:txBody>
+      </p:sp>
+    </p:spTree>
+  </p:cSld>
+  <p:clrMapOvr>
+    <a:masterClrMapping/>
+  </p:clrMapOvr>
+</p:sld>
+</file>
+
+<file path=ppt/slides/slide20.xml><?xml version="1.0" encoding="utf-8"?>
+<p:sld xmlns:a="http://schemas.openxmlformats.org/drawingml/2006/main" xmlns:r="http://schemas.openxmlformats.org/officeDocument/2006/relationships" xmlns:p="http://schemas.openxmlformats.org/presentationml/2006/main">
+  <p:cSld name="Slide 20">
+    <p:spTree>
+      <p:nvGrpSpPr>
+        <p:cNvPr id="1" name=""/>
+        <p:cNvGrpSpPr/>
+        <p:nvPr/>
+      </p:nvGrpSpPr>
+      <p:grpSpPr>
+        <a:xfrm>
+          <a:off x="0" y="0"/>
+          <a:ext cx="0" cy="0"/>
+          <a:chOff x="0" y="0"/>
+          <a:chExt cx="0" cy="0"/>
+        </a:xfrm>
+      </p:grpSpPr>
+      <p:sp>
+        <p:nvSpPr>
+          <p:cNvPr id="2" name="Text 0"/>
+          <p:cNvSpPr txBox="1"/>
+          <p:nvPr/>
+        </p:nvSpPr>
+        <p:spPr>
+          <a:xfrm>
+            <a:off x="457200" y="274320"/>
+            <a:ext cx="8229600" cy="548640"/>
+          </a:xfrm>
+          <a:prstGeom prst="rect">
+            <a:avLst/>
+          </a:prstGeom>
+          <a:noFill/>
+          <a:ln/>
+        </p:spPr>
+        <p:txBody>
+          <a:bodyPr wrap="square" lIns="0" tIns="0" rIns="0" bIns="0" rtlCol="0" anchor="ctr"/>
+          <a:lstStyle/>
+          <a:p>
+            <a:pPr indent="0" marL="0">
+              <a:buNone/>
+            </a:pPr>
+            <a:r>
+              <a:rPr lang="en-US" sz="3400" b="1" dirty="0">
+                <a:solidFill>
+                  <a:srgbClr val="1B2838"/>
+                </a:solidFill>
+              </a:rPr>
+              <a:t>Mapa de Calor y Speedup vs Python</a:t>
+            </a:r>
+            <a:endParaRPr lang="en-US" sz="3400" dirty="0"/>
+          </a:p>
+        </p:txBody>
+      </p:sp>
+      <p:pic>
+        <p:nvPicPr>
+          <p:cNvPr id="3" name="Image 0" descr="/home/claude/matrix-benchmark/results/heatmap_times.png">    </p:cNvPr>
+          <p:cNvPicPr>
+            <a:picLocks noChangeAspect="1"/>
+          </p:cNvPicPr>
+          <p:nvPr/>
+        </p:nvPicPr>
+        <p:blipFill>
+          <a:blip r:embed="rId1"/>
+          <a:stretch>
+            <a:fillRect/>
+          </a:stretch>
+        </p:blipFill>
+        <p:spPr>
+          <a:xfrm>
+            <a:off x="91440" y="868680"/>
+            <a:ext cx="4389120" cy="3749040"/>
+          </a:xfrm>
+          <a:prstGeom prst="rect">
+            <a:avLst/>
+          </a:prstGeom>
+        </p:spPr>
+      </p:pic>
+      <p:pic>
+        <p:nvPicPr>
+          <p:cNvPr id="4" name="Image 1" descr="/home/claude/matrix-benchmark/results/speedup_chart.png">    </p:cNvPr>
+          <p:cNvPicPr>
+            <a:picLocks noChangeAspect="1"/>
+          </p:cNvPicPr>
+          <p:nvPr/>
+        </p:nvPicPr>
+        <p:blipFill>
+          <a:blip r:embed="rId2"/>
+          <a:stretch>
+            <a:fillRect/>
+          </a:stretch>
+        </p:blipFill>
+        <p:spPr>
+          <a:xfrm>
+            <a:off x="4572000" y="868680"/>
+            <a:ext cx="4480560" cy="3749040"/>
+          </a:xfrm>
+          <a:prstGeom prst="rect">
+            <a:avLst/>
+          </a:prstGeom>
+        </p:spPr>
+      </p:pic>
+      <p:sp>
+        <p:nvSpPr>
+          <p:cNvPr id="25" name="Slide Number Placeholder 0"/>
+          <p:cNvSpPr>
+            <a:spLocks noGrp="1"/>
+          </p:cNvSpPr>
+          <p:nvPr>
+            <p:ph type="sldNum" sz="quarter" idx="4294967295"/>
+          </p:nvPr>
+        </p:nvSpPr>
+        <p:spPr>
+          <a:xfrm>
+            <a:off x="8412480" y="4773168"/>
+            <a:ext cx="548640" cy="320040"/>
+          </a:xfrm>
+          <a:prstGeom prst="rect">
+            <a:avLst/>
+          </a:prstGeom>
+          <a:extLst>
+            <a:ext uri="{C572A759-6A51-4108-AA02-DFA0A04FC94B}">
+              <ma14:wrappingTextBoxFlag xmlns:ma14="http://schemas.microsoft.com/office/mac/drawingml/2011/main" val="0"/>
+            </a:ext>
+          </a:extLst>
+        </p:spPr>
+        <p:txBody>
+          <a:bodyPr/>
+          <a:lstStyle>
+            <a:lvl1pPr>
+              <a:defRPr sz="900">
+                <a:solidFill>
+                  <a:srgbClr val="1C7293"/>
+                </a:solidFill>
+              </a:defRPr>
+            </a:lvl1pPr>
+          </a:lstStyle>
+          <a:p>
+            <a:pPr algn="l"/>
+            <a:fld id="{F7021451-1387-4CA6-816F-3879F97B5CBC}" type="slidenum">
+              <a:rPr b="0" lang="en-US"/>
+              <a:t>20</a:t>
+            </a:fld>
+            <a:endParaRPr lang="en-US"/>
+          </a:p>
+        </p:txBody>
+      </p:sp>
+    </p:spTree>
+  </p:cSld>
+  <p:clrMapOvr>
+    <a:masterClrMapping/>
+  </p:clrMapOvr>
+</p:sld>
+</file>
+
+<file path=ppt/slides/slide21.xml><?xml version="1.0" encoding="utf-8"?>
+<p:sld xmlns:a="http://schemas.openxmlformats.org/drawingml/2006/main" xmlns:r="http://schemas.openxmlformats.org/officeDocument/2006/relationships" xmlns:p="http://schemas.openxmlformats.org/presentationml/2006/main">
+  <p:cSld name="Slide 21">
+    <p:spTree>
+      <p:nvGrpSpPr>
+        <p:cNvPr id="1" name=""/>
+        <p:cNvGrpSpPr/>
+        <p:nvPr/>
+      </p:nvGrpSpPr>
+      <p:grpSpPr>
+        <a:xfrm>
+          <a:off x="0" y="0"/>
+          <a:ext cx="0" cy="0"/>
+          <a:chOff x="0" y="0"/>
+          <a:chExt cx="0" cy="0"/>
+        </a:xfrm>
+      </p:grpSpPr>
+      <p:sp>
+        <p:nvSpPr>
+          <p:cNvPr id="2" name="Text 0"/>
+          <p:cNvSpPr txBox="1"/>
+          <p:nvPr/>
+        </p:nvSpPr>
+        <p:spPr>
+          <a:xfrm>
+            <a:off x="457200" y="274320"/>
+            <a:ext cx="8229600" cy="548640"/>
+          </a:xfrm>
+          <a:prstGeom prst="rect">
+            <a:avLst/>
+          </a:prstGeom>
+          <a:noFill/>
+          <a:ln/>
+        </p:spPr>
+        <p:txBody>
+          <a:bodyPr wrap="square" lIns="0" tIns="0" rIns="0" bIns="0" rtlCol="0" anchor="ctr"/>
+          <a:lstStyle/>
+          <a:p>
+            <a:pPr indent="0" marL="0">
+              <a:buNone/>
+            </a:pPr>
+            <a:r>
+              <a:rPr lang="en-US" sz="3400" b="1" dirty="0">
+                <a:solidFill>
+                  <a:srgbClr val="1B2838"/>
+                </a:solidFill>
+              </a:rPr>
+              <a:t>ANOVA de Dos Factores con Interacción</a:t>
+            </a:r>
+            <a:endParaRPr lang="en-US" sz="3400" dirty="0"/>
+          </a:p>
+        </p:txBody>
+      </p:sp>
+      <p:sp>
+        <p:nvSpPr>
+          <p:cNvPr id="3" name="Text 1"/>
+          <p:cNvSpPr txBox="1"/>
+          <p:nvPr/>
+        </p:nvSpPr>
+        <p:spPr>
+          <a:xfrm>
+            <a:off x="457200" y="914400"/>
+            <a:ext cx="8229600" cy="365760"/>
+          </a:xfrm>
+          <a:prstGeom prst="rect">
+            <a:avLst/>
+          </a:prstGeom>
+          <a:noFill/>
+          <a:ln/>
+        </p:spPr>
+        <p:txBody>
+          <a:bodyPr wrap="square" lIns="0" tIns="0" rIns="0" bIns="0" rtlCol="0" anchor="ctr"/>
+          <a:lstStyle/>
+          <a:p>
+            <a:pPr indent="0" marL="0">
+              <a:buNone/>
+            </a:pPr>
+            <a:r>
+              <a:rPr lang="en-US" sz="1300" i="1" dirty="0">
+                <a:solidFill>
+                  <a:srgbClr val="1C7293"/>
+                </a:solidFill>
+              </a:rPr>
+              <a:t>H₀: El lenguaje no produce diferencias significativas en el tiempo de ejecución</a:t>
+            </a:r>
+            <a:endParaRPr lang="en-US" sz="1300" dirty="0"/>
+          </a:p>
+        </p:txBody>
+      </p:sp>
+      <p:graphicFrame>
+        <p:nvGraphicFramePr>
+          <p:cNvPr id="22" name="Table 0"/>
+          <p:cNvGraphicFramePr>
+            <a:graphicFrameLocks noGrp="1"/>
+          </p:cNvGraphicFramePr>
+          <p:nvPr>
+            <p:extLst>
+              <p:ext uri="{D42A27DB-BD31-4B8C-83A1-F6EECF244321}">
+                <p14:modId xmlns:p14="http://schemas.microsoft.com/office/powerpoint/2010/main" val="1579011935"/>
+              </p:ext>
+            </p:extLst>
+          </p:nvPr>
+        </p:nvGraphicFramePr>
+        <p:xfrm>
+          <a:off x="457200" y="1417320"/>
+          <a:ext cx="8229600" cy="914400"/>
+        </p:xfrm>
+        <a:graphic>
+          <a:graphicData uri="http://schemas.openxmlformats.org/drawingml/2006/table">
+            <a:tbl>
+              <a:tblPr/>
+              <a:tblGrid>
+                <a:gridCol w="2560320"/>
+                <a:gridCol w="1828800"/>
+                <a:gridCol w="2011680"/>
+                <a:gridCol w="1828800"/>
+              </a:tblGrid>
+              <a:tr h="457200">
+                <a:tc>
+                  <a:txBody>
+                    <a:bodyPr/>
+                    <a:lstStyle/>
+                    <a:p>
+                      <a:pPr algn="ctr" indent="0" marL="0">
+                        <a:buNone/>
+                      </a:pPr>
+                      <a:r>
+                        <a:rPr lang="en-US" sz="1200" b="1" dirty="0">
+                          <a:solidFill>
+                            <a:srgbClr val="FFFFFF"/>
+                          </a:solidFill>
+                        </a:rPr>
+                        <a:t>Factor</a:t>
+                      </a:r>
+                      <a:endParaRPr lang="en-US" sz="1200" dirty="0"/>
+                    </a:p>
+                  </a:txBody>
+                  <a:tcPr marL="91440" marR="91440" marT="45720" marB="45720" anchor="ctr">
+                    <a:lnL w="6350" cap="flat" cmpd="sng" algn="ctr">
+                      <a:solidFill>
+                        <a:srgbClr val="CCCCCC"/>
+                      </a:solidFill>
+                      <a:prstDash val="solid"/>
+                      <a:round/>
+                      <a:headEnd type="none" w="med" len="med"/>
+                      <a:tailEnd type="none" w="med" len="med"/>
+                    </a:lnL>
+                    <a:lnR w="6350" cap="flat" cmpd="sng" algn="ctr">
+                      <a:solidFill>
+                        <a:srgbClr val="CCCCCC"/>
+                      </a:solidFill>
+                      <a:prstDash val="solid"/>
+                      <a:round/>
+                      <a:headEnd type="none" w="med" len="med"/>
+                      <a:tailEnd type="none" w="med" len="med"/>
+                    </a:lnR>
+                    <a:lnT w="6350" cap="flat" cmpd="sng" algn="ctr">
+                      <a:solidFill>
+                        <a:srgbClr val="CCCCCC"/>
+                      </a:solidFill>
+                      <a:prstDash val="solid"/>
+                      <a:round/>
+                      <a:headEnd type="none" w="med" len="med"/>
+                      <a:tailEnd type="none" w="med" len="med"/>
+                    </a:lnT>
+                    <a:lnB w="6350" cap="flat" cmpd="sng" algn="ctr">
+                      <a:solidFill>
+                        <a:srgbClr val="CCCCCC"/>
+                      </a:solidFill>
+                      <a:prstDash val="solid"/>
+                      <a:round/>
+                      <a:headEnd type="none" w="med" len="med"/>
+                      <a:tailEnd type="none" w="med" len="med"/>
+                    </a:lnB>
+                    <a:solidFill>
+                      <a:srgbClr val="065A82"/>
+                    </a:solidFill>
+                  </a:tcPr>
+                </a:tc>
+                <a:tc>
+                  <a:txBody>
+                    <a:bodyPr/>
+                    <a:lstStyle/>
+                    <a:p>
+                      <a:pPr algn="ctr" indent="0" marL="0">
+                        <a:buNone/>
+                      </a:pPr>
+                      <a:r>
+                        <a:rPr lang="en-US" sz="1200" b="1" dirty="0">
+                          <a:solidFill>
+                            <a:srgbClr val="FFFFFF"/>
+                          </a:solidFill>
+                        </a:rPr>
+                        <a:t>F</a:t>
+                      </a:r>
+                      <a:endParaRPr lang="en-US" sz="1200" dirty="0"/>
+                    </a:p>
+                  </a:txBody>
+                  <a:tcPr marL="91440" marR="91440" marT="45720" marB="45720" anchor="ctr">
+                    <a:lnL w="6350" cap="flat" cmpd="sng" algn="ctr">
+                      <a:solidFill>
+                        <a:srgbClr val="CCCCCC"/>
+                      </a:solidFill>
+                      <a:prstDash val="solid"/>
+                      <a:round/>
+                      <a:headEnd type="none" w="med" len="med"/>
+                      <a:tailEnd type="none" w="med" len="med"/>
+                    </a:lnL>
+                    <a:lnR w="6350" cap="flat" cmpd="sng" algn="ctr">
+                      <a:solidFill>
+                        <a:srgbClr val="CCCCCC"/>
+                      </a:solidFill>
+                      <a:prstDash val="solid"/>
+                      <a:round/>
+                      <a:headEnd type="none" w="med" len="med"/>
+                      <a:tailEnd type="none" w="med" len="med"/>
+                    </a:lnR>
+                    <a:lnT w="6350" cap="flat" cmpd="sng" algn="ctr">
+                      <a:solidFill>
+                        <a:srgbClr val="CCCCCC"/>
+                      </a:solidFill>
+                      <a:prstDash val="solid"/>
+                      <a:round/>
+                      <a:headEnd type="none" w="med" len="med"/>
+                      <a:tailEnd type="none" w="med" len="med"/>
+                    </a:lnT>
+                    <a:lnB w="6350" cap="flat" cmpd="sng" algn="ctr">
+                      <a:solidFill>
+                        <a:srgbClr val="CCCCCC"/>
+                      </a:solidFill>
+                      <a:prstDash val="solid"/>
+                      <a:round/>
+                      <a:headEnd type="none" w="med" len="med"/>
+                      <a:tailEnd type="none" w="med" len="med"/>
+                    </a:lnB>
+                    <a:solidFill>
+                      <a:srgbClr val="065A82"/>
+                    </a:solidFill>
+                  </a:tcPr>
+                </a:tc>
+                <a:tc>
+                  <a:txBody>
+                    <a:bodyPr/>
+                    <a:lstStyle/>
+                    <a:p>
+                      <a:pPr algn="ctr" indent="0" marL="0">
+                        <a:buNone/>
+                      </a:pPr>
+                      <a:r>
+                        <a:rPr lang="en-US" sz="1200" b="1" dirty="0">
+                          <a:solidFill>
+                            <a:srgbClr val="FFFFFF"/>
+                          </a:solidFill>
+                        </a:rPr>
+                        <a:t>p-valor</a:t>
+                      </a:r>
+                      <a:endParaRPr lang="en-US" sz="1200" dirty="0"/>
+                    </a:p>
+                  </a:txBody>
+                  <a:tcPr marL="91440" marR="91440" marT="45720" marB="45720" anchor="ctr">
+                    <a:lnL w="6350" cap="flat" cmpd="sng" algn="ctr">
+                      <a:solidFill>
+                        <a:srgbClr val="CCCCCC"/>
+                      </a:solidFill>
+                      <a:prstDash val="solid"/>
+                      <a:round/>
+                      <a:headEnd type="none" w="med" len="med"/>
+                      <a:tailEnd type="none" w="med" len="med"/>
+                    </a:lnL>
+                    <a:lnR w="6350" cap="flat" cmpd="sng" algn="ctr">
+                      <a:solidFill>
+                        <a:srgbClr val="CCCCCC"/>
+                      </a:solidFill>
+                      <a:prstDash val="solid"/>
+                      <a:round/>
+                      <a:headEnd type="none" w="med" len="med"/>
+                      <a:tailEnd type="none" w="med" len="med"/>
+                    </a:lnR>
+                    <a:lnT w="6350" cap="flat" cmpd="sng" algn="ctr">
+                      <a:solidFill>
+                        <a:srgbClr val="CCCCCC"/>
+                      </a:solidFill>
+                      <a:prstDash val="solid"/>
+                      <a:round/>
+                      <a:headEnd type="none" w="med" len="med"/>
+                      <a:tailEnd type="none" w="med" len="med"/>
+                    </a:lnT>
+                    <a:lnB w="6350" cap="flat" cmpd="sng" algn="ctr">
+                      <a:solidFill>
+                        <a:srgbClr val="CCCCCC"/>
+                      </a:solidFill>
+                      <a:prstDash val="solid"/>
+                      <a:round/>
+                      <a:headEnd type="none" w="med" len="med"/>
+                      <a:tailEnd type="none" w="med" len="med"/>
+                    </a:lnB>
+                    <a:solidFill>
+                      <a:srgbClr val="065A82"/>
+                    </a:solidFill>
+                  </a:tcPr>
+                </a:tc>
+                <a:tc>
+                  <a:txBody>
+                    <a:bodyPr/>
+                    <a:lstStyle/>
+                    <a:p>
+                      <a:pPr algn="ctr" indent="0" marL="0">
+                        <a:buNone/>
+                      </a:pPr>
+                      <a:r>
+                        <a:rPr lang="en-US" sz="1200" b="1" dirty="0">
+                          <a:solidFill>
+                            <a:srgbClr val="FFFFFF"/>
+                          </a:solidFill>
+                        </a:rPr>
+                        <a:t>Significancia</a:t>
+                      </a:r>
+                      <a:endParaRPr lang="en-US" sz="1200" dirty="0"/>
+                    </a:p>
+                  </a:txBody>
+                  <a:tcPr marL="91440" marR="91440" marT="45720" marB="45720" anchor="ctr">
+                    <a:lnL w="6350" cap="flat" cmpd="sng" algn="ctr">
+                      <a:solidFill>
+                        <a:srgbClr val="CCCCCC"/>
+                      </a:solidFill>
+                      <a:prstDash val="solid"/>
+                      <a:round/>
+                      <a:headEnd type="none" w="med" len="med"/>
+                      <a:tailEnd type="none" w="med" len="med"/>
+                    </a:lnL>
+                    <a:lnR w="6350" cap="flat" cmpd="sng" algn="ctr">
+                      <a:solidFill>
+                        <a:srgbClr val="CCCCCC"/>
+                      </a:solidFill>
+                      <a:prstDash val="solid"/>
+                      <a:round/>
+                      <a:headEnd type="none" w="med" len="med"/>
+                      <a:tailEnd type="none" w="med" len="med"/>
+                    </a:lnR>
+                    <a:lnT w="6350" cap="flat" cmpd="sng" algn="ctr">
+                      <a:solidFill>
+                        <a:srgbClr val="CCCCCC"/>
+                      </a:solidFill>
+                      <a:prstDash val="solid"/>
+                      <a:round/>
+                      <a:headEnd type="none" w="med" len="med"/>
+                      <a:tailEnd type="none" w="med" len="med"/>
+                    </a:lnT>
+                    <a:lnB w="6350" cap="flat" cmpd="sng" algn="ctr">
+                      <a:solidFill>
+                        <a:srgbClr val="CCCCCC"/>
+                      </a:solidFill>
+                      <a:prstDash val="solid"/>
+                      <a:round/>
+                      <a:headEnd type="none" w="med" len="med"/>
+                      <a:tailEnd type="none" w="med" len="med"/>
+                    </a:lnB>
+                    <a:solidFill>
+                      <a:srgbClr val="065A82"/>
+                    </a:solidFill>
+                  </a:tcPr>
+                </a:tc>
+              </a:tr>
+              <a:tr h="411480">
+                <a:tc>
+                  <a:txBody>
+                    <a:bodyPr/>
+                    <a:lstStyle/>
+                    <a:p>
+                      <a:pPr algn="ctr" indent="0" marL="0">
+                        <a:buNone/>
+                      </a:pPr>
+                      <a:r>
+                        <a:rPr lang="en-US" sz="1200" b="1" dirty="0">
+                          <a:solidFill>
+                            <a:srgbClr val="1B2838"/>
+                          </a:solidFill>
+                        </a:rPr>
+                        <a:t>Lenguaje</a:t>
+                      </a:r>
+                      <a:endParaRPr lang="en-US" sz="1200" dirty="0"/>
+                    </a:p>
+                  </a:txBody>
+                  <a:tcPr marL="91440" marR="91440" marT="45720" marB="45720" anchor="ctr">
+                    <a:lnL w="6350" cap="flat" cmpd="sng" algn="ctr">
+                      <a:solidFill>
+                        <a:srgbClr val="CCCCCC"/>
+                      </a:solidFill>
+                      <a:prstDash val="solid"/>
+                      <a:round/>
+                      <a:headEnd type="none" w="med" len="med"/>
+                      <a:tailEnd type="none" w="med" len="med"/>
+                    </a:lnL>
+                    <a:lnR w="6350" cap="flat" cmpd="sng" algn="ctr">
+                      <a:solidFill>
+                        <a:srgbClr val="CCCCCC"/>
+                      </a:solidFill>
+                      <a:prstDash val="solid"/>
+                      <a:round/>
+                      <a:headEnd type="none" w="med" len="med"/>
+                      <a:tailEnd type="none" w="med" len="med"/>
+                    </a:lnR>
+                    <a:lnT w="6350" cap="flat" cmpd="sng" algn="ctr">
+                      <a:solidFill>
+                        <a:srgbClr val="CCCCCC"/>
+                      </a:solidFill>
+                      <a:prstDash val="solid"/>
+                      <a:round/>
+                      <a:headEnd type="none" w="med" len="med"/>
+                      <a:tailEnd type="none" w="med" len="med"/>
+                    </a:lnT>
+                    <a:lnB w="6350" cap="flat" cmpd="sng" algn="ctr">
+                      <a:solidFill>
+                        <a:srgbClr val="CCCCCC"/>
+                      </a:solidFill>
+                      <a:prstDash val="solid"/>
+                      <a:round/>
+                      <a:headEnd type="none" w="med" len="med"/>
+                      <a:tailEnd type="none" w="med" len="med"/>
+                    </a:lnB>
+                    <a:solidFill>
+                      <a:srgbClr val="EAF0F6"/>
+                    </a:solidFill>
+                  </a:tcPr>
+                </a:tc>
+                <a:tc>
+                  <a:txBody>
+                    <a:bodyPr/>
+                    <a:lstStyle/>
+                    <a:p>
+                      <a:pPr algn="ctr" indent="0" marL="0">
+                        <a:buNone/>
+                      </a:pPr>
+                      <a:r>
+                        <a:rPr lang="en-US" sz="1200" dirty="0">
+                          <a:solidFill>
+                            <a:srgbClr val="1B2838"/>
+                          </a:solidFill>
+                        </a:rPr>
+                        <a:t>62,317.49</a:t>
+                      </a:r>
+                      <a:endParaRPr lang="en-US" sz="1200" dirty="0"/>
+                    </a:p>
+                  </a:txBody>
+                  <a:tcPr marL="91440" marR="91440" marT="45720" marB="45720" anchor="ctr">
+                    <a:lnL w="6350" cap="flat" cmpd="sng" algn="ctr">
+                      <a:solidFill>
+                        <a:srgbClr val="CCCCCC"/>
+                      </a:solidFill>
+                      <a:prstDash val="solid"/>
+                      <a:round/>
+                      <a:headEnd type="none" w="med" len="med"/>
+                      <a:tailEnd type="none" w="med" len="med"/>
+                    </a:lnL>
+                    <a:lnR w="6350" cap="flat" cmpd="sng" algn="ctr">
+                      <a:solidFill>
+                        <a:srgbClr val="CCCCCC"/>
+                      </a:solidFill>
+                      <a:prstDash val="solid"/>
+                      <a:round/>
+                      <a:headEnd type="none" w="med" len="med"/>
+                      <a:tailEnd type="none" w="med" len="med"/>
+                    </a:lnR>
+                    <a:lnT w="6350" cap="flat" cmpd="sng" algn="ctr">
+                      <a:solidFill>
+                        <a:srgbClr val="CCCCCC"/>
+                      </a:solidFill>
+                      <a:prstDash val="solid"/>
+                      <a:round/>
+                      <a:headEnd type="none" w="med" len="med"/>
+                      <a:tailEnd type="none" w="med" len="med"/>
+                    </a:lnT>
+                    <a:lnB w="6350" cap="flat" cmpd="sng" algn="ctr">
+                      <a:solidFill>
+                        <a:srgbClr val="CCCCCC"/>
+                      </a:solidFill>
+                      <a:prstDash val="solid"/>
+                      <a:round/>
+                      <a:headEnd type="none" w="med" len="med"/>
+                      <a:tailEnd type="none" w="med" len="med"/>
+                    </a:lnB>
+                    <a:solidFill>
+                      <a:srgbClr val="EAF0F6"/>
+                    </a:solidFill>
+                  </a:tcPr>
+                </a:tc>
+                <a:tc>
+                  <a:txBody>
+                    <a:bodyPr/>
+                    <a:lstStyle/>
+                    <a:p>
+                      <a:pPr algn="ctr" indent="0" marL="0">
+                        <a:buNone/>
+                      </a:pPr>
+                      <a:r>
+                        <a:rPr lang="en-US" sz="1200" dirty="0">
+                          <a:solidFill>
+                            <a:srgbClr val="1B2838"/>
+                          </a:solidFill>
+                        </a:rPr>
+                        <a:t>1.09 × 10⁻¹⁷⁴</a:t>
+                      </a:r>
+                      <a:endParaRPr lang="en-US" sz="1200" dirty="0"/>
+                    </a:p>
+                  </a:txBody>
+                  <a:tcPr marL="91440" marR="91440" marT="45720" marB="45720" anchor="ctr">
+                    <a:lnL w="6350" cap="flat" cmpd="sng" algn="ctr">
+                      <a:solidFill>
+                        <a:srgbClr val="CCCCCC"/>
+                      </a:solidFill>
+                      <a:prstDash val="solid"/>
+                      <a:round/>
+                      <a:headEnd type="none" w="med" len="med"/>
+                      <a:tailEnd type="none" w="med" len="med"/>
+                    </a:lnL>
+                    <a:lnR w="6350" cap="flat" cmpd="sng" algn="ctr">
+                      <a:solidFill>
+                        <a:srgbClr val="CCCCCC"/>
+                      </a:solidFill>
+                      <a:prstDash val="solid"/>
+                      <a:round/>
+                      <a:headEnd type="none" w="med" len="med"/>
+                      <a:tailEnd type="none" w="med" len="med"/>
+                    </a:lnR>
+                    <a:lnT w="6350" cap="flat" cmpd="sng" algn="ctr">
+                      <a:solidFill>
+                        <a:srgbClr val="CCCCCC"/>
+                      </a:solidFill>
+                      <a:prstDash val="solid"/>
+                      <a:round/>
+                      <a:headEnd type="none" w="med" len="med"/>
+                      <a:tailEnd type="none" w="med" len="med"/>
+                    </a:lnT>
+                    <a:lnB w="6350" cap="flat" cmpd="sng" algn="ctr">
+                      <a:solidFill>
+                        <a:srgbClr val="CCCCCC"/>
+                      </a:solidFill>
+                      <a:prstDash val="solid"/>
+                      <a:round/>
+                      <a:headEnd type="none" w="med" len="med"/>
+                      <a:tailEnd type="none" w="med" len="med"/>
+                    </a:lnB>
+                    <a:solidFill>
+                      <a:srgbClr val="EAF0F6"/>
+                    </a:solidFill>
+                  </a:tcPr>
+                </a:tc>
+                <a:tc>
+                  <a:txBody>
+                    <a:bodyPr/>
+                    <a:lstStyle/>
+                    <a:p>
+                      <a:pPr algn="ctr" indent="0" marL="0">
+                        <a:buNone/>
+                      </a:pPr>
+                      <a:r>
+                        <a:rPr lang="en-US" sz="1600" b="1" dirty="0">
+                          <a:solidFill>
+                            <a:srgbClr val="F96167"/>
+                          </a:solidFill>
+                        </a:rPr>
+                        <a:t>***</a:t>
+                      </a:r>
+                      <a:endParaRPr lang="en-US" sz="1600" dirty="0"/>
+                    </a:p>
+                  </a:txBody>
+                  <a:tcPr marL="91440" marR="91440" marT="45720" marB="45720" anchor="ctr">
+                    <a:lnL w="6350" cap="flat" cmpd="sng" algn="ctr">
+                      <a:solidFill>
+                        <a:srgbClr val="CCCCCC"/>
+                      </a:solidFill>
+                      <a:prstDash val="solid"/>
+                      <a:round/>
+                      <a:headEnd type="none" w="med" len="med"/>
+                      <a:tailEnd type="none" w="med" len="med"/>
+                    </a:lnL>
+                    <a:lnR w="6350" cap="flat" cmpd="sng" algn="ctr">
+                      <a:solidFill>
+                        <a:srgbClr val="CCCCCC"/>
+                      </a:solidFill>
+                      <a:prstDash val="solid"/>
+                      <a:round/>
+                      <a:headEnd type="none" w="med" len="med"/>
+                      <a:tailEnd type="none" w="med" len="med"/>
+                    </a:lnR>
+                    <a:lnT w="6350" cap="flat" cmpd="sng" algn="ctr">
+                      <a:solidFill>
+                        <a:srgbClr val="CCCCCC"/>
+                      </a:solidFill>
+                      <a:prstDash val="solid"/>
+                      <a:round/>
+                      <a:headEnd type="none" w="med" len="med"/>
+                      <a:tailEnd type="none" w="med" len="med"/>
+                    </a:lnT>
+                    <a:lnB w="6350" cap="flat" cmpd="sng" algn="ctr">
+                      <a:solidFill>
+                        <a:srgbClr val="CCCCCC"/>
+                      </a:solidFill>
+                      <a:prstDash val="solid"/>
+                      <a:round/>
+                      <a:headEnd type="none" w="med" len="med"/>
+                      <a:tailEnd type="none" w="med" len="med"/>
+                    </a:lnB>
+                    <a:solidFill>
+                      <a:srgbClr val="EAF0F6"/>
+                    </a:solidFill>
+                  </a:tcPr>
+                </a:tc>
+              </a:tr>
+              <a:tr h="411480">
+                <a:tc>
+                  <a:txBody>
+                    <a:bodyPr/>
+                    <a:lstStyle/>
+                    <a:p>
+                      <a:pPr algn="ctr" indent="0" marL="0">
+                        <a:buNone/>
+                      </a:pPr>
+                      <a:r>
+                        <a:rPr lang="en-US" sz="1200" b="1" dirty="0">
+                          <a:solidFill>
+                            <a:srgbClr val="1B2838"/>
+                          </a:solidFill>
+                        </a:rPr>
+                        <a:t>Tamaño (N)</a:t>
+                      </a:r>
+                      <a:endParaRPr lang="en-US" sz="1200" dirty="0"/>
+                    </a:p>
+                  </a:txBody>
+                  <a:tcPr marL="91440" marR="91440" marT="45720" marB="45720" anchor="ctr">
+                    <a:lnL w="6350" cap="flat" cmpd="sng" algn="ctr">
+                      <a:solidFill>
+                        <a:srgbClr val="CCCCCC"/>
+                      </a:solidFill>
+                      <a:prstDash val="solid"/>
+                      <a:round/>
+                      <a:headEnd type="none" w="med" len="med"/>
+                      <a:tailEnd type="none" w="med" len="med"/>
+                    </a:lnL>
+                    <a:lnR w="6350" cap="flat" cmpd="sng" algn="ctr">
+                      <a:solidFill>
+                        <a:srgbClr val="CCCCCC"/>
+                      </a:solidFill>
+                      <a:prstDash val="solid"/>
+                      <a:round/>
+                      <a:headEnd type="none" w="med" len="med"/>
+                      <a:tailEnd type="none" w="med" len="med"/>
+                    </a:lnR>
+                    <a:lnT w="6350" cap="flat" cmpd="sng" algn="ctr">
+                      <a:solidFill>
+                        <a:srgbClr val="CCCCCC"/>
+                      </a:solidFill>
+                      <a:prstDash val="solid"/>
+                      <a:round/>
+                      <a:headEnd type="none" w="med" len="med"/>
+                      <a:tailEnd type="none" w="med" len="med"/>
+                    </a:lnT>
+                    <a:lnB w="6350" cap="flat" cmpd="sng" algn="ctr">
+                      <a:solidFill>
+                        <a:srgbClr val="CCCCCC"/>
+                      </a:solidFill>
+                      <a:prstDash val="solid"/>
+                      <a:round/>
+                      <a:headEnd type="none" w="med" len="med"/>
+                      <a:tailEnd type="none" w="med" len="med"/>
+                    </a:lnB>
+                    <a:solidFill>
+                      <a:srgbClr val="FFFFFF"/>
+                    </a:solidFill>
+                  </a:tcPr>
+                </a:tc>
+                <a:tc>
+                  <a:txBody>
+                    <a:bodyPr/>
+                    <a:lstStyle/>
+                    <a:p>
+                      <a:pPr algn="ctr" indent="0" marL="0">
+                        <a:buNone/>
+                      </a:pPr>
+                      <a:r>
+                        <a:rPr lang="en-US" sz="1200" dirty="0">
+                          <a:solidFill>
+                            <a:srgbClr val="1B2838"/>
+                          </a:solidFill>
+                        </a:rPr>
+                        <a:t>68,794.05</a:t>
+                      </a:r>
+                      <a:endParaRPr lang="en-US" sz="1200" dirty="0"/>
+                    </a:p>
+                  </a:txBody>
+                  <a:tcPr marL="91440" marR="91440" marT="45720" marB="45720" anchor="ctr">
+                    <a:lnL w="6350" cap="flat" cmpd="sng" algn="ctr">
+                      <a:solidFill>
+                        <a:srgbClr val="CCCCCC"/>
+                      </a:solidFill>
+                      <a:prstDash val="solid"/>
+                      <a:round/>
+                      <a:headEnd type="none" w="med" len="med"/>
+                      <a:tailEnd type="none" w="med" len="med"/>
+                    </a:lnL>
+                    <a:lnR w="6350" cap="flat" cmpd="sng" algn="ctr">
+                      <a:solidFill>
+                        <a:srgbClr val="CCCCCC"/>
+                      </a:solidFill>
+                      <a:prstDash val="solid"/>
+                      <a:round/>
+                      <a:headEnd type="none" w="med" len="med"/>
+                      <a:tailEnd type="none" w="med" len="med"/>
+                    </a:lnR>
+                    <a:lnT w="6350" cap="flat" cmpd="sng" algn="ctr">
+                      <a:solidFill>
+                        <a:srgbClr val="CCCCCC"/>
+                      </a:solidFill>
+                      <a:prstDash val="solid"/>
+                      <a:round/>
+                      <a:headEnd type="none" w="med" len="med"/>
+                      <a:tailEnd type="none" w="med" len="med"/>
+                    </a:lnT>
+                    <a:lnB w="6350" cap="flat" cmpd="sng" algn="ctr">
+                      <a:solidFill>
+                        <a:srgbClr val="CCCCCC"/>
+                      </a:solidFill>
+                      <a:prstDash val="solid"/>
+                      <a:round/>
+                      <a:headEnd type="none" w="med" len="med"/>
+                      <a:tailEnd type="none" w="med" len="med"/>
+                    </a:lnB>
+                    <a:solidFill>
+                      <a:srgbClr val="FFFFFF"/>
+                    </a:solidFill>
+                  </a:tcPr>
+                </a:tc>
+                <a:tc>
+                  <a:txBody>
+                    <a:bodyPr/>
+                    <a:lstStyle/>
+                    <a:p>
+                      <a:pPr algn="ctr" indent="0" marL="0">
+                        <a:buNone/>
+                      </a:pPr>
+                      <a:r>
+                        <a:rPr lang="en-US" sz="1200" dirty="0">
+                          <a:solidFill>
+                            <a:srgbClr val="1B2838"/>
+                          </a:solidFill>
+                        </a:rPr>
+                        <a:t>2.01 × 10⁻¹⁶⁸</a:t>
+                      </a:r>
+                      <a:endParaRPr lang="en-US" sz="1200" dirty="0"/>
+                    </a:p>
+                  </a:txBody>
+                  <a:tcPr marL="91440" marR="91440" marT="45720" marB="45720" anchor="ctr">
+                    <a:lnL w="6350" cap="flat" cmpd="sng" algn="ctr">
+                      <a:solidFill>
+                        <a:srgbClr val="CCCCCC"/>
+                      </a:solidFill>
+                      <a:prstDash val="solid"/>
+                      <a:round/>
+                      <a:headEnd type="none" w="med" len="med"/>
+                      <a:tailEnd type="none" w="med" len="med"/>
+                    </a:lnL>
+                    <a:lnR w="6350" cap="flat" cmpd="sng" algn="ctr">
+                      <a:solidFill>
+                        <a:srgbClr val="CCCCCC"/>
+                      </a:solidFill>
+                      <a:prstDash val="solid"/>
+                      <a:round/>
+                      <a:headEnd type="none" w="med" len="med"/>
+                      <a:tailEnd type="none" w="med" len="med"/>
+                    </a:lnR>
+                    <a:lnT w="6350" cap="flat" cmpd="sng" algn="ctr">
+                      <a:solidFill>
+                        <a:srgbClr val="CCCCCC"/>
+                      </a:solidFill>
+                      <a:prstDash val="solid"/>
+                      <a:round/>
+                      <a:headEnd type="none" w="med" len="med"/>
+                      <a:tailEnd type="none" w="med" len="med"/>
+                    </a:lnT>
+                    <a:lnB w="6350" cap="flat" cmpd="sng" algn="ctr">
+                      <a:solidFill>
+                        <a:srgbClr val="CCCCCC"/>
+                      </a:solidFill>
+                      <a:prstDash val="solid"/>
+                      <a:round/>
+                      <a:headEnd type="none" w="med" len="med"/>
+                      <a:tailEnd type="none" w="med" len="med"/>
+                    </a:lnB>
+                    <a:solidFill>
+                      <a:srgbClr val="FFFFFF"/>
+                    </a:solidFill>
+                  </a:tcPr>
+                </a:tc>
+                <a:tc>
+                  <a:txBody>
+                    <a:bodyPr/>
+                    <a:lstStyle/>
+                    <a:p>
+                      <a:pPr algn="ctr" indent="0" marL="0">
+                        <a:buNone/>
+                      </a:pPr>
+                      <a:r>
+                        <a:rPr lang="en-US" sz="1600" b="1" dirty="0">
+                          <a:solidFill>
+                            <a:srgbClr val="F96167"/>
+                          </a:solidFill>
+                        </a:rPr>
+                        <a:t>***</a:t>
+                      </a:r>
+                      <a:endParaRPr lang="en-US" sz="1600" dirty="0"/>
+                    </a:p>
+                  </a:txBody>
+                  <a:tcPr marL="91440" marR="91440" marT="45720" marB="45720" anchor="ctr">
+                    <a:lnL w="6350" cap="flat" cmpd="sng" algn="ctr">
+                      <a:solidFill>
+                        <a:srgbClr val="CCCCCC"/>
+                      </a:solidFill>
+                      <a:prstDash val="solid"/>
+                      <a:round/>
+                      <a:headEnd type="none" w="med" len="med"/>
+                      <a:tailEnd type="none" w="med" len="med"/>
+                    </a:lnL>
+                    <a:lnR w="6350" cap="flat" cmpd="sng" algn="ctr">
+                      <a:solidFill>
+                        <a:srgbClr val="CCCCCC"/>
+                      </a:solidFill>
+                      <a:prstDash val="solid"/>
+                      <a:round/>
+                      <a:headEnd type="none" w="med" len="med"/>
+                      <a:tailEnd type="none" w="med" len="med"/>
+                    </a:lnR>
+                    <a:lnT w="6350" cap="flat" cmpd="sng" algn="ctr">
+                      <a:solidFill>
+                        <a:srgbClr val="CCCCCC"/>
+                      </a:solidFill>
+                      <a:prstDash val="solid"/>
+                      <a:round/>
+                      <a:headEnd type="none" w="med" len="med"/>
+                      <a:tailEnd type="none" w="med" len="med"/>
+                    </a:lnT>
+                    <a:lnB w="6350" cap="flat" cmpd="sng" algn="ctr">
+                      <a:solidFill>
+                        <a:srgbClr val="CCCCCC"/>
+                      </a:solidFill>
+                      <a:prstDash val="solid"/>
+                      <a:round/>
+                      <a:headEnd type="none" w="med" len="med"/>
+                      <a:tailEnd type="none" w="med" len="med"/>
+                    </a:lnB>
+                    <a:solidFill>
+                      <a:srgbClr val="FFFFFF"/>
+                    </a:solidFill>
+                  </a:tcPr>
+                </a:tc>
+              </a:tr>
+              <a:tr h="411480">
+                <a:tc>
+                  <a:txBody>
+                    <a:bodyPr/>
+                    <a:lstStyle/>
+                    <a:p>
+                      <a:pPr algn="ctr" indent="0" marL="0">
+                        <a:buNone/>
+                      </a:pPr>
+                      <a:r>
+                        <a:rPr lang="en-US" sz="1200" b="1" dirty="0">
+                          <a:solidFill>
+                            <a:srgbClr val="1B2838"/>
+                          </a:solidFill>
+                        </a:rPr>
+                        <a:t>Lenguaje × Tamaño</a:t>
+                      </a:r>
+                      <a:endParaRPr lang="en-US" sz="1200" dirty="0"/>
+                    </a:p>
+                  </a:txBody>
+                  <a:tcPr marL="91440" marR="91440" marT="45720" marB="45720" anchor="ctr">
+                    <a:lnL w="6350" cap="flat" cmpd="sng" algn="ctr">
+                      <a:solidFill>
+                        <a:srgbClr val="CCCCCC"/>
+                      </a:solidFill>
+                      <a:prstDash val="solid"/>
+                      <a:round/>
+                      <a:headEnd type="none" w="med" len="med"/>
+                      <a:tailEnd type="none" w="med" len="med"/>
+                    </a:lnL>
+                    <a:lnR w="6350" cap="flat" cmpd="sng" algn="ctr">
+                      <a:solidFill>
+                        <a:srgbClr val="CCCCCC"/>
+                      </a:solidFill>
+                      <a:prstDash val="solid"/>
+                      <a:round/>
+                      <a:headEnd type="none" w="med" len="med"/>
+                      <a:tailEnd type="none" w="med" len="med"/>
+                    </a:lnR>
+                    <a:lnT w="6350" cap="flat" cmpd="sng" algn="ctr">
+                      <a:solidFill>
+                        <a:srgbClr val="CCCCCC"/>
+                      </a:solidFill>
+                      <a:prstDash val="solid"/>
+                      <a:round/>
+                      <a:headEnd type="none" w="med" len="med"/>
+                      <a:tailEnd type="none" w="med" len="med"/>
+                    </a:lnT>
+                    <a:lnB w="6350" cap="flat" cmpd="sng" algn="ctr">
+                      <a:solidFill>
+                        <a:srgbClr val="CCCCCC"/>
+                      </a:solidFill>
+                      <a:prstDash val="solid"/>
+                      <a:round/>
+                      <a:headEnd type="none" w="med" len="med"/>
+                      <a:tailEnd type="none" w="med" len="med"/>
+                    </a:lnB>
+                    <a:solidFill>
+                      <a:srgbClr val="EAF0F6"/>
+                    </a:solidFill>
+                  </a:tcPr>
+                </a:tc>
+                <a:tc>
+                  <a:txBody>
+                    <a:bodyPr/>
+                    <a:lstStyle/>
+                    <a:p>
+                      <a:pPr algn="ctr" indent="0" marL="0">
+                        <a:buNone/>
+                      </a:pPr>
+                      <a:r>
+                        <a:rPr lang="en-US" sz="1200" dirty="0">
+                          <a:solidFill>
+                            <a:srgbClr val="1B2838"/>
+                          </a:solidFill>
+                        </a:rPr>
+                        <a:t>25,489.80</a:t>
+                      </a:r>
+                      <a:endParaRPr lang="en-US" sz="1200" dirty="0"/>
+                    </a:p>
+                  </a:txBody>
+                  <a:tcPr marL="91440" marR="91440" marT="45720" marB="45720" anchor="ctr">
+                    <a:lnL w="6350" cap="flat" cmpd="sng" algn="ctr">
+                      <a:solidFill>
+                        <a:srgbClr val="CCCCCC"/>
+                      </a:solidFill>
+                      <a:prstDash val="solid"/>
+                      <a:round/>
+                      <a:headEnd type="none" w="med" len="med"/>
+                      <a:tailEnd type="none" w="med" len="med"/>
+                    </a:lnL>
+                    <a:lnR w="6350" cap="flat" cmpd="sng" algn="ctr">
+                      <a:solidFill>
+                        <a:srgbClr val="CCCCCC"/>
+                      </a:solidFill>
+                      <a:prstDash val="solid"/>
+                      <a:round/>
+                      <a:headEnd type="none" w="med" len="med"/>
+                      <a:tailEnd type="none" w="med" len="med"/>
+                    </a:lnR>
+                    <a:lnT w="6350" cap="flat" cmpd="sng" algn="ctr">
+                      <a:solidFill>
+                        <a:srgbClr val="CCCCCC"/>
+                      </a:solidFill>
+                      <a:prstDash val="solid"/>
+                      <a:round/>
+                      <a:headEnd type="none" w="med" len="med"/>
+                      <a:tailEnd type="none" w="med" len="med"/>
+                    </a:lnT>
+                    <a:lnB w="6350" cap="flat" cmpd="sng" algn="ctr">
+                      <a:solidFill>
+                        <a:srgbClr val="CCCCCC"/>
+                      </a:solidFill>
+                      <a:prstDash val="solid"/>
+                      <a:round/>
+                      <a:headEnd type="none" w="med" len="med"/>
+                      <a:tailEnd type="none" w="med" len="med"/>
+                    </a:lnB>
+                    <a:solidFill>
+                      <a:srgbClr val="EAF0F6"/>
+                    </a:solidFill>
+                  </a:tcPr>
+                </a:tc>
+                <a:tc>
+                  <a:txBody>
+                    <a:bodyPr/>
+                    <a:lstStyle/>
+                    <a:p>
+                      <a:pPr algn="ctr" indent="0" marL="0">
+                        <a:buNone/>
+                      </a:pPr>
+                      <a:r>
+                        <a:rPr lang="en-US" sz="1200" dirty="0">
+                          <a:solidFill>
+                            <a:srgbClr val="1B2838"/>
+                          </a:solidFill>
+                        </a:rPr>
+                        <a:t>1.03 × 10⁻¹⁶⁷</a:t>
+                      </a:r>
+                      <a:endParaRPr lang="en-US" sz="1200" dirty="0"/>
+                    </a:p>
+                  </a:txBody>
+                  <a:tcPr marL="91440" marR="91440" marT="45720" marB="45720" anchor="ctr">
+                    <a:lnL w="6350" cap="flat" cmpd="sng" algn="ctr">
+                      <a:solidFill>
+                        <a:srgbClr val="CCCCCC"/>
+                      </a:solidFill>
+                      <a:prstDash val="solid"/>
+                      <a:round/>
+                      <a:headEnd type="none" w="med" len="med"/>
+                      <a:tailEnd type="none" w="med" len="med"/>
+                    </a:lnL>
+                    <a:lnR w="6350" cap="flat" cmpd="sng" algn="ctr">
+                      <a:solidFill>
+                        <a:srgbClr val="CCCCCC"/>
+                      </a:solidFill>
+                      <a:prstDash val="solid"/>
+                      <a:round/>
+                      <a:headEnd type="none" w="med" len="med"/>
+                      <a:tailEnd type="none" w="med" len="med"/>
+                    </a:lnR>
+                    <a:lnT w="6350" cap="flat" cmpd="sng" algn="ctr">
+                      <a:solidFill>
+                        <a:srgbClr val="CCCCCC"/>
+                      </a:solidFill>
+                      <a:prstDash val="solid"/>
+                      <a:round/>
+                      <a:headEnd type="none" w="med" len="med"/>
+                      <a:tailEnd type="none" w="med" len="med"/>
+                    </a:lnT>
+                    <a:lnB w="6350" cap="flat" cmpd="sng" algn="ctr">
+                      <a:solidFill>
+                        <a:srgbClr val="CCCCCC"/>
+                      </a:solidFill>
+                      <a:prstDash val="solid"/>
+                      <a:round/>
+                      <a:headEnd type="none" w="med" len="med"/>
+                      <a:tailEnd type="none" w="med" len="med"/>
+                    </a:lnB>
+                    <a:solidFill>
+                      <a:srgbClr val="EAF0F6"/>
+                    </a:solidFill>
+                  </a:tcPr>
+                </a:tc>
+                <a:tc>
+                  <a:txBody>
+                    <a:bodyPr/>
+                    <a:lstStyle/>
+                    <a:p>
+                      <a:pPr algn="ctr" indent="0" marL="0">
+                        <a:buNone/>
+                      </a:pPr>
+                      <a:r>
+                        <a:rPr lang="en-US" sz="1600" b="1" dirty="0">
+                          <a:solidFill>
+                            <a:srgbClr val="F96167"/>
+                          </a:solidFill>
+                        </a:rPr>
+                        <a:t>***</a:t>
+                      </a:r>
+                      <a:endParaRPr lang="en-US" sz="1600" dirty="0"/>
+                    </a:p>
+                  </a:txBody>
+                  <a:tcPr marL="91440" marR="91440" marT="45720" marB="45720" anchor="ctr">
+                    <a:lnL w="6350" cap="flat" cmpd="sng" algn="ctr">
+                      <a:solidFill>
+                        <a:srgbClr val="CCCCCC"/>
+                      </a:solidFill>
+                      <a:prstDash val="solid"/>
+                      <a:round/>
+                      <a:headEnd type="none" w="med" len="med"/>
+                      <a:tailEnd type="none" w="med" len="med"/>
+                    </a:lnL>
+                    <a:lnR w="6350" cap="flat" cmpd="sng" algn="ctr">
+                      <a:solidFill>
+                        <a:srgbClr val="CCCCCC"/>
+                      </a:solidFill>
+                      <a:prstDash val="solid"/>
+                      <a:round/>
+                      <a:headEnd type="none" w="med" len="med"/>
+                      <a:tailEnd type="none" w="med" len="med"/>
+                    </a:lnR>
+                    <a:lnT w="6350" cap="flat" cmpd="sng" algn="ctr">
+                      <a:solidFill>
+                        <a:srgbClr val="CCCCCC"/>
+                      </a:solidFill>
+                      <a:prstDash val="solid"/>
+                      <a:round/>
+                      <a:headEnd type="none" w="med" len="med"/>
+                      <a:tailEnd type="none" w="med" len="med"/>
+                    </a:lnT>
+                    <a:lnB w="6350" cap="flat" cmpd="sng" algn="ctr">
+                      <a:solidFill>
+                        <a:srgbClr val="CCCCCC"/>
+                      </a:solidFill>
+                      <a:prstDash val="solid"/>
+                      <a:round/>
+                      <a:headEnd type="none" w="med" len="med"/>
+                      <a:tailEnd type="none" w="med" len="med"/>
+                    </a:lnB>
+                    <a:solidFill>
+                      <a:srgbClr val="EAF0F6"/>
+                    </a:solidFill>
+                  </a:tcPr>
+                </a:tc>
+              </a:tr>
+            </a:tbl>
+          </a:graphicData>
+        </a:graphic>
+      </p:graphicFrame>
+      <p:sp>
+        <p:nvSpPr>
+          <p:cNvPr id="5" name="Shape 2"/>
+          <p:cNvSpPr/>
+          <p:nvPr/>
+        </p:nvSpPr>
+        <p:spPr>
+          <a:xfrm>
+            <a:off x="457200" y="3291840"/>
+            <a:ext cx="8229600" cy="1188720"/>
+          </a:xfrm>
+          <a:prstGeom prst="roundRect">
+            <a:avLst>
+              <a:gd name="adj" fmla="val 7692"/>
+            </a:avLst>
+          </a:prstGeom>
+          <a:solidFill>
+            <a:srgbClr val="EAF0F6"/>
+          </a:solidFill>
+          <a:ln/>
+        </p:spPr>
+      </p:sp>
+      <p:sp>
+        <p:nvSpPr>
+          <p:cNvPr id="6" name="Text 3"/>
+          <p:cNvSpPr txBox="1"/>
+          <p:nvPr/>
+        </p:nvSpPr>
+        <p:spPr>
+          <a:xfrm>
+            <a:off x="640080" y="3383280"/>
+            <a:ext cx="7863840" cy="1005840"/>
+          </a:xfrm>
+          <a:prstGeom prst="rect">
+            <a:avLst/>
+          </a:prstGeom>
+          <a:noFill/>
+          <a:ln/>
+        </p:spPr>
+        <p:txBody>
+          <a:bodyPr wrap="square" lIns="0" tIns="0" rIns="0" bIns="0" rtlCol="0" anchor="ctr"/>
+          <a:lstStyle/>
+          <a:p>
+            <a:pPr indent="0" marL="0">
+              <a:buNone/>
+            </a:pPr>
+            <a:r>
+              <a:rPr lang="en-US" sz="1600" b="1" dirty="0">
+                <a:solidFill>
+                  <a:srgbClr val="F96167"/>
+                </a:solidFill>
+              </a:rPr>
+              <a:t>Resultado: Se rechaza H₀
+</a:t>
+            </a:r>
+            <a:endParaRPr lang="en-US" sz="1600" dirty="0"/>
+          </a:p>
+          <a:p>
+            <a:pPr indent="0" marL="0">
+              <a:buNone/>
+            </a:pPr>
+            <a:r>
+              <a:rPr lang="en-US" sz="1300" dirty="0">
+                <a:solidFill>
+                  <a:srgbClr val="1B2838"/>
+                </a:solidFill>
+              </a:rPr>
+              <a:t>Los tres factores (lenguaje, tamaño y su interacción) son altamente significativos (p &lt; 0.001).
+</a:t>
+            </a:r>
+            <a:endParaRPr lang="en-US" sz="1600" dirty="0"/>
+          </a:p>
+          <a:p>
+            <a:pPr indent="0" marL="0">
+              <a:buNone/>
+            </a:pPr>
+            <a:r>
+              <a:rPr lang="en-US" sz="1300" dirty="0">
+                <a:solidFill>
+                  <a:srgbClr val="1C7293"/>
+                </a:solidFill>
+              </a:rPr>
+              <a:t>La interacción confirma que el efecto del lenguaje depende del tamaño de la matriz.</a:t>
+            </a:r>
+            <a:endParaRPr lang="en-US" sz="1600" dirty="0"/>
+          </a:p>
+        </p:txBody>
+      </p:sp>
+      <p:sp>
+        <p:nvSpPr>
+          <p:cNvPr id="25" name="Slide Number Placeholder 0"/>
+          <p:cNvSpPr>
+            <a:spLocks noGrp="1"/>
+          </p:cNvSpPr>
+          <p:nvPr>
+            <p:ph type="sldNum" sz="quarter" idx="4294967295"/>
+          </p:nvPr>
+        </p:nvSpPr>
+        <p:spPr>
+          <a:xfrm>
+            <a:off x="8412480" y="4773168"/>
+            <a:ext cx="548640" cy="320040"/>
+          </a:xfrm>
+          <a:prstGeom prst="rect">
+            <a:avLst/>
+          </a:prstGeom>
+          <a:extLst>
+            <a:ext uri="{C572A759-6A51-4108-AA02-DFA0A04FC94B}">
+              <ma14:wrappingTextBoxFlag xmlns:ma14="http://schemas.microsoft.com/office/mac/drawingml/2011/main" val="0"/>
+            </a:ext>
+          </a:extLst>
+        </p:spPr>
+        <p:txBody>
+          <a:bodyPr/>
+          <a:lstStyle>
+            <a:lvl1pPr>
+              <a:defRPr sz="900">
+                <a:solidFill>
+                  <a:srgbClr val="1C7293"/>
+                </a:solidFill>
+              </a:defRPr>
+            </a:lvl1pPr>
+          </a:lstStyle>
+          <a:p>
+            <a:pPr algn="l"/>
+            <a:fld id="{F7021451-1387-4CA6-816F-3879F97B5CBC}" type="slidenum">
+              <a:rPr b="0" lang="en-US"/>
+              <a:t>21</a:t>
+            </a:fld>
+            <a:endParaRPr lang="en-US"/>
+          </a:p>
+        </p:txBody>
+      </p:sp>
+    </p:spTree>
+  </p:cSld>
+  <p:clrMapOvr>
+    <a:masterClrMapping/>
+  </p:clrMapOvr>
+</p:sld>
+</file>
+
+<file path=ppt/slides/slide22.xml><?xml version="1.0" encoding="utf-8"?>
+<p:sld xmlns:a="http://schemas.openxmlformats.org/drawingml/2006/main" xmlns:r="http://schemas.openxmlformats.org/officeDocument/2006/relationships" xmlns:p="http://schemas.openxmlformats.org/presentationml/2006/main">
+  <p:cSld name="Slide 22">
+    <p:spTree>
+      <p:nvGrpSpPr>
+        <p:cNvPr id="1" name=""/>
+        <p:cNvGrpSpPr/>
+        <p:nvPr/>
+      </p:nvGrpSpPr>
+      <p:grpSpPr>
+        <a:xfrm>
+          <a:off x="0" y="0"/>
+          <a:ext cx="0" cy="0"/>
+          <a:chOff x="0" y="0"/>
+          <a:chExt cx="0" cy="0"/>
+        </a:xfrm>
+      </p:grpSpPr>
+      <p:sp>
+        <p:nvSpPr>
+          <p:cNvPr id="2" name="Text 0"/>
+          <p:cNvSpPr txBox="1"/>
+          <p:nvPr/>
+        </p:nvSpPr>
+        <p:spPr>
+          <a:xfrm>
+            <a:off x="457200" y="274320"/>
+            <a:ext cx="8229600" cy="548640"/>
+          </a:xfrm>
+          <a:prstGeom prst="rect">
+            <a:avLst/>
+          </a:prstGeom>
+          <a:noFill/>
+          <a:ln/>
+        </p:spPr>
+        <p:txBody>
+          <a:bodyPr wrap="square" lIns="0" tIns="0" rIns="0" bIns="0" rtlCol="0" anchor="ctr"/>
+          <a:lstStyle/>
+          <a:p>
+            <a:pPr indent="0" marL="0">
+              <a:buNone/>
+            </a:pPr>
+            <a:r>
+              <a:rPr lang="en-US" sz="3400" b="1" dirty="0">
+                <a:solidFill>
+                  <a:srgbClr val="1B2838"/>
+                </a:solidFill>
+              </a:rPr>
+              <a:t>Comparaciones Post-hoc: Tukey HSD</a:t>
+            </a:r>
+            <a:endParaRPr lang="en-US" sz="3400" dirty="0"/>
+          </a:p>
+        </p:txBody>
+      </p:sp>
+      <p:sp>
+        <p:nvSpPr>
+          <p:cNvPr id="3" name="Text 1"/>
+          <p:cNvSpPr txBox="1"/>
+          <p:nvPr/>
+        </p:nvSpPr>
+        <p:spPr>
+          <a:xfrm>
+            <a:off x="457200" y="868680"/>
+            <a:ext cx="8229600" cy="320040"/>
+          </a:xfrm>
+          <a:prstGeom prst="rect">
+            <a:avLst/>
+          </a:prstGeom>
+          <a:noFill/>
+          <a:ln/>
+        </p:spPr>
+        <p:txBody>
+          <a:bodyPr wrap="square" lIns="0" tIns="0" rIns="0" bIns="0" rtlCol="0" anchor="ctr"/>
+          <a:lstStyle/>
+          <a:p>
+            <a:pPr indent="0" marL="0">
+              <a:buNone/>
+            </a:pPr>
+            <a:r>
+              <a:rPr lang="en-US" sz="1400" b="1" dirty="0">
+                <a:solidFill>
+                  <a:srgbClr val="065A82"/>
+                </a:solidFill>
+              </a:rPr>
+              <a:t>Comparaciones por pares (colapsando tamaño)</a:t>
+            </a:r>
+            <a:endParaRPr lang="en-US" sz="1400" dirty="0"/>
+          </a:p>
+        </p:txBody>
+      </p:sp>
+      <p:graphicFrame>
+        <p:nvGraphicFramePr>
+          <p:cNvPr id="23" name="Table 0"/>
+          <p:cNvGraphicFramePr>
+            <a:graphicFrameLocks noGrp="1"/>
+          </p:cNvGraphicFramePr>
+          <p:nvPr>
+            <p:extLst>
+              <p:ext uri="{D42A27DB-BD31-4B8C-83A1-F6EECF244321}">
+                <p14:modId xmlns:p14="http://schemas.microsoft.com/office/powerpoint/2010/main" val="1579011935"/>
+              </p:ext>
+            </p:extLst>
+          </p:nvPr>
+        </p:nvGraphicFramePr>
+        <p:xfrm>
+          <a:off x="457200" y="1234440"/>
+          <a:ext cx="8229600" cy="914400"/>
+        </p:xfrm>
+        <a:graphic>
+          <a:graphicData uri="http://schemas.openxmlformats.org/drawingml/2006/table">
+            <a:tbl>
+              <a:tblPr/>
+              <a:tblGrid>
+                <a:gridCol w="2286000"/>
+                <a:gridCol w="1828800"/>
+                <a:gridCol w="2011680"/>
+                <a:gridCol w="2103120"/>
+              </a:tblGrid>
+              <a:tr h="365760">
+                <a:tc>
+                  <a:txBody>
+                    <a:bodyPr/>
+                    <a:lstStyle/>
+                    <a:p>
+                      <a:pPr algn="ctr" indent="0" marL="0">
+                        <a:buNone/>
+                      </a:pPr>
+                      <a:r>
+                        <a:rPr lang="en-US" sz="1100" b="1" dirty="0">
+                          <a:solidFill>
+                            <a:srgbClr val="FFFFFF"/>
+                          </a:solidFill>
+                        </a:rPr>
+                        <a:t>Comparación</a:t>
+                      </a:r>
+                      <a:endParaRPr lang="en-US" sz="1100" dirty="0"/>
+                    </a:p>
+                  </a:txBody>
+                  <a:tcPr marL="91440" marR="91440" marT="45720" marB="45720" anchor="ctr">
+                    <a:lnL w="6350" cap="flat" cmpd="sng" algn="ctr">
+                      <a:solidFill>
+                        <a:srgbClr val="CCCCCC"/>
+                      </a:solidFill>
+                      <a:prstDash val="solid"/>
+                      <a:round/>
+                      <a:headEnd type="none" w="med" len="med"/>
+                      <a:tailEnd type="none" w="med" len="med"/>
+                    </a:lnL>
+                    <a:lnR w="6350" cap="flat" cmpd="sng" algn="ctr">
+                      <a:solidFill>
+                        <a:srgbClr val="CCCCCC"/>
+                      </a:solidFill>
+                      <a:prstDash val="solid"/>
+                      <a:round/>
+                      <a:headEnd type="none" w="med" len="med"/>
+                      <a:tailEnd type="none" w="med" len="med"/>
+                    </a:lnR>
+                    <a:lnT w="6350" cap="flat" cmpd="sng" algn="ctr">
+                      <a:solidFill>
+                        <a:srgbClr val="CCCCCC"/>
+                      </a:solidFill>
+                      <a:prstDash val="solid"/>
+                      <a:round/>
+                      <a:headEnd type="none" w="med" len="med"/>
+                      <a:tailEnd type="none" w="med" len="med"/>
+                    </a:lnT>
+                    <a:lnB w="6350" cap="flat" cmpd="sng" algn="ctr">
+                      <a:solidFill>
+                        <a:srgbClr val="CCCCCC"/>
+                      </a:solidFill>
+                      <a:prstDash val="solid"/>
+                      <a:round/>
+                      <a:headEnd type="none" w="med" len="med"/>
+                      <a:tailEnd type="none" w="med" len="med"/>
+                    </a:lnB>
+                    <a:solidFill>
+                      <a:srgbClr val="065A82"/>
+                    </a:solidFill>
+                  </a:tcPr>
+                </a:tc>
+                <a:tc>
+                  <a:txBody>
+                    <a:bodyPr/>
+                    <a:lstStyle/>
+                    <a:p>
+                      <a:pPr algn="ctr" indent="0" marL="0">
+                        <a:buNone/>
+                      </a:pPr>
+                      <a:r>
+                        <a:rPr lang="en-US" sz="1100" b="1" dirty="0">
+                          <a:solidFill>
+                            <a:srgbClr val="FFFFFF"/>
+                          </a:solidFill>
+                        </a:rPr>
+                        <a:t>Diferencia</a:t>
+                      </a:r>
+                      <a:endParaRPr lang="en-US" sz="1100" dirty="0"/>
+                    </a:p>
+                  </a:txBody>
+                  <a:tcPr marL="91440" marR="91440" marT="45720" marB="45720" anchor="ctr">
+                    <a:lnL w="6350" cap="flat" cmpd="sng" algn="ctr">
+                      <a:solidFill>
+                        <a:srgbClr val="CCCCCC"/>
+                      </a:solidFill>
+                      <a:prstDash val="solid"/>
+                      <a:round/>
+                      <a:headEnd type="none" w="med" len="med"/>
+                      <a:tailEnd type="none" w="med" len="med"/>
+                    </a:lnL>
+                    <a:lnR w="6350" cap="flat" cmpd="sng" algn="ctr">
+                      <a:solidFill>
+                        <a:srgbClr val="CCCCCC"/>
+                      </a:solidFill>
+                      <a:prstDash val="solid"/>
+                      <a:round/>
+                      <a:headEnd type="none" w="med" len="med"/>
+                      <a:tailEnd type="none" w="med" len="med"/>
+                    </a:lnR>
+                    <a:lnT w="6350" cap="flat" cmpd="sng" algn="ctr">
+                      <a:solidFill>
+                        <a:srgbClr val="CCCCCC"/>
+                      </a:solidFill>
+                      <a:prstDash val="solid"/>
+                      <a:round/>
+                      <a:headEnd type="none" w="med" len="med"/>
+                      <a:tailEnd type="none" w="med" len="med"/>
+                    </a:lnT>
+                    <a:lnB w="6350" cap="flat" cmpd="sng" algn="ctr">
+                      <a:solidFill>
+                        <a:srgbClr val="CCCCCC"/>
+                      </a:solidFill>
+                      <a:prstDash val="solid"/>
+                      <a:round/>
+                      <a:headEnd type="none" w="med" len="med"/>
+                      <a:tailEnd type="none" w="med" len="med"/>
+                    </a:lnB>
+                    <a:solidFill>
+                      <a:srgbClr val="065A82"/>
+                    </a:solidFill>
+                  </a:tcPr>
+                </a:tc>
+                <a:tc>
+                  <a:txBody>
+                    <a:bodyPr/>
+                    <a:lstStyle/>
+                    <a:p>
+                      <a:pPr algn="ctr" indent="0" marL="0">
+                        <a:buNone/>
+                      </a:pPr>
+                      <a:r>
+                        <a:rPr lang="en-US" sz="1100" b="1" dirty="0">
+                          <a:solidFill>
+                            <a:srgbClr val="FFFFFF"/>
+                          </a:solidFill>
+                        </a:rPr>
+                        <a:t>p-adj</a:t>
+                      </a:r>
+                      <a:endParaRPr lang="en-US" sz="1100" dirty="0"/>
+                    </a:p>
+                  </a:txBody>
+                  <a:tcPr marL="91440" marR="91440" marT="45720" marB="45720" anchor="ctr">
+                    <a:lnL w="6350" cap="flat" cmpd="sng" algn="ctr">
+                      <a:solidFill>
+                        <a:srgbClr val="CCCCCC"/>
+                      </a:solidFill>
+                      <a:prstDash val="solid"/>
+                      <a:round/>
+                      <a:headEnd type="none" w="med" len="med"/>
+                      <a:tailEnd type="none" w="med" len="med"/>
+                    </a:lnL>
+                    <a:lnR w="6350" cap="flat" cmpd="sng" algn="ctr">
+                      <a:solidFill>
+                        <a:srgbClr val="CCCCCC"/>
+                      </a:solidFill>
+                      <a:prstDash val="solid"/>
+                      <a:round/>
+                      <a:headEnd type="none" w="med" len="med"/>
+                      <a:tailEnd type="none" w="med" len="med"/>
+                    </a:lnR>
+                    <a:lnT w="6350" cap="flat" cmpd="sng" algn="ctr">
+                      <a:solidFill>
+                        <a:srgbClr val="CCCCCC"/>
+                      </a:solidFill>
+                      <a:prstDash val="solid"/>
+                      <a:round/>
+                      <a:headEnd type="none" w="med" len="med"/>
+                      <a:tailEnd type="none" w="med" len="med"/>
+                    </a:lnT>
+                    <a:lnB w="6350" cap="flat" cmpd="sng" algn="ctr">
+                      <a:solidFill>
+                        <a:srgbClr val="CCCCCC"/>
+                      </a:solidFill>
+                      <a:prstDash val="solid"/>
+                      <a:round/>
+                      <a:headEnd type="none" w="med" len="med"/>
+                      <a:tailEnd type="none" w="med" len="med"/>
+                    </a:lnB>
+                    <a:solidFill>
+                      <a:srgbClr val="065A82"/>
+                    </a:solidFill>
+                  </a:tcPr>
+                </a:tc>
+                <a:tc>
+                  <a:txBody>
+                    <a:bodyPr/>
+                    <a:lstStyle/>
+                    <a:p>
+                      <a:pPr algn="ctr" indent="0" marL="0">
+                        <a:buNone/>
+                      </a:pPr>
+                      <a:r>
+                        <a:rPr lang="en-US" sz="1100" b="1" dirty="0">
+                          <a:solidFill>
+                            <a:srgbClr val="FFFFFF"/>
+                          </a:solidFill>
+                        </a:rPr>
+                        <a:t>¿Significativo?</a:t>
+                      </a:r>
+                      <a:endParaRPr lang="en-US" sz="1100" dirty="0"/>
+                    </a:p>
+                  </a:txBody>
+                  <a:tcPr marL="91440" marR="91440" marT="45720" marB="45720" anchor="ctr">
+                    <a:lnL w="6350" cap="flat" cmpd="sng" algn="ctr">
+                      <a:solidFill>
+                        <a:srgbClr val="CCCCCC"/>
+                      </a:solidFill>
+                      <a:prstDash val="solid"/>
+                      <a:round/>
+                      <a:headEnd type="none" w="med" len="med"/>
+                      <a:tailEnd type="none" w="med" len="med"/>
+                    </a:lnL>
+                    <a:lnR w="6350" cap="flat" cmpd="sng" algn="ctr">
+                      <a:solidFill>
+                        <a:srgbClr val="CCCCCC"/>
+                      </a:solidFill>
+                      <a:prstDash val="solid"/>
+                      <a:round/>
+                      <a:headEnd type="none" w="med" len="med"/>
+                      <a:tailEnd type="none" w="med" len="med"/>
+                    </a:lnR>
+                    <a:lnT w="6350" cap="flat" cmpd="sng" algn="ctr">
+                      <a:solidFill>
+                        <a:srgbClr val="CCCCCC"/>
+                      </a:solidFill>
+                      <a:prstDash val="solid"/>
+                      <a:round/>
+                      <a:headEnd type="none" w="med" len="med"/>
+                      <a:tailEnd type="none" w="med" len="med"/>
+                    </a:lnT>
+                    <a:lnB w="6350" cap="flat" cmpd="sng" algn="ctr">
+                      <a:solidFill>
+                        <a:srgbClr val="CCCCCC"/>
+                      </a:solidFill>
+                      <a:prstDash val="solid"/>
+                      <a:round/>
+                      <a:headEnd type="none" w="med" len="med"/>
+                      <a:tailEnd type="none" w="med" len="med"/>
+                    </a:lnB>
+                    <a:solidFill>
+                      <a:srgbClr val="065A82"/>
+                    </a:solidFill>
+                  </a:tcPr>
+                </a:tc>
+              </a:tr>
+              <a:tr h="320040">
+                <a:tc>
+                  <a:txBody>
+                    <a:bodyPr/>
+                    <a:lstStyle/>
+                    <a:p>
+                      <a:pPr algn="ctr" indent="0" marL="0">
+                        <a:buNone/>
+                      </a:pPr>
+                      <a:r>
+                        <a:rPr lang="en-US" sz="1100" dirty="0">
+                          <a:solidFill>
+                            <a:srgbClr val="1B2838"/>
+                          </a:solidFill>
+                        </a:rPr>
+                        <a:t>C++ vs Go</a:t>
+                      </a:r>
+                      <a:endParaRPr lang="en-US" sz="1100" dirty="0"/>
+                    </a:p>
+                  </a:txBody>
+                  <a:tcPr marL="91440" marR="91440" marT="45720" marB="45720" anchor="ctr">
+                    <a:lnL w="6350" cap="flat" cmpd="sng" algn="ctr">
+                      <a:solidFill>
+                        <a:srgbClr val="CCCCCC"/>
+                      </a:solidFill>
+                      <a:prstDash val="solid"/>
+                      <a:round/>
+                      <a:headEnd type="none" w="med" len="med"/>
+                      <a:tailEnd type="none" w="med" len="med"/>
+                    </a:lnL>
+                    <a:lnR w="6350" cap="flat" cmpd="sng" algn="ctr">
+                      <a:solidFill>
+                        <a:srgbClr val="CCCCCC"/>
+                      </a:solidFill>
+                      <a:prstDash val="solid"/>
+                      <a:round/>
+                      <a:headEnd type="none" w="med" len="med"/>
+                      <a:tailEnd type="none" w="med" len="med"/>
+                    </a:lnR>
+                    <a:lnT w="6350" cap="flat" cmpd="sng" algn="ctr">
+                      <a:solidFill>
+                        <a:srgbClr val="CCCCCC"/>
+                      </a:solidFill>
+                      <a:prstDash val="solid"/>
+                      <a:round/>
+                      <a:headEnd type="none" w="med" len="med"/>
+                      <a:tailEnd type="none" w="med" len="med"/>
+                    </a:lnT>
+                    <a:lnB w="6350" cap="flat" cmpd="sng" algn="ctr">
+                      <a:solidFill>
+                        <a:srgbClr val="CCCCCC"/>
+                      </a:solidFill>
+                      <a:prstDash val="solid"/>
+                      <a:round/>
+                      <a:headEnd type="none" w="med" len="med"/>
+                      <a:tailEnd type="none" w="med" len="med"/>
+                    </a:lnB>
+                    <a:solidFill>
+                      <a:srgbClr val="EAF0F6"/>
+                    </a:solidFill>
+                  </a:tcPr>
+                </a:tc>
+                <a:tc>
+                  <a:txBody>
+                    <a:bodyPr/>
+                    <a:lstStyle/>
+                    <a:p>
+                      <a:pPr algn="ctr" indent="0" marL="0">
+                        <a:buNone/>
+                      </a:pPr>
+                      <a:r>
+                        <a:rPr lang="en-US" sz="1100" dirty="0">
+                          <a:solidFill>
+                            <a:srgbClr val="1B2838"/>
+                          </a:solidFill>
+                        </a:rPr>
+                        <a:t>−34.03 s</a:t>
+                      </a:r>
+                      <a:endParaRPr lang="en-US" sz="1100" dirty="0"/>
+                    </a:p>
+                  </a:txBody>
+                  <a:tcPr marL="91440" marR="91440" marT="45720" marB="45720" anchor="ctr">
+                    <a:lnL w="6350" cap="flat" cmpd="sng" algn="ctr">
+                      <a:solidFill>
+                        <a:srgbClr val="CCCCCC"/>
+                      </a:solidFill>
+                      <a:prstDash val="solid"/>
+                      <a:round/>
+                      <a:headEnd type="none" w="med" len="med"/>
+                      <a:tailEnd type="none" w="med" len="med"/>
+                    </a:lnL>
+                    <a:lnR w="6350" cap="flat" cmpd="sng" algn="ctr">
+                      <a:solidFill>
+                        <a:srgbClr val="CCCCCC"/>
+                      </a:solidFill>
+                      <a:prstDash val="solid"/>
+                      <a:round/>
+                      <a:headEnd type="none" w="med" len="med"/>
+                      <a:tailEnd type="none" w="med" len="med"/>
+                    </a:lnR>
+                    <a:lnT w="6350" cap="flat" cmpd="sng" algn="ctr">
+                      <a:solidFill>
+                        <a:srgbClr val="CCCCCC"/>
+                      </a:solidFill>
+                      <a:prstDash val="solid"/>
+                      <a:round/>
+                      <a:headEnd type="none" w="med" len="med"/>
+                      <a:tailEnd type="none" w="med" len="med"/>
+                    </a:lnT>
+                    <a:lnB w="6350" cap="flat" cmpd="sng" algn="ctr">
+                      <a:solidFill>
+                        <a:srgbClr val="CCCCCC"/>
+                      </a:solidFill>
+                      <a:prstDash val="solid"/>
+                      <a:round/>
+                      <a:headEnd type="none" w="med" len="med"/>
+                      <a:tailEnd type="none" w="med" len="med"/>
+                    </a:lnB>
+                    <a:solidFill>
+                      <a:srgbClr val="EAF0F6"/>
+                    </a:solidFill>
+                  </a:tcPr>
+                </a:tc>
+                <a:tc>
+                  <a:txBody>
+                    <a:bodyPr/>
+                    <a:lstStyle/>
+                    <a:p>
+                      <a:pPr algn="ctr" indent="0" marL="0">
+                        <a:buNone/>
+                      </a:pPr>
+                      <a:r>
+                        <a:rPr lang="en-US" sz="1100" dirty="0">
+                          <a:solidFill>
+                            <a:srgbClr val="1B2838"/>
+                          </a:solidFill>
+                        </a:rPr>
+                        <a:t>0.2887</a:t>
+                      </a:r>
+                      <a:endParaRPr lang="en-US" sz="1100" dirty="0"/>
+                    </a:p>
+                  </a:txBody>
+                  <a:tcPr marL="91440" marR="91440" marT="45720" marB="45720" anchor="ctr">
+                    <a:lnL w="6350" cap="flat" cmpd="sng" algn="ctr">
+                      <a:solidFill>
+                        <a:srgbClr val="CCCCCC"/>
+                      </a:solidFill>
+                      <a:prstDash val="solid"/>
+                      <a:round/>
+                      <a:headEnd type="none" w="med" len="med"/>
+                      <a:tailEnd type="none" w="med" len="med"/>
+                    </a:lnL>
+                    <a:lnR w="6350" cap="flat" cmpd="sng" algn="ctr">
+                      <a:solidFill>
+                        <a:srgbClr val="CCCCCC"/>
+                      </a:solidFill>
+                      <a:prstDash val="solid"/>
+                      <a:round/>
+                      <a:headEnd type="none" w="med" len="med"/>
+                      <a:tailEnd type="none" w="med" len="med"/>
+                    </a:lnR>
+                    <a:lnT w="6350" cap="flat" cmpd="sng" algn="ctr">
+                      <a:solidFill>
+                        <a:srgbClr val="CCCCCC"/>
+                      </a:solidFill>
+                      <a:prstDash val="solid"/>
+                      <a:round/>
+                      <a:headEnd type="none" w="med" len="med"/>
+                      <a:tailEnd type="none" w="med" len="med"/>
+                    </a:lnT>
+                    <a:lnB w="6350" cap="flat" cmpd="sng" algn="ctr">
+                      <a:solidFill>
+                        <a:srgbClr val="CCCCCC"/>
+                      </a:solidFill>
+                      <a:prstDash val="solid"/>
+                      <a:round/>
+                      <a:headEnd type="none" w="med" len="med"/>
+                      <a:tailEnd type="none" w="med" len="med"/>
+                    </a:lnB>
+                    <a:solidFill>
+                      <a:srgbClr val="EAF0F6"/>
+                    </a:solidFill>
+                  </a:tcPr>
+                </a:tc>
+                <a:tc>
+                  <a:txBody>
+                    <a:bodyPr/>
+                    <a:lstStyle/>
+                    <a:p>
+                      <a:pPr algn="ctr" indent="0" marL="0">
+                        <a:buNone/>
+                      </a:pPr>
+                      <a:r>
+                        <a:rPr lang="en-US" sz="1100" b="1" dirty="0">
+                          <a:solidFill>
+                            <a:srgbClr val="2ECC71"/>
+                          </a:solidFill>
+                        </a:rPr>
+                        <a:t>No</a:t>
+                      </a:r>
+                      <a:endParaRPr lang="en-US" sz="1100" dirty="0"/>
+                    </a:p>
+                  </a:txBody>
+                  <a:tcPr marL="91440" marR="91440" marT="45720" marB="45720" anchor="ctr">
+                    <a:lnL w="6350" cap="flat" cmpd="sng" algn="ctr">
+                      <a:solidFill>
+                        <a:srgbClr val="CCCCCC"/>
+                      </a:solidFill>
+                      <a:prstDash val="solid"/>
+                      <a:round/>
+                      <a:headEnd type="none" w="med" len="med"/>
+                      <a:tailEnd type="none" w="med" len="med"/>
+                    </a:lnL>
+                    <a:lnR w="6350" cap="flat" cmpd="sng" algn="ctr">
+                      <a:solidFill>
+                        <a:srgbClr val="CCCCCC"/>
+                      </a:solidFill>
+                      <a:prstDash val="solid"/>
+                      <a:round/>
+                      <a:headEnd type="none" w="med" len="med"/>
+                      <a:tailEnd type="none" w="med" len="med"/>
+                    </a:lnR>
+                    <a:lnT w="6350" cap="flat" cmpd="sng" algn="ctr">
+                      <a:solidFill>
+                        <a:srgbClr val="CCCCCC"/>
+                      </a:solidFill>
+                      <a:prstDash val="solid"/>
+                      <a:round/>
+                      <a:headEnd type="none" w="med" len="med"/>
+                      <a:tailEnd type="none" w="med" len="med"/>
+                    </a:lnT>
+                    <a:lnB w="6350" cap="flat" cmpd="sng" algn="ctr">
+                      <a:solidFill>
+                        <a:srgbClr val="CCCCCC"/>
+                      </a:solidFill>
+                      <a:prstDash val="solid"/>
+                      <a:round/>
+                      <a:headEnd type="none" w="med" len="med"/>
+                      <a:tailEnd type="none" w="med" len="med"/>
+                    </a:lnB>
+                    <a:solidFill>
+                      <a:srgbClr val="EAF0F6"/>
+                    </a:solidFill>
+                  </a:tcPr>
+                </a:tc>
+              </a:tr>
+              <a:tr h="320040">
+                <a:tc>
+                  <a:txBody>
+                    <a:bodyPr/>
+                    <a:lstStyle/>
+                    <a:p>
+                      <a:pPr algn="ctr" indent="0" marL="0">
+                        <a:buNone/>
+                      </a:pPr>
+                      <a:r>
+                        <a:rPr lang="en-US" sz="1100" dirty="0">
+                          <a:solidFill>
+                            <a:srgbClr val="1B2838"/>
+                          </a:solidFill>
+                        </a:rPr>
+                        <a:t>C++ vs Java</a:t>
+                      </a:r>
+                      <a:endParaRPr lang="en-US" sz="1100" dirty="0"/>
+                    </a:p>
+                  </a:txBody>
+                  <a:tcPr marL="91440" marR="91440" marT="45720" marB="45720" anchor="ctr">
+                    <a:lnL w="6350" cap="flat" cmpd="sng" algn="ctr">
+                      <a:solidFill>
+                        <a:srgbClr val="CCCCCC"/>
+                      </a:solidFill>
+                      <a:prstDash val="solid"/>
+                      <a:round/>
+                      <a:headEnd type="none" w="med" len="med"/>
+                      <a:tailEnd type="none" w="med" len="med"/>
+                    </a:lnL>
+                    <a:lnR w="6350" cap="flat" cmpd="sng" algn="ctr">
+                      <a:solidFill>
+                        <a:srgbClr val="CCCCCC"/>
+                      </a:solidFill>
+                      <a:prstDash val="solid"/>
+                      <a:round/>
+                      <a:headEnd type="none" w="med" len="med"/>
+                      <a:tailEnd type="none" w="med" len="med"/>
+                    </a:lnR>
+                    <a:lnT w="6350" cap="flat" cmpd="sng" algn="ctr">
+                      <a:solidFill>
+                        <a:srgbClr val="CCCCCC"/>
+                      </a:solidFill>
+                      <a:prstDash val="solid"/>
+                      <a:round/>
+                      <a:headEnd type="none" w="med" len="med"/>
+                      <a:tailEnd type="none" w="med" len="med"/>
+                    </a:lnT>
+                    <a:lnB w="6350" cap="flat" cmpd="sng" algn="ctr">
+                      <a:solidFill>
+                        <a:srgbClr val="CCCCCC"/>
+                      </a:solidFill>
+                      <a:prstDash val="solid"/>
+                      <a:round/>
+                      <a:headEnd type="none" w="med" len="med"/>
+                      <a:tailEnd type="none" w="med" len="med"/>
+                    </a:lnB>
+                    <a:solidFill>
+                      <a:srgbClr val="FFFFFF"/>
+                    </a:solidFill>
+                  </a:tcPr>
+                </a:tc>
+                <a:tc>
+                  <a:txBody>
+                    <a:bodyPr/>
+                    <a:lstStyle/>
+                    <a:p>
+                      <a:pPr algn="ctr" indent="0" marL="0">
+                        <a:buNone/>
+                      </a:pPr>
+                      <a:r>
+                        <a:rPr lang="en-US" sz="1100" dirty="0">
+                          <a:solidFill>
+                            <a:srgbClr val="1B2838"/>
+                          </a:solidFill>
+                        </a:rPr>
+                        <a:t>−31.95 s</a:t>
+                      </a:r>
+                      <a:endParaRPr lang="en-US" sz="1100" dirty="0"/>
+                    </a:p>
+                  </a:txBody>
+                  <a:tcPr marL="91440" marR="91440" marT="45720" marB="45720" anchor="ctr">
+                    <a:lnL w="6350" cap="flat" cmpd="sng" algn="ctr">
+                      <a:solidFill>
+                        <a:srgbClr val="CCCCCC"/>
+                      </a:solidFill>
+                      <a:prstDash val="solid"/>
+                      <a:round/>
+                      <a:headEnd type="none" w="med" len="med"/>
+                      <a:tailEnd type="none" w="med" len="med"/>
+                    </a:lnL>
+                    <a:lnR w="6350" cap="flat" cmpd="sng" algn="ctr">
+                      <a:solidFill>
+                        <a:srgbClr val="CCCCCC"/>
+                      </a:solidFill>
+                      <a:prstDash val="solid"/>
+                      <a:round/>
+                      <a:headEnd type="none" w="med" len="med"/>
+                      <a:tailEnd type="none" w="med" len="med"/>
+                    </a:lnR>
+                    <a:lnT w="6350" cap="flat" cmpd="sng" algn="ctr">
+                      <a:solidFill>
+                        <a:srgbClr val="CCCCCC"/>
+                      </a:solidFill>
+                      <a:prstDash val="solid"/>
+                      <a:round/>
+                      <a:headEnd type="none" w="med" len="med"/>
+                      <a:tailEnd type="none" w="med" len="med"/>
+                    </a:lnT>
+                    <a:lnB w="6350" cap="flat" cmpd="sng" algn="ctr">
+                      <a:solidFill>
+                        <a:srgbClr val="CCCCCC"/>
+                      </a:solidFill>
+                      <a:prstDash val="solid"/>
+                      <a:round/>
+                      <a:headEnd type="none" w="med" len="med"/>
+                      <a:tailEnd type="none" w="med" len="med"/>
+                    </a:lnB>
+                    <a:solidFill>
+                      <a:srgbClr val="FFFFFF"/>
+                    </a:solidFill>
+                  </a:tcPr>
+                </a:tc>
+                <a:tc>
+                  <a:txBody>
+                    <a:bodyPr/>
+                    <a:lstStyle/>
+                    <a:p>
+                      <a:pPr algn="ctr" indent="0" marL="0">
+                        <a:buNone/>
+                      </a:pPr>
+                      <a:r>
+                        <a:rPr lang="en-US" sz="1100" dirty="0">
+                          <a:solidFill>
+                            <a:srgbClr val="1B2838"/>
+                          </a:solidFill>
+                        </a:rPr>
+                        <a:t>0.3442</a:t>
+                      </a:r>
+                      <a:endParaRPr lang="en-US" sz="1100" dirty="0"/>
+                    </a:p>
+                  </a:txBody>
+                  <a:tcPr marL="91440" marR="91440" marT="45720" marB="45720" anchor="ctr">
+                    <a:lnL w="6350" cap="flat" cmpd="sng" algn="ctr">
+                      <a:solidFill>
+                        <a:srgbClr val="CCCCCC"/>
+                      </a:solidFill>
+                      <a:prstDash val="solid"/>
+                      <a:round/>
+                      <a:headEnd type="none" w="med" len="med"/>
+                      <a:tailEnd type="none" w="med" len="med"/>
+                    </a:lnL>
+                    <a:lnR w="6350" cap="flat" cmpd="sng" algn="ctr">
+                      <a:solidFill>
+                        <a:srgbClr val="CCCCCC"/>
+                      </a:solidFill>
+                      <a:prstDash val="solid"/>
+                      <a:round/>
+                      <a:headEnd type="none" w="med" len="med"/>
+                      <a:tailEnd type="none" w="med" len="med"/>
+                    </a:lnR>
+                    <a:lnT w="6350" cap="flat" cmpd="sng" algn="ctr">
+                      <a:solidFill>
+                        <a:srgbClr val="CCCCCC"/>
+                      </a:solidFill>
+                      <a:prstDash val="solid"/>
+                      <a:round/>
+                      <a:headEnd type="none" w="med" len="med"/>
+                      <a:tailEnd type="none" w="med" len="med"/>
+                    </a:lnT>
+                    <a:lnB w="6350" cap="flat" cmpd="sng" algn="ctr">
+                      <a:solidFill>
+                        <a:srgbClr val="CCCCCC"/>
+                      </a:solidFill>
+                      <a:prstDash val="solid"/>
+                      <a:round/>
+                      <a:headEnd type="none" w="med" len="med"/>
+                      <a:tailEnd type="none" w="med" len="med"/>
+                    </a:lnB>
+                    <a:solidFill>
+                      <a:srgbClr val="FFFFFF"/>
+                    </a:solidFill>
+                  </a:tcPr>
+                </a:tc>
+                <a:tc>
+                  <a:txBody>
+                    <a:bodyPr/>
+                    <a:lstStyle/>
+                    <a:p>
+                      <a:pPr algn="ctr" indent="0" marL="0">
+                        <a:buNone/>
+                      </a:pPr>
+                      <a:r>
+                        <a:rPr lang="en-US" sz="1100" b="1" dirty="0">
+                          <a:solidFill>
+                            <a:srgbClr val="2ECC71"/>
+                          </a:solidFill>
+                        </a:rPr>
+                        <a:t>No</a:t>
+                      </a:r>
+                      <a:endParaRPr lang="en-US" sz="1100" dirty="0"/>
+                    </a:p>
+                  </a:txBody>
+                  <a:tcPr marL="91440" marR="91440" marT="45720" marB="45720" anchor="ctr">
+                    <a:lnL w="6350" cap="flat" cmpd="sng" algn="ctr">
+                      <a:solidFill>
+                        <a:srgbClr val="CCCCCC"/>
+                      </a:solidFill>
+                      <a:prstDash val="solid"/>
+                      <a:round/>
+                      <a:headEnd type="none" w="med" len="med"/>
+                      <a:tailEnd type="none" w="med" len="med"/>
+                    </a:lnL>
+                    <a:lnR w="6350" cap="flat" cmpd="sng" algn="ctr">
+                      <a:solidFill>
+                        <a:srgbClr val="CCCCCC"/>
+                      </a:solidFill>
+                      <a:prstDash val="solid"/>
+                      <a:round/>
+                      <a:headEnd type="none" w="med" len="med"/>
+                      <a:tailEnd type="none" w="med" len="med"/>
+                    </a:lnR>
+                    <a:lnT w="6350" cap="flat" cmpd="sng" algn="ctr">
+                      <a:solidFill>
+                        <a:srgbClr val="CCCCCC"/>
+                      </a:solidFill>
+                      <a:prstDash val="solid"/>
+                      <a:round/>
+                      <a:headEnd type="none" w="med" len="med"/>
+                      <a:tailEnd type="none" w="med" len="med"/>
+                    </a:lnT>
+                    <a:lnB w="6350" cap="flat" cmpd="sng" algn="ctr">
+                      <a:solidFill>
+                        <a:srgbClr val="CCCCCC"/>
+                      </a:solidFill>
+                      <a:prstDash val="solid"/>
+                      <a:round/>
+                      <a:headEnd type="none" w="med" len="med"/>
+                      <a:tailEnd type="none" w="med" len="med"/>
+                    </a:lnB>
+                    <a:solidFill>
+                      <a:srgbClr val="FFFFFF"/>
+                    </a:solidFill>
+                  </a:tcPr>
+                </a:tc>
+              </a:tr>
+              <a:tr h="320040">
+                <a:tc>
+                  <a:txBody>
+                    <a:bodyPr/>
+                    <a:lstStyle/>
+                    <a:p>
+                      <a:pPr algn="ctr" indent="0" marL="0">
+                        <a:buNone/>
+                      </a:pPr>
+                      <a:r>
+                        <a:rPr lang="en-US" sz="1100" dirty="0">
+                          <a:solidFill>
+                            <a:srgbClr val="1B2838"/>
+                          </a:solidFill>
+                        </a:rPr>
+                        <a:t>Go vs Java</a:t>
+                      </a:r>
+                      <a:endParaRPr lang="en-US" sz="1100" dirty="0"/>
+                    </a:p>
+                  </a:txBody>
+                  <a:tcPr marL="91440" marR="91440" marT="45720" marB="45720" anchor="ctr">
+                    <a:lnL w="6350" cap="flat" cmpd="sng" algn="ctr">
+                      <a:solidFill>
+                        <a:srgbClr val="CCCCCC"/>
+                      </a:solidFill>
+                      <a:prstDash val="solid"/>
+                      <a:round/>
+                      <a:headEnd type="none" w="med" len="med"/>
+                      <a:tailEnd type="none" w="med" len="med"/>
+                    </a:lnL>
+                    <a:lnR w="6350" cap="flat" cmpd="sng" algn="ctr">
+                      <a:solidFill>
+                        <a:srgbClr val="CCCCCC"/>
+                      </a:solidFill>
+                      <a:prstDash val="solid"/>
+                      <a:round/>
+                      <a:headEnd type="none" w="med" len="med"/>
+                      <a:tailEnd type="none" w="med" len="med"/>
+                    </a:lnR>
+                    <a:lnT w="6350" cap="flat" cmpd="sng" algn="ctr">
+                      <a:solidFill>
+                        <a:srgbClr val="CCCCCC"/>
+                      </a:solidFill>
+                      <a:prstDash val="solid"/>
+                      <a:round/>
+                      <a:headEnd type="none" w="med" len="med"/>
+                      <a:tailEnd type="none" w="med" len="med"/>
+                    </a:lnT>
+                    <a:lnB w="6350" cap="flat" cmpd="sng" algn="ctr">
+                      <a:solidFill>
+                        <a:srgbClr val="CCCCCC"/>
+                      </a:solidFill>
+                      <a:prstDash val="solid"/>
+                      <a:round/>
+                      <a:headEnd type="none" w="med" len="med"/>
+                      <a:tailEnd type="none" w="med" len="med"/>
+                    </a:lnB>
+                    <a:solidFill>
+                      <a:srgbClr val="EAF0F6"/>
+                    </a:solidFill>
+                  </a:tcPr>
+                </a:tc>
+                <a:tc>
+                  <a:txBody>
+                    <a:bodyPr/>
+                    <a:lstStyle/>
+                    <a:p>
+                      <a:pPr algn="ctr" indent="0" marL="0">
+                        <a:buNone/>
+                      </a:pPr>
+                      <a:r>
+                        <a:rPr lang="en-US" sz="1100" dirty="0">
+                          <a:solidFill>
+                            <a:srgbClr val="1B2838"/>
+                          </a:solidFill>
+                        </a:rPr>
+                        <a:t>2.08 s</a:t>
+                      </a:r>
+                      <a:endParaRPr lang="en-US" sz="1100" dirty="0"/>
+                    </a:p>
+                  </a:txBody>
+                  <a:tcPr marL="91440" marR="91440" marT="45720" marB="45720" anchor="ctr">
+                    <a:lnL w="6350" cap="flat" cmpd="sng" algn="ctr">
+                      <a:solidFill>
+                        <a:srgbClr val="CCCCCC"/>
+                      </a:solidFill>
+                      <a:prstDash val="solid"/>
+                      <a:round/>
+                      <a:headEnd type="none" w="med" len="med"/>
+                      <a:tailEnd type="none" w="med" len="med"/>
+                    </a:lnL>
+                    <a:lnR w="6350" cap="flat" cmpd="sng" algn="ctr">
+                      <a:solidFill>
+                        <a:srgbClr val="CCCCCC"/>
+                      </a:solidFill>
+                      <a:prstDash val="solid"/>
+                      <a:round/>
+                      <a:headEnd type="none" w="med" len="med"/>
+                      <a:tailEnd type="none" w="med" len="med"/>
+                    </a:lnR>
+                    <a:lnT w="6350" cap="flat" cmpd="sng" algn="ctr">
+                      <a:solidFill>
+                        <a:srgbClr val="CCCCCC"/>
+                      </a:solidFill>
+                      <a:prstDash val="solid"/>
+                      <a:round/>
+                      <a:headEnd type="none" w="med" len="med"/>
+                      <a:tailEnd type="none" w="med" len="med"/>
+                    </a:lnT>
+                    <a:lnB w="6350" cap="flat" cmpd="sng" algn="ctr">
+                      <a:solidFill>
+                        <a:srgbClr val="CCCCCC"/>
+                      </a:solidFill>
+                      <a:prstDash val="solid"/>
+                      <a:round/>
+                      <a:headEnd type="none" w="med" len="med"/>
+                      <a:tailEnd type="none" w="med" len="med"/>
+                    </a:lnB>
+                    <a:solidFill>
+                      <a:srgbClr val="EAF0F6"/>
+                    </a:solidFill>
+                  </a:tcPr>
+                </a:tc>
+                <a:tc>
+                  <a:txBody>
+                    <a:bodyPr/>
+                    <a:lstStyle/>
+                    <a:p>
+                      <a:pPr algn="ctr" indent="0" marL="0">
+                        <a:buNone/>
+                      </a:pPr>
+                      <a:r>
+                        <a:rPr lang="en-US" sz="1100" dirty="0">
+                          <a:solidFill>
+                            <a:srgbClr val="1B2838"/>
+                          </a:solidFill>
+                        </a:rPr>
+                        <a:t>0.9995</a:t>
+                      </a:r>
+                      <a:endParaRPr lang="en-US" sz="1100" dirty="0"/>
+                    </a:p>
+                  </a:txBody>
+                  <a:tcPr marL="91440" marR="91440" marT="45720" marB="45720" anchor="ctr">
+                    <a:lnL w="6350" cap="flat" cmpd="sng" algn="ctr">
+                      <a:solidFill>
+                        <a:srgbClr val="CCCCCC"/>
+                      </a:solidFill>
+                      <a:prstDash val="solid"/>
+                      <a:round/>
+                      <a:headEnd type="none" w="med" len="med"/>
+                      <a:tailEnd type="none" w="med" len="med"/>
+                    </a:lnL>
+                    <a:lnR w="6350" cap="flat" cmpd="sng" algn="ctr">
+                      <a:solidFill>
+                        <a:srgbClr val="CCCCCC"/>
+                      </a:solidFill>
+                      <a:prstDash val="solid"/>
+                      <a:round/>
+                      <a:headEnd type="none" w="med" len="med"/>
+                      <a:tailEnd type="none" w="med" len="med"/>
+                    </a:lnR>
+                    <a:lnT w="6350" cap="flat" cmpd="sng" algn="ctr">
+                      <a:solidFill>
+                        <a:srgbClr val="CCCCCC"/>
+                      </a:solidFill>
+                      <a:prstDash val="solid"/>
+                      <a:round/>
+                      <a:headEnd type="none" w="med" len="med"/>
+                      <a:tailEnd type="none" w="med" len="med"/>
+                    </a:lnT>
+                    <a:lnB w="6350" cap="flat" cmpd="sng" algn="ctr">
+                      <a:solidFill>
+                        <a:srgbClr val="CCCCCC"/>
+                      </a:solidFill>
+                      <a:prstDash val="solid"/>
+                      <a:round/>
+                      <a:headEnd type="none" w="med" len="med"/>
+                      <a:tailEnd type="none" w="med" len="med"/>
+                    </a:lnB>
+                    <a:solidFill>
+                      <a:srgbClr val="EAF0F6"/>
+                    </a:solidFill>
+                  </a:tcPr>
+                </a:tc>
+                <a:tc>
+                  <a:txBody>
+                    <a:bodyPr/>
+                    <a:lstStyle/>
+                    <a:p>
+                      <a:pPr algn="ctr" indent="0" marL="0">
+                        <a:buNone/>
+                      </a:pPr>
+                      <a:r>
+                        <a:rPr lang="en-US" sz="1100" b="1" dirty="0">
+                          <a:solidFill>
+                            <a:srgbClr val="2ECC71"/>
+                          </a:solidFill>
+                        </a:rPr>
+                        <a:t>No</a:t>
+                      </a:r>
+                      <a:endParaRPr lang="en-US" sz="1100" dirty="0"/>
+                    </a:p>
+                  </a:txBody>
+                  <a:tcPr marL="91440" marR="91440" marT="45720" marB="45720" anchor="ctr">
+                    <a:lnL w="6350" cap="flat" cmpd="sng" algn="ctr">
+                      <a:solidFill>
+                        <a:srgbClr val="CCCCCC"/>
+                      </a:solidFill>
+                      <a:prstDash val="solid"/>
+                      <a:round/>
+                      <a:headEnd type="none" w="med" len="med"/>
+                      <a:tailEnd type="none" w="med" len="med"/>
+                    </a:lnL>
+                    <a:lnR w="6350" cap="flat" cmpd="sng" algn="ctr">
+                      <a:solidFill>
+                        <a:srgbClr val="CCCCCC"/>
+                      </a:solidFill>
+                      <a:prstDash val="solid"/>
+                      <a:round/>
+                      <a:headEnd type="none" w="med" len="med"/>
+                      <a:tailEnd type="none" w="med" len="med"/>
+                    </a:lnR>
+                    <a:lnT w="6350" cap="flat" cmpd="sng" algn="ctr">
+                      <a:solidFill>
+                        <a:srgbClr val="CCCCCC"/>
+                      </a:solidFill>
+                      <a:prstDash val="solid"/>
+                      <a:round/>
+                      <a:headEnd type="none" w="med" len="med"/>
+                      <a:tailEnd type="none" w="med" len="med"/>
+                    </a:lnT>
+                    <a:lnB w="6350" cap="flat" cmpd="sng" algn="ctr">
+                      <a:solidFill>
+                        <a:srgbClr val="CCCCCC"/>
+                      </a:solidFill>
+                      <a:prstDash val="solid"/>
+                      <a:round/>
+                      <a:headEnd type="none" w="med" len="med"/>
+                      <a:tailEnd type="none" w="med" len="med"/>
+                    </a:lnB>
+                    <a:solidFill>
+                      <a:srgbClr val="EAF0F6"/>
+                    </a:solidFill>
+                  </a:tcPr>
+                </a:tc>
+              </a:tr>
+              <a:tr h="320040">
+                <a:tc>
+                  <a:txBody>
+                    <a:bodyPr/>
+                    <a:lstStyle/>
+                    <a:p>
+                      <a:pPr algn="ctr" indent="0" marL="0">
+                        <a:buNone/>
+                      </a:pPr>
+                      <a:r>
+                        <a:rPr lang="en-US" sz="1100" dirty="0">
+                          <a:solidFill>
+                            <a:srgbClr val="1B2838"/>
+                          </a:solidFill>
+                        </a:rPr>
+                        <a:t>C++ vs Python</a:t>
+                      </a:r>
+                      <a:endParaRPr lang="en-US" sz="1100" dirty="0"/>
+                    </a:p>
+                  </a:txBody>
+                  <a:tcPr marL="91440" marR="91440" marT="45720" marB="45720" anchor="ctr">
+                    <a:lnL w="6350" cap="flat" cmpd="sng" algn="ctr">
+                      <a:solidFill>
+                        <a:srgbClr val="CCCCCC"/>
+                      </a:solidFill>
+                      <a:prstDash val="solid"/>
+                      <a:round/>
+                      <a:headEnd type="none" w="med" len="med"/>
+                      <a:tailEnd type="none" w="med" len="med"/>
+                    </a:lnL>
+                    <a:lnR w="6350" cap="flat" cmpd="sng" algn="ctr">
+                      <a:solidFill>
+                        <a:srgbClr val="CCCCCC"/>
+                      </a:solidFill>
+                      <a:prstDash val="solid"/>
+                      <a:round/>
+                      <a:headEnd type="none" w="med" len="med"/>
+                      <a:tailEnd type="none" w="med" len="med"/>
+                    </a:lnR>
+                    <a:lnT w="6350" cap="flat" cmpd="sng" algn="ctr">
+                      <a:solidFill>
+                        <a:srgbClr val="CCCCCC"/>
+                      </a:solidFill>
+                      <a:prstDash val="solid"/>
+                      <a:round/>
+                      <a:headEnd type="none" w="med" len="med"/>
+                      <a:tailEnd type="none" w="med" len="med"/>
+                    </a:lnT>
+                    <a:lnB w="6350" cap="flat" cmpd="sng" algn="ctr">
+                      <a:solidFill>
+                        <a:srgbClr val="CCCCCC"/>
+                      </a:solidFill>
+                      <a:prstDash val="solid"/>
+                      <a:round/>
+                      <a:headEnd type="none" w="med" len="med"/>
+                      <a:tailEnd type="none" w="med" len="med"/>
+                    </a:lnB>
+                    <a:solidFill>
+                      <a:srgbClr val="FFFFFF"/>
+                    </a:solidFill>
+                  </a:tcPr>
+                </a:tc>
+                <a:tc>
+                  <a:txBody>
+                    <a:bodyPr/>
+                    <a:lstStyle/>
+                    <a:p>
+                      <a:pPr algn="ctr" indent="0" marL="0">
+                        <a:buNone/>
+                      </a:pPr>
+                      <a:r>
+                        <a:rPr lang="en-US" sz="1100" dirty="0">
+                          <a:solidFill>
+                            <a:srgbClr val="F96167"/>
+                          </a:solidFill>
+                        </a:rPr>
+                        <a:t>+109.29 s</a:t>
+                      </a:r>
+                      <a:endParaRPr lang="en-US" sz="1100" dirty="0"/>
+                    </a:p>
+                  </a:txBody>
+                  <a:tcPr marL="91440" marR="91440" marT="45720" marB="45720" anchor="ctr">
+                    <a:lnL w="6350" cap="flat" cmpd="sng" algn="ctr">
+                      <a:solidFill>
+                        <a:srgbClr val="CCCCCC"/>
+                      </a:solidFill>
+                      <a:prstDash val="solid"/>
+                      <a:round/>
+                      <a:headEnd type="none" w="med" len="med"/>
+                      <a:tailEnd type="none" w="med" len="med"/>
+                    </a:lnL>
+                    <a:lnR w="6350" cap="flat" cmpd="sng" algn="ctr">
+                      <a:solidFill>
+                        <a:srgbClr val="CCCCCC"/>
+                      </a:solidFill>
+                      <a:prstDash val="solid"/>
+                      <a:round/>
+                      <a:headEnd type="none" w="med" len="med"/>
+                      <a:tailEnd type="none" w="med" len="med"/>
+                    </a:lnR>
+                    <a:lnT w="6350" cap="flat" cmpd="sng" algn="ctr">
+                      <a:solidFill>
+                        <a:srgbClr val="CCCCCC"/>
+                      </a:solidFill>
+                      <a:prstDash val="solid"/>
+                      <a:round/>
+                      <a:headEnd type="none" w="med" len="med"/>
+                      <a:tailEnd type="none" w="med" len="med"/>
+                    </a:lnT>
+                    <a:lnB w="6350" cap="flat" cmpd="sng" algn="ctr">
+                      <a:solidFill>
+                        <a:srgbClr val="CCCCCC"/>
+                      </a:solidFill>
+                      <a:prstDash val="solid"/>
+                      <a:round/>
+                      <a:headEnd type="none" w="med" len="med"/>
+                      <a:tailEnd type="none" w="med" len="med"/>
+                    </a:lnB>
+                    <a:solidFill>
+                      <a:srgbClr val="FFFFFF"/>
+                    </a:solidFill>
+                  </a:tcPr>
+                </a:tc>
+                <a:tc>
+                  <a:txBody>
+                    <a:bodyPr/>
+                    <a:lstStyle/>
+                    <a:p>
+                      <a:pPr algn="ctr" indent="0" marL="0">
+                        <a:buNone/>
+                      </a:pPr>
+                      <a:r>
+                        <a:rPr lang="en-US" sz="1100" b="1" dirty="0">
+                          <a:solidFill>
+                            <a:srgbClr val="F96167"/>
+                          </a:solidFill>
+                        </a:rPr>
+                        <a:t>&lt; 0.001</a:t>
+                      </a:r>
+                      <a:endParaRPr lang="en-US" sz="1100" dirty="0"/>
+                    </a:p>
+                  </a:txBody>
+                  <a:tcPr marL="91440" marR="91440" marT="45720" marB="45720" anchor="ctr">
+                    <a:lnL w="6350" cap="flat" cmpd="sng" algn="ctr">
+                      <a:solidFill>
+                        <a:srgbClr val="CCCCCC"/>
+                      </a:solidFill>
+                      <a:prstDash val="solid"/>
+                      <a:round/>
+                      <a:headEnd type="none" w="med" len="med"/>
+                      <a:tailEnd type="none" w="med" len="med"/>
+                    </a:lnL>
+                    <a:lnR w="6350" cap="flat" cmpd="sng" algn="ctr">
+                      <a:solidFill>
+                        <a:srgbClr val="CCCCCC"/>
+                      </a:solidFill>
+                      <a:prstDash val="solid"/>
+                      <a:round/>
+                      <a:headEnd type="none" w="med" len="med"/>
+                      <a:tailEnd type="none" w="med" len="med"/>
+                    </a:lnR>
+                    <a:lnT w="6350" cap="flat" cmpd="sng" algn="ctr">
+                      <a:solidFill>
+                        <a:srgbClr val="CCCCCC"/>
+                      </a:solidFill>
+                      <a:prstDash val="solid"/>
+                      <a:round/>
+                      <a:headEnd type="none" w="med" len="med"/>
+                      <a:tailEnd type="none" w="med" len="med"/>
+                    </a:lnT>
+                    <a:lnB w="6350" cap="flat" cmpd="sng" algn="ctr">
+                      <a:solidFill>
+                        <a:srgbClr val="CCCCCC"/>
+                      </a:solidFill>
+                      <a:prstDash val="solid"/>
+                      <a:round/>
+                      <a:headEnd type="none" w="med" len="med"/>
+                      <a:tailEnd type="none" w="med" len="med"/>
+                    </a:lnB>
+                    <a:solidFill>
+                      <a:srgbClr val="FFFFFF"/>
+                    </a:solidFill>
+                  </a:tcPr>
+                </a:tc>
+                <a:tc>
+                  <a:txBody>
+                    <a:bodyPr/>
+                    <a:lstStyle/>
+                    <a:p>
+                      <a:pPr algn="ctr" indent="0" marL="0">
+                        <a:buNone/>
+                      </a:pPr>
+                      <a:r>
+                        <a:rPr lang="en-US" sz="1100" b="1" dirty="0">
+                          <a:solidFill>
+                            <a:srgbClr val="F96167"/>
+                          </a:solidFill>
+                        </a:rPr>
+                        <a:t>Sí ***</a:t>
+                      </a:r>
+                      <a:endParaRPr lang="en-US" sz="1100" dirty="0"/>
+                    </a:p>
+                  </a:txBody>
+                  <a:tcPr marL="91440" marR="91440" marT="45720" marB="45720" anchor="ctr">
+                    <a:lnL w="6350" cap="flat" cmpd="sng" algn="ctr">
+                      <a:solidFill>
+                        <a:srgbClr val="CCCCCC"/>
+                      </a:solidFill>
+                      <a:prstDash val="solid"/>
+                      <a:round/>
+                      <a:headEnd type="none" w="med" len="med"/>
+                      <a:tailEnd type="none" w="med" len="med"/>
+                    </a:lnL>
+                    <a:lnR w="6350" cap="flat" cmpd="sng" algn="ctr">
+                      <a:solidFill>
+                        <a:srgbClr val="CCCCCC"/>
+                      </a:solidFill>
+                      <a:prstDash val="solid"/>
+                      <a:round/>
+                      <a:headEnd type="none" w="med" len="med"/>
+                      <a:tailEnd type="none" w="med" len="med"/>
+                    </a:lnR>
+                    <a:lnT w="6350" cap="flat" cmpd="sng" algn="ctr">
+                      <a:solidFill>
+                        <a:srgbClr val="CCCCCC"/>
+                      </a:solidFill>
+                      <a:prstDash val="solid"/>
+                      <a:round/>
+                      <a:headEnd type="none" w="med" len="med"/>
+                      <a:tailEnd type="none" w="med" len="med"/>
+                    </a:lnT>
+                    <a:lnB w="6350" cap="flat" cmpd="sng" algn="ctr">
+                      <a:solidFill>
+                        <a:srgbClr val="CCCCCC"/>
+                      </a:solidFill>
+                      <a:prstDash val="solid"/>
+                      <a:round/>
+                      <a:headEnd type="none" w="med" len="med"/>
+                      <a:tailEnd type="none" w="med" len="med"/>
+                    </a:lnB>
+                    <a:solidFill>
+                      <a:srgbClr val="FFFFFF"/>
+                    </a:solidFill>
+                  </a:tcPr>
+                </a:tc>
+              </a:tr>
+              <a:tr h="320040">
+                <a:tc>
+                  <a:txBody>
+                    <a:bodyPr/>
+                    <a:lstStyle/>
+                    <a:p>
+                      <a:pPr algn="ctr" indent="0" marL="0">
+                        <a:buNone/>
+                      </a:pPr>
+                      <a:r>
+                        <a:rPr lang="en-US" sz="1100" dirty="0">
+                          <a:solidFill>
+                            <a:srgbClr val="1B2838"/>
+                          </a:solidFill>
+                        </a:rPr>
+                        <a:t>Go vs Python</a:t>
+                      </a:r>
+                      <a:endParaRPr lang="en-US" sz="1100" dirty="0"/>
+                    </a:p>
+                  </a:txBody>
+                  <a:tcPr marL="91440" marR="91440" marT="45720" marB="45720" anchor="ctr">
+                    <a:lnL w="6350" cap="flat" cmpd="sng" algn="ctr">
+                      <a:solidFill>
+                        <a:srgbClr val="CCCCCC"/>
+                      </a:solidFill>
+                      <a:prstDash val="solid"/>
+                      <a:round/>
+                      <a:headEnd type="none" w="med" len="med"/>
+                      <a:tailEnd type="none" w="med" len="med"/>
+                    </a:lnL>
+                    <a:lnR w="6350" cap="flat" cmpd="sng" algn="ctr">
+                      <a:solidFill>
+                        <a:srgbClr val="CCCCCC"/>
+                      </a:solidFill>
+                      <a:prstDash val="solid"/>
+                      <a:round/>
+                      <a:headEnd type="none" w="med" len="med"/>
+                      <a:tailEnd type="none" w="med" len="med"/>
+                    </a:lnR>
+                    <a:lnT w="6350" cap="flat" cmpd="sng" algn="ctr">
+                      <a:solidFill>
+                        <a:srgbClr val="CCCCCC"/>
+                      </a:solidFill>
+                      <a:prstDash val="solid"/>
+                      <a:round/>
+                      <a:headEnd type="none" w="med" len="med"/>
+                      <a:tailEnd type="none" w="med" len="med"/>
+                    </a:lnT>
+                    <a:lnB w="6350" cap="flat" cmpd="sng" algn="ctr">
+                      <a:solidFill>
+                        <a:srgbClr val="CCCCCC"/>
+                      </a:solidFill>
+                      <a:prstDash val="solid"/>
+                      <a:round/>
+                      <a:headEnd type="none" w="med" len="med"/>
+                      <a:tailEnd type="none" w="med" len="med"/>
+                    </a:lnB>
+                    <a:solidFill>
+                      <a:srgbClr val="EAF0F6"/>
+                    </a:solidFill>
+                  </a:tcPr>
+                </a:tc>
+                <a:tc>
+                  <a:txBody>
+                    <a:bodyPr/>
+                    <a:lstStyle/>
+                    <a:p>
+                      <a:pPr algn="ctr" indent="0" marL="0">
+                        <a:buNone/>
+                      </a:pPr>
+                      <a:r>
+                        <a:rPr lang="en-US" sz="1100" dirty="0">
+                          <a:solidFill>
+                            <a:srgbClr val="F96167"/>
+                          </a:solidFill>
+                        </a:rPr>
+                        <a:t>+143.32 s</a:t>
+                      </a:r>
+                      <a:endParaRPr lang="en-US" sz="1100" dirty="0"/>
+                    </a:p>
+                  </a:txBody>
+                  <a:tcPr marL="91440" marR="91440" marT="45720" marB="45720" anchor="ctr">
+                    <a:lnL w="6350" cap="flat" cmpd="sng" algn="ctr">
+                      <a:solidFill>
+                        <a:srgbClr val="CCCCCC"/>
+                      </a:solidFill>
+                      <a:prstDash val="solid"/>
+                      <a:round/>
+                      <a:headEnd type="none" w="med" len="med"/>
+                      <a:tailEnd type="none" w="med" len="med"/>
+                    </a:lnL>
+                    <a:lnR w="6350" cap="flat" cmpd="sng" algn="ctr">
+                      <a:solidFill>
+                        <a:srgbClr val="CCCCCC"/>
+                      </a:solidFill>
+                      <a:prstDash val="solid"/>
+                      <a:round/>
+                      <a:headEnd type="none" w="med" len="med"/>
+                      <a:tailEnd type="none" w="med" len="med"/>
+                    </a:lnR>
+                    <a:lnT w="6350" cap="flat" cmpd="sng" algn="ctr">
+                      <a:solidFill>
+                        <a:srgbClr val="CCCCCC"/>
+                      </a:solidFill>
+                      <a:prstDash val="solid"/>
+                      <a:round/>
+                      <a:headEnd type="none" w="med" len="med"/>
+                      <a:tailEnd type="none" w="med" len="med"/>
+                    </a:lnT>
+                    <a:lnB w="6350" cap="flat" cmpd="sng" algn="ctr">
+                      <a:solidFill>
+                        <a:srgbClr val="CCCCCC"/>
+                      </a:solidFill>
+                      <a:prstDash val="solid"/>
+                      <a:round/>
+                      <a:headEnd type="none" w="med" len="med"/>
+                      <a:tailEnd type="none" w="med" len="med"/>
+                    </a:lnB>
+                    <a:solidFill>
+                      <a:srgbClr val="EAF0F6"/>
+                    </a:solidFill>
+                  </a:tcPr>
+                </a:tc>
+                <a:tc>
+                  <a:txBody>
+                    <a:bodyPr/>
+                    <a:lstStyle/>
+                    <a:p>
+                      <a:pPr algn="ctr" indent="0" marL="0">
+                        <a:buNone/>
+                      </a:pPr>
+                      <a:r>
+                        <a:rPr lang="en-US" sz="1100" b="1" dirty="0">
+                          <a:solidFill>
+                            <a:srgbClr val="F96167"/>
+                          </a:solidFill>
+                        </a:rPr>
+                        <a:t>&lt; 0.001</a:t>
+                      </a:r>
+                      <a:endParaRPr lang="en-US" sz="1100" dirty="0"/>
+                    </a:p>
+                  </a:txBody>
+                  <a:tcPr marL="91440" marR="91440" marT="45720" marB="45720" anchor="ctr">
+                    <a:lnL w="6350" cap="flat" cmpd="sng" algn="ctr">
+                      <a:solidFill>
+                        <a:srgbClr val="CCCCCC"/>
+                      </a:solidFill>
+                      <a:prstDash val="solid"/>
+                      <a:round/>
+                      <a:headEnd type="none" w="med" len="med"/>
+                      <a:tailEnd type="none" w="med" len="med"/>
+                    </a:lnL>
+                    <a:lnR w="6350" cap="flat" cmpd="sng" algn="ctr">
+                      <a:solidFill>
+                        <a:srgbClr val="CCCCCC"/>
+                      </a:solidFill>
+                      <a:prstDash val="solid"/>
+                      <a:round/>
+                      <a:headEnd type="none" w="med" len="med"/>
+                      <a:tailEnd type="none" w="med" len="med"/>
+                    </a:lnR>
+                    <a:lnT w="6350" cap="flat" cmpd="sng" algn="ctr">
+                      <a:solidFill>
+                        <a:srgbClr val="CCCCCC"/>
+                      </a:solidFill>
+                      <a:prstDash val="solid"/>
+                      <a:round/>
+                      <a:headEnd type="none" w="med" len="med"/>
+                      <a:tailEnd type="none" w="med" len="med"/>
+                    </a:lnT>
+                    <a:lnB w="6350" cap="flat" cmpd="sng" algn="ctr">
+                      <a:solidFill>
+                        <a:srgbClr val="CCCCCC"/>
+                      </a:solidFill>
+                      <a:prstDash val="solid"/>
+                      <a:round/>
+                      <a:headEnd type="none" w="med" len="med"/>
+                      <a:tailEnd type="none" w="med" len="med"/>
+                    </a:lnB>
+                    <a:solidFill>
+                      <a:srgbClr val="EAF0F6"/>
+                    </a:solidFill>
+                  </a:tcPr>
+                </a:tc>
+                <a:tc>
+                  <a:txBody>
+                    <a:bodyPr/>
+                    <a:lstStyle/>
+                    <a:p>
+                      <a:pPr algn="ctr" indent="0" marL="0">
+                        <a:buNone/>
+                      </a:pPr>
+                      <a:r>
+                        <a:rPr lang="en-US" sz="1100" b="1" dirty="0">
+                          <a:solidFill>
+                            <a:srgbClr val="F96167"/>
+                          </a:solidFill>
+                        </a:rPr>
+                        <a:t>Sí ***</a:t>
+                      </a:r>
+                      <a:endParaRPr lang="en-US" sz="1100" dirty="0"/>
+                    </a:p>
+                  </a:txBody>
+                  <a:tcPr marL="91440" marR="91440" marT="45720" marB="45720" anchor="ctr">
+                    <a:lnL w="6350" cap="flat" cmpd="sng" algn="ctr">
+                      <a:solidFill>
+                        <a:srgbClr val="CCCCCC"/>
+                      </a:solidFill>
+                      <a:prstDash val="solid"/>
+                      <a:round/>
+                      <a:headEnd type="none" w="med" len="med"/>
+                      <a:tailEnd type="none" w="med" len="med"/>
+                    </a:lnL>
+                    <a:lnR w="6350" cap="flat" cmpd="sng" algn="ctr">
+                      <a:solidFill>
+                        <a:srgbClr val="CCCCCC"/>
+                      </a:solidFill>
+                      <a:prstDash val="solid"/>
+                      <a:round/>
+                      <a:headEnd type="none" w="med" len="med"/>
+                      <a:tailEnd type="none" w="med" len="med"/>
+                    </a:lnR>
+                    <a:lnT w="6350" cap="flat" cmpd="sng" algn="ctr">
+                      <a:solidFill>
+                        <a:srgbClr val="CCCCCC"/>
+                      </a:solidFill>
+                      <a:prstDash val="solid"/>
+                      <a:round/>
+                      <a:headEnd type="none" w="med" len="med"/>
+                      <a:tailEnd type="none" w="med" len="med"/>
+                    </a:lnT>
+                    <a:lnB w="6350" cap="flat" cmpd="sng" algn="ctr">
+                      <a:solidFill>
+                        <a:srgbClr val="CCCCCC"/>
+                      </a:solidFill>
+                      <a:prstDash val="solid"/>
+                      <a:round/>
+                      <a:headEnd type="none" w="med" len="med"/>
+                      <a:tailEnd type="none" w="med" len="med"/>
+                    </a:lnB>
+                    <a:solidFill>
+                      <a:srgbClr val="EAF0F6"/>
+                    </a:solidFill>
+                  </a:tcPr>
+                </a:tc>
+              </a:tr>
+              <a:tr h="320040">
+                <a:tc>
+                  <a:txBody>
+                    <a:bodyPr/>
+                    <a:lstStyle/>
+                    <a:p>
+                      <a:pPr algn="ctr" indent="0" marL="0">
+                        <a:buNone/>
+                      </a:pPr>
+                      <a:r>
+                        <a:rPr lang="en-US" sz="1100" dirty="0">
+                          <a:solidFill>
+                            <a:srgbClr val="1B2838"/>
+                          </a:solidFill>
+                        </a:rPr>
+                        <a:t>Java vs Python</a:t>
+                      </a:r>
+                      <a:endParaRPr lang="en-US" sz="1100" dirty="0"/>
+                    </a:p>
+                  </a:txBody>
+                  <a:tcPr marL="91440" marR="91440" marT="45720" marB="45720" anchor="ctr">
+                    <a:lnL w="6350" cap="flat" cmpd="sng" algn="ctr">
+                      <a:solidFill>
+                        <a:srgbClr val="CCCCCC"/>
+                      </a:solidFill>
+                      <a:prstDash val="solid"/>
+                      <a:round/>
+                      <a:headEnd type="none" w="med" len="med"/>
+                      <a:tailEnd type="none" w="med" len="med"/>
+                    </a:lnL>
+                    <a:lnR w="6350" cap="flat" cmpd="sng" algn="ctr">
+                      <a:solidFill>
+                        <a:srgbClr val="CCCCCC"/>
+                      </a:solidFill>
+                      <a:prstDash val="solid"/>
+                      <a:round/>
+                      <a:headEnd type="none" w="med" len="med"/>
+                      <a:tailEnd type="none" w="med" len="med"/>
+                    </a:lnR>
+                    <a:lnT w="6350" cap="flat" cmpd="sng" algn="ctr">
+                      <a:solidFill>
+                        <a:srgbClr val="CCCCCC"/>
+                      </a:solidFill>
+                      <a:prstDash val="solid"/>
+                      <a:round/>
+                      <a:headEnd type="none" w="med" len="med"/>
+                      <a:tailEnd type="none" w="med" len="med"/>
+                    </a:lnT>
+                    <a:lnB w="6350" cap="flat" cmpd="sng" algn="ctr">
+                      <a:solidFill>
+                        <a:srgbClr val="CCCCCC"/>
+                      </a:solidFill>
+                      <a:prstDash val="solid"/>
+                      <a:round/>
+                      <a:headEnd type="none" w="med" len="med"/>
+                      <a:tailEnd type="none" w="med" len="med"/>
+                    </a:lnB>
+                    <a:solidFill>
+                      <a:srgbClr val="FFFFFF"/>
+                    </a:solidFill>
+                  </a:tcPr>
+                </a:tc>
+                <a:tc>
+                  <a:txBody>
+                    <a:bodyPr/>
+                    <a:lstStyle/>
+                    <a:p>
+                      <a:pPr algn="ctr" indent="0" marL="0">
+                        <a:buNone/>
+                      </a:pPr>
+                      <a:r>
+                        <a:rPr lang="en-US" sz="1100" dirty="0">
+                          <a:solidFill>
+                            <a:srgbClr val="F96167"/>
+                          </a:solidFill>
+                        </a:rPr>
+                        <a:t>+141.24 s</a:t>
+                      </a:r>
+                      <a:endParaRPr lang="en-US" sz="1100" dirty="0"/>
+                    </a:p>
+                  </a:txBody>
+                  <a:tcPr marL="91440" marR="91440" marT="45720" marB="45720" anchor="ctr">
+                    <a:lnL w="6350" cap="flat" cmpd="sng" algn="ctr">
+                      <a:solidFill>
+                        <a:srgbClr val="CCCCCC"/>
+                      </a:solidFill>
+                      <a:prstDash val="solid"/>
+                      <a:round/>
+                      <a:headEnd type="none" w="med" len="med"/>
+                      <a:tailEnd type="none" w="med" len="med"/>
+                    </a:lnL>
+                    <a:lnR w="6350" cap="flat" cmpd="sng" algn="ctr">
+                      <a:solidFill>
+                        <a:srgbClr val="CCCCCC"/>
+                      </a:solidFill>
+                      <a:prstDash val="solid"/>
+                      <a:round/>
+                      <a:headEnd type="none" w="med" len="med"/>
+                      <a:tailEnd type="none" w="med" len="med"/>
+                    </a:lnR>
+                    <a:lnT w="6350" cap="flat" cmpd="sng" algn="ctr">
+                      <a:solidFill>
+                        <a:srgbClr val="CCCCCC"/>
+                      </a:solidFill>
+                      <a:prstDash val="solid"/>
+                      <a:round/>
+                      <a:headEnd type="none" w="med" len="med"/>
+                      <a:tailEnd type="none" w="med" len="med"/>
+                    </a:lnT>
+                    <a:lnB w="6350" cap="flat" cmpd="sng" algn="ctr">
+                      <a:solidFill>
+                        <a:srgbClr val="CCCCCC"/>
+                      </a:solidFill>
+                      <a:prstDash val="solid"/>
+                      <a:round/>
+                      <a:headEnd type="none" w="med" len="med"/>
+                      <a:tailEnd type="none" w="med" len="med"/>
+                    </a:lnB>
+                    <a:solidFill>
+                      <a:srgbClr val="FFFFFF"/>
+                    </a:solidFill>
+                  </a:tcPr>
+                </a:tc>
+                <a:tc>
+                  <a:txBody>
+                    <a:bodyPr/>
+                    <a:lstStyle/>
+                    <a:p>
+                      <a:pPr algn="ctr" indent="0" marL="0">
+                        <a:buNone/>
+                      </a:pPr>
+                      <a:r>
+                        <a:rPr lang="en-US" sz="1100" b="1" dirty="0">
+                          <a:solidFill>
+                            <a:srgbClr val="F96167"/>
+                          </a:solidFill>
+                        </a:rPr>
+                        <a:t>&lt; 0.001</a:t>
+                      </a:r>
+                      <a:endParaRPr lang="en-US" sz="1100" dirty="0"/>
+                    </a:p>
+                  </a:txBody>
+                  <a:tcPr marL="91440" marR="91440" marT="45720" marB="45720" anchor="ctr">
+                    <a:lnL w="6350" cap="flat" cmpd="sng" algn="ctr">
+                      <a:solidFill>
+                        <a:srgbClr val="CCCCCC"/>
+                      </a:solidFill>
+                      <a:prstDash val="solid"/>
+                      <a:round/>
+                      <a:headEnd type="none" w="med" len="med"/>
+                      <a:tailEnd type="none" w="med" len="med"/>
+                    </a:lnL>
+                    <a:lnR w="6350" cap="flat" cmpd="sng" algn="ctr">
+                      <a:solidFill>
+                        <a:srgbClr val="CCCCCC"/>
+                      </a:solidFill>
+                      <a:prstDash val="solid"/>
+                      <a:round/>
+                      <a:headEnd type="none" w="med" len="med"/>
+                      <a:tailEnd type="none" w="med" len="med"/>
+                    </a:lnR>
+                    <a:lnT w="6350" cap="flat" cmpd="sng" algn="ctr">
+                      <a:solidFill>
+                        <a:srgbClr val="CCCCCC"/>
+                      </a:solidFill>
+                      <a:prstDash val="solid"/>
+                      <a:round/>
+                      <a:headEnd type="none" w="med" len="med"/>
+                      <a:tailEnd type="none" w="med" len="med"/>
+                    </a:lnT>
+                    <a:lnB w="6350" cap="flat" cmpd="sng" algn="ctr">
+                      <a:solidFill>
+                        <a:srgbClr val="CCCCCC"/>
+                      </a:solidFill>
+                      <a:prstDash val="solid"/>
+                      <a:round/>
+                      <a:headEnd type="none" w="med" len="med"/>
+                      <a:tailEnd type="none" w="med" len="med"/>
+                    </a:lnB>
+                    <a:solidFill>
+                      <a:srgbClr val="FFFFFF"/>
+                    </a:solidFill>
+                  </a:tcPr>
+                </a:tc>
+                <a:tc>
+                  <a:txBody>
+                    <a:bodyPr/>
+                    <a:lstStyle/>
+                    <a:p>
+                      <a:pPr algn="ctr" indent="0" marL="0">
+                        <a:buNone/>
+                      </a:pPr>
+                      <a:r>
+                        <a:rPr lang="en-US" sz="1100" b="1" dirty="0">
+                          <a:solidFill>
+                            <a:srgbClr val="F96167"/>
+                          </a:solidFill>
+                        </a:rPr>
+                        <a:t>Sí ***</a:t>
+                      </a:r>
+                      <a:endParaRPr lang="en-US" sz="1100" dirty="0"/>
+                    </a:p>
+                  </a:txBody>
+                  <a:tcPr marL="91440" marR="91440" marT="45720" marB="45720" anchor="ctr">
+                    <a:lnL w="6350" cap="flat" cmpd="sng" algn="ctr">
+                      <a:solidFill>
+                        <a:srgbClr val="CCCCCC"/>
+                      </a:solidFill>
+                      <a:prstDash val="solid"/>
+                      <a:round/>
+                      <a:headEnd type="none" w="med" len="med"/>
+                      <a:tailEnd type="none" w="med" len="med"/>
+                    </a:lnL>
+                    <a:lnR w="6350" cap="flat" cmpd="sng" algn="ctr">
+                      <a:solidFill>
+                        <a:srgbClr val="CCCCCC"/>
+                      </a:solidFill>
+                      <a:prstDash val="solid"/>
+                      <a:round/>
+                      <a:headEnd type="none" w="med" len="med"/>
+                      <a:tailEnd type="none" w="med" len="med"/>
+                    </a:lnR>
+                    <a:lnT w="6350" cap="flat" cmpd="sng" algn="ctr">
+                      <a:solidFill>
+                        <a:srgbClr val="CCCCCC"/>
+                      </a:solidFill>
+                      <a:prstDash val="solid"/>
+                      <a:round/>
+                      <a:headEnd type="none" w="med" len="med"/>
+                      <a:tailEnd type="none" w="med" len="med"/>
+                    </a:lnT>
+                    <a:lnB w="6350" cap="flat" cmpd="sng" algn="ctr">
+                      <a:solidFill>
+                        <a:srgbClr val="CCCCCC"/>
+                      </a:solidFill>
+                      <a:prstDash val="solid"/>
+                      <a:round/>
+                      <a:headEnd type="none" w="med" len="med"/>
+                      <a:tailEnd type="none" w="med" len="med"/>
+                    </a:lnB>
+                    <a:solidFill>
+                      <a:srgbClr val="FFFFFF"/>
+                    </a:solidFill>
+                  </a:tcPr>
+                </a:tc>
+              </a:tr>
+            </a:tbl>
+          </a:graphicData>
+        </a:graphic>
+      </p:graphicFrame>
+      <p:sp>
+        <p:nvSpPr>
+          <p:cNvPr id="5" name="Shape 2"/>
+          <p:cNvSpPr/>
+          <p:nvPr/>
+        </p:nvSpPr>
+        <p:spPr>
+          <a:xfrm>
+            <a:off x="457200" y="3657600"/>
+            <a:ext cx="8229600" cy="914400"/>
+          </a:xfrm>
+          <a:prstGeom prst="roundRect">
+            <a:avLst>
+              <a:gd name="adj" fmla="val 10000"/>
+            </a:avLst>
+          </a:prstGeom>
+          <a:solidFill>
+            <a:srgbClr val="EAF0F6"/>
+          </a:solidFill>
+          <a:ln/>
+        </p:spPr>
+      </p:sp>
+      <p:sp>
+        <p:nvSpPr>
+          <p:cNvPr id="6" name="Text 3"/>
+          <p:cNvSpPr txBox="1"/>
+          <p:nvPr/>
+        </p:nvSpPr>
+        <p:spPr>
+          <a:xfrm>
+            <a:off x="640080" y="3703320"/>
+            <a:ext cx="7863840" cy="822960"/>
+          </a:xfrm>
+          <a:prstGeom prst="rect">
+            <a:avLst/>
+          </a:prstGeom>
+          <a:noFill/>
+          <a:ln/>
+        </p:spPr>
+        <p:txBody>
+          <a:bodyPr wrap="square" lIns="0" tIns="0" rIns="0" bIns="0" rtlCol="0" anchor="ctr"/>
+          <a:lstStyle/>
+          <a:p>
+            <a:pPr indent="0" marL="0">
+              <a:buNone/>
+            </a:pPr>
+            <a:r>
+              <a:rPr lang="en-US" sz="1400" b="1" dirty="0">
+                <a:solidFill>
+                  <a:srgbClr val="065A82"/>
+                </a:solidFill>
+              </a:rPr>
+              <a:t>C++, Go y Java </a:t>
+            </a:r>
+            <a:pPr indent="0" marL="0">
+              <a:buNone/>
+            </a:pPr>
+            <a:r>
+              <a:rPr lang="en-US" sz="1300" dirty="0">
+                <a:solidFill>
+                  <a:srgbClr val="1B2838"/>
+                </a:solidFill>
+              </a:rPr>
+              <a:t>no presentan diferencias significativas entre sí (colapsando N).
+</a:t>
+            </a:r>
+            <a:pPr indent="0" marL="0">
+              <a:buNone/>
+            </a:pPr>
+            <a:r>
+              <a:rPr lang="en-US" sz="1400" b="1" dirty="0">
+                <a:solidFill>
+                  <a:srgbClr val="F96167"/>
+                </a:solidFill>
+              </a:rPr>
+              <a:t>Python </a:t>
+            </a:r>
+            <a:pPr indent="0" marL="0">
+              <a:buNone/>
+            </a:pPr>
+            <a:r>
+              <a:rPr lang="en-US" sz="1300" dirty="0">
+                <a:solidFill>
+                  <a:srgbClr val="1B2838"/>
+                </a:solidFill>
+              </a:rPr>
+              <a:t>es significativamente más lento que todos los demás (p &lt; 0.001).</a:t>
+            </a:r>
+            <a:endParaRPr lang="en-US" sz="1400" dirty="0"/>
+          </a:p>
+        </p:txBody>
+      </p:sp>
+      <p:sp>
+        <p:nvSpPr>
+          <p:cNvPr id="25" name="Slide Number Placeholder 0"/>
+          <p:cNvSpPr>
+            <a:spLocks noGrp="1"/>
+          </p:cNvSpPr>
+          <p:nvPr>
+            <p:ph type="sldNum" sz="quarter" idx="4294967295"/>
+          </p:nvPr>
+        </p:nvSpPr>
+        <p:spPr>
+          <a:xfrm>
+            <a:off x="8412480" y="4773168"/>
+            <a:ext cx="548640" cy="320040"/>
+          </a:xfrm>
+          <a:prstGeom prst="rect">
+            <a:avLst/>
+          </a:prstGeom>
+          <a:extLst>
+            <a:ext uri="{C572A759-6A51-4108-AA02-DFA0A04FC94B}">
+              <ma14:wrappingTextBoxFlag xmlns:ma14="http://schemas.microsoft.com/office/mac/drawingml/2011/main" val="0"/>
+            </a:ext>
+          </a:extLst>
+        </p:spPr>
+        <p:txBody>
+          <a:bodyPr/>
+          <a:lstStyle>
+            <a:lvl1pPr>
+              <a:defRPr sz="900">
+                <a:solidFill>
+                  <a:srgbClr val="1C7293"/>
+                </a:solidFill>
+              </a:defRPr>
+            </a:lvl1pPr>
+          </a:lstStyle>
+          <a:p>
+            <a:pPr algn="l"/>
+            <a:fld id="{F7021451-1387-4CA6-816F-3879F97B5CBC}" type="slidenum">
+              <a:rPr b="0" lang="en-US"/>
+              <a:t>22</a:t>
+            </a:fld>
+            <a:endParaRPr lang="en-US"/>
+          </a:p>
+        </p:txBody>
+      </p:sp>
+    </p:spTree>
+  </p:cSld>
+  <p:clrMapOvr>
+    <a:masterClrMapping/>
+  </p:clrMapOvr>
+</p:sld>
+</file>
+
+<file path=ppt/slides/slide23.xml><?xml version="1.0" encoding="utf-8"?>
+<p:sld xmlns:a="http://schemas.openxmlformats.org/drawingml/2006/main" xmlns:r="http://schemas.openxmlformats.org/officeDocument/2006/relationships" xmlns:p="http://schemas.openxmlformats.org/presentationml/2006/main">
+  <p:cSld name="Slide 23">
+    <p:spTree>
+      <p:nvGrpSpPr>
+        <p:cNvPr id="1" name=""/>
+        <p:cNvGrpSpPr/>
+        <p:nvPr/>
+      </p:nvGrpSpPr>
+      <p:grpSpPr>
+        <a:xfrm>
+          <a:off x="0" y="0"/>
+          <a:ext cx="0" cy="0"/>
+          <a:chOff x="0" y="0"/>
+          <a:chExt cx="0" cy="0"/>
+        </a:xfrm>
+      </p:grpSpPr>
+      <p:sp>
+        <p:nvSpPr>
+          <p:cNvPr id="2" name="Text 0"/>
+          <p:cNvSpPr txBox="1"/>
+          <p:nvPr/>
+        </p:nvSpPr>
+        <p:spPr>
+          <a:xfrm>
+            <a:off x="457200" y="365760"/>
+            <a:ext cx="8229600" cy="640080"/>
+          </a:xfrm>
+          <a:prstGeom prst="rect">
+            <a:avLst/>
+          </a:prstGeom>
+          <a:noFill/>
+          <a:ln/>
+        </p:spPr>
+        <p:txBody>
+          <a:bodyPr wrap="square" lIns="0" tIns="0" rIns="0" bIns="0" rtlCol="0" anchor="ctr"/>
+          <a:lstStyle/>
+          <a:p>
+            <a:pPr indent="0" marL="0">
+              <a:buNone/>
+            </a:pPr>
+            <a:r>
+              <a:rPr lang="en-US" sz="3400" b="1" dirty="0">
+                <a:solidFill>
+                  <a:srgbClr val="FFFFFF"/>
+                </a:solidFill>
+              </a:rPr>
+              <a:t>Conclusiones y Próximos Pasos</a:t>
+            </a:r>
+            <a:endParaRPr lang="en-US" sz="3400" dirty="0"/>
+          </a:p>
+        </p:txBody>
+      </p:sp>
+      <p:sp>
+        <p:nvSpPr>
+          <p:cNvPr id="3" name="Text 1"/>
+          <p:cNvSpPr txBox="1"/>
+          <p:nvPr/>
+        </p:nvSpPr>
+        <p:spPr>
+          <a:xfrm>
+            <a:off x="457200" y="1188720"/>
+            <a:ext cx="3931920" cy="3200400"/>
+          </a:xfrm>
+          <a:prstGeom prst="rect">
+            <a:avLst/>
+          </a:prstGeom>
+          <a:noFill/>
+          <a:ln/>
+        </p:spPr>
+        <p:txBody>
+          <a:bodyPr wrap="square" lIns="0" tIns="0" rIns="0" bIns="0" rtlCol="0" anchor="ctr"/>
+          <a:lstStyle/>
+          <a:p>
+            <a:pPr indent="0" marL="0">
+              <a:buNone/>
+            </a:pPr>
+            <a:r>
+              <a:rPr lang="en-US" sz="1800" b="1" dirty="0">
+                <a:solidFill>
+                  <a:srgbClr val="1C7293"/>
+                </a:solidFill>
+              </a:rPr>
+              <a:t>Conclusiones
+</a:t>
+            </a:r>
+            <a:endParaRPr lang="en-US" sz="1800" dirty="0"/>
+          </a:p>
+          <a:p>
+            <a:pPr indent="0" marL="0">
+              <a:buNone/>
+            </a:pPr>
+            <a:r>
+              <a:rPr lang="en-US" sz="1300" dirty="0">
+                <a:solidFill>
+                  <a:srgbClr val="FFFFFF"/>
+                </a:solidFill>
+              </a:rPr>
+              <a:t>Se rechaza H₀: el lenguaje sí
+produce diferencias significativas
+</a:t>
+            </a:r>
+            <a:endParaRPr lang="en-US" sz="1800" dirty="0"/>
+          </a:p>
+          <a:p>
+            <a:pPr indent="0" marL="0">
+              <a:buNone/>
+            </a:pPr>
+            <a:r>
+              <a:rPr lang="en-US" sz="1300" dirty="0">
+                <a:solidFill>
+                  <a:srgbClr val="FFFFFF"/>
+                </a:solidFill>
+              </a:rPr>
+              <a:t>C++, Go y Java forman un grupo
+homogéneo (Tukey p &gt; 0.05)
+</a:t>
+            </a:r>
+            <a:endParaRPr lang="en-US" sz="1800" dirty="0"/>
+          </a:p>
+          <a:p>
+            <a:pPr indent="0" marL="0">
+              <a:buNone/>
+            </a:pPr>
+            <a:r>
+              <a:rPr lang="en-US" sz="1300" dirty="0">
+                <a:solidFill>
+                  <a:srgbClr val="EAF0F6"/>
+                </a:solidFill>
+              </a:rPr>
+              <a:t>Python es significativamente más
+lento que los tres (p &lt; 0.001)
+</a:t>
+            </a:r>
+            <a:endParaRPr lang="en-US" sz="1800" dirty="0"/>
+          </a:p>
+          <a:p>
+            <a:pPr indent="0" marL="0">
+              <a:buNone/>
+            </a:pPr>
+            <a:r>
+              <a:rPr lang="en-US" sz="1300" dirty="0">
+                <a:solidFill>
+                  <a:srgbClr val="EAF0F6"/>
+                </a:solidFill>
+              </a:rPr>
+              <a:t>La interacción lenguaje × tamaño</a:t>
+            </a:r>
+            <a:endParaRPr lang="en-US" sz="1800" dirty="0"/>
+          </a:p>
+          <a:p>
+            <a:pPr indent="0" marL="0">
+              <a:buNone/>
+            </a:pPr>
+            <a:r>
+              <a:rPr lang="en-US" sz="1300" dirty="0">
+                <a:solidFill>
+                  <a:srgbClr val="EAF0F6"/>
+                </a:solidFill>
+              </a:rPr>
+              <a:t>es significativa: la brecha crece con N</a:t>
+            </a:r>
+            <a:endParaRPr lang="en-US" sz="1800" dirty="0"/>
+          </a:p>
+        </p:txBody>
+      </p:sp>
+      <p:sp>
+        <p:nvSpPr>
+          <p:cNvPr id="4" name="Text 2"/>
+          <p:cNvSpPr txBox="1"/>
+          <p:nvPr/>
+        </p:nvSpPr>
+        <p:spPr>
+          <a:xfrm>
+            <a:off x="4754880" y="1188720"/>
+            <a:ext cx="3931920" cy="3200400"/>
+          </a:xfrm>
+          <a:prstGeom prst="rect">
+            <a:avLst/>
+          </a:prstGeom>
+          <a:noFill/>
+          <a:ln/>
+        </p:spPr>
+        <p:txBody>
+          <a:bodyPr wrap="square" lIns="0" tIns="0" rIns="0" bIns="0" rtlCol="0" anchor="ctr"/>
+          <a:lstStyle/>
+          <a:p>
+            <a:pPr indent="0" marL="0">
+              <a:buNone/>
+            </a:pPr>
+            <a:r>
+              <a:rPr lang="en-US" sz="1800" b="1" dirty="0">
+                <a:solidFill>
+                  <a:srgbClr val="1C7293"/>
+                </a:solidFill>
+              </a:rPr>
+              <a:t>Hallazgos clave
+</a:t>
+            </a:r>
+            <a:endParaRPr lang="en-US" sz="1800" dirty="0"/>
+          </a:p>
+          <a:p>
+            <a:pPr indent="0" marL="0">
+              <a:buNone/>
+            </a:pPr>
+            <a:r>
+              <a:rPr lang="en-US" sz="1300" dirty="0">
+                <a:solidFill>
+                  <a:srgbClr val="FFFFFF"/>
+                </a:solidFill>
+              </a:rPr>
+              <a:t>ANOVA: F(lenguaje) = 62,317
+p &lt; 10⁻¹⁷⁴
+</a:t>
+            </a:r>
+            <a:endParaRPr lang="en-US" sz="1800" dirty="0"/>
+          </a:p>
+          <a:p>
+            <a:pPr indent="0" marL="0">
+              <a:buNone/>
+            </a:pPr>
+            <a:r>
+              <a:rPr lang="en-US" sz="1300" dirty="0">
+                <a:solidFill>
+                  <a:srgbClr val="FFFFFF"/>
+                </a:solidFill>
+              </a:rPr>
+              <a:t>Speedup Go vs Python:
+39x (N=500) → 16x (N=1500)
+</a:t>
+            </a:r>
+            <a:endParaRPr lang="en-US" sz="1800" dirty="0"/>
+          </a:p>
+          <a:p>
+            <a:pPr indent="0" marL="0">
+              <a:buNone/>
+            </a:pPr>
+            <a:r>
+              <a:rPr lang="en-US" sz="1300" dirty="0">
+                <a:solidFill>
+                  <a:srgbClr val="EAF0F6"/>
+                </a:solidFill>
+              </a:rPr>
+              <a:t>Baja variabilidad (CV &lt; 5%)
+confirma estabilidad experimental
+</a:t>
+            </a:r>
+            <a:endParaRPr lang="en-US" sz="1800" dirty="0"/>
+          </a:p>
+          <a:p>
+            <a:pPr indent="0" marL="0">
+              <a:buNone/>
+            </a:pPr>
+            <a:r>
+              <a:rPr lang="en-US" sz="1300" dirty="0">
+                <a:solidFill>
+                  <a:srgbClr val="EAF0F6"/>
+                </a:solidFill>
+              </a:rPr>
+              <a:t>120 observaciones reproducibles</a:t>
+            </a:r>
+            <a:endParaRPr lang="en-US" sz="1800" dirty="0"/>
+          </a:p>
+          <a:p>
+            <a:pPr indent="0" marL="0">
+              <a:buNone/>
+            </a:pPr>
+            <a:r>
+              <a:rPr lang="en-US" sz="1300" dirty="0">
+                <a:solidFill>
+                  <a:srgbClr val="EAF0F6"/>
+                </a:solidFill>
+              </a:rPr>
+              <a:t>(Docker + LCG + semilla fija)</a:t>
+            </a:r>
+            <a:endParaRPr lang="en-US" sz="1800" dirty="0"/>
+          </a:p>
+        </p:txBody>
+      </p:sp>
+      <p:sp>
+        <p:nvSpPr>
+          <p:cNvPr id="25" name="Slide Number Placeholder 0"/>
+          <p:cNvSpPr>
+            <a:spLocks noGrp="1"/>
+          </p:cNvSpPr>
+          <p:nvPr>
+            <p:ph type="sldNum" sz="quarter" idx="4294967295"/>
+          </p:nvPr>
+        </p:nvSpPr>
+        <p:spPr>
+          <a:xfrm>
+            <a:off x="8412480" y="4709160"/>
+            <a:ext cx="548640" cy="365760"/>
+          </a:xfrm>
+          <a:prstGeom prst="rect">
+            <a:avLst/>
+          </a:prstGeom>
+          <a:extLst>
+            <a:ext uri="{C572A759-6A51-4108-AA02-DFA0A04FC94B}">
+              <ma14:wrappingTextBoxFlag xmlns:ma14="http://schemas.microsoft.com/office/mac/drawingml/2011/main" val="0"/>
+            </a:ext>
+          </a:extLst>
+        </p:spPr>
+        <p:txBody>
+          <a:bodyPr/>
+          <a:lstStyle>
+            <a:lvl1pPr>
+              <a:defRPr sz="1000">
+                <a:solidFill>
+                  <a:srgbClr val="FFFFFF"/>
+                </a:solidFill>
+              </a:defRPr>
+            </a:lvl1pPr>
+          </a:lstStyle>
+          <a:p>
+            <a:pPr algn="l"/>
+            <a:fld id="{F7021451-1387-4CA6-816F-3879F97B5CBC}" type="slidenum">
+              <a:rPr b="0" lang="en-US"/>
+              <a:t>23</a:t>
             </a:fld>
             <a:endParaRPr lang="en-US"/>
           </a:p>

--- a/results/Semana2_Benchmark_Matrices.pptx
+++ b/results/Semana2_Benchmark_Matrices.pptx
@@ -129,24 +129,24 @@
   <p:extLst>
     <p:ext uri="{521415D9-36F7-43E2-AB2F-B90AF26B5E84}">
       <p14:sectionLst xmlns:p14="http://schemas.microsoft.com/office/powerpoint/2010/main">
-        <p14:section name="Portada" id="{fa154510-6b5f-2bf1-7375-79e195144455}">
+        <p14:section name="Portada" id="{d4304068-c95a-8dd3-0785-7f764847010e}">
           <p14:sldIdLst>
             <p14:sldId id="256"/>
           </p14:sldIdLst>
         </p14:section>
-        <p14:section name="Agenda" id="{cd590c38-ab10-c0d4-07a7-ea678a699dd2}">
+        <p14:section name="Agenda" id="{553dc4b0-2cbc-b281-3f3f-e6e9c3a384e2}">
           <p14:sldIdLst>
             <p14:sldId id="257"/>
           </p14:sldIdLst>
         </p14:section>
-        <p14:section name="Resumen Semana 1" id="{57e7d845-e287-4d91-1ed5-ab38205d67a3}">
+        <p14:section name="Resumen Semana 1" id="{ba0b9fe9-9c5e-172d-8051-5ae042017880}">
           <p14:sldIdLst>
             <p14:sldId id="258"/>
             <p14:sldId id="259"/>
             <p14:sldId id="260"/>
           </p14:sldIdLst>
         </p14:section>
-        <p14:section name="Implementaciones" id="{94dad6c7-71d5-311d-16a3-4ce5c0797d3a}">
+        <p14:section name="Implementaciones" id="{5e317382-e52d-3487-b511-bafe4cb24ece}">
           <p14:sldIdLst>
             <p14:sldId id="261"/>
             <p14:sldId id="262"/>
@@ -154,20 +154,20 @@
             <p14:sldId id="264"/>
           </p14:sldIdLst>
         </p14:section>
-        <p14:section name="Decisiones de Diseno" id="{75dd5181-7add-d02a-e4de-2e3ddeace8dc}">
+        <p14:section name="Decisiones de Diseno" id="{91112fb1-68b4-7627-7855-f35ebd1f23fa}">
           <p14:sldIdLst>
             <p14:sldId id="265"/>
             <p14:sldId id="266"/>
             <p14:sldId id="267"/>
           </p14:sldIdLst>
         </p14:section>
-        <p14:section name="Entorno" id="{827eeb0f-2b79-7b63-20c0-f3bd509203c7}">
+        <p14:section name="Entorno" id="{7048b338-f052-3153-d84a-56e279959fed}">
           <p14:sldIdLst>
             <p14:sldId id="268"/>
             <p14:sldId id="269"/>
           </p14:sldIdLst>
         </p14:section>
-        <p14:section name="Resultados" id="{c50dac63-d7e1-85dd-78aa-bbfdec595b16}">
+        <p14:section name="Resultados" id="{ad521a8c-81e9-4def-dbc2-86fe222ccf80}">
           <p14:sldIdLst>
             <p14:sldId id="270"/>
             <p14:sldId id="271"/>
@@ -179,7 +179,7 @@
             <p14:sldId id="277"/>
           </p14:sldIdLst>
         </p14:section>
-        <p14:section name="Conclusiones" id="{d608aa8f-d77a-c0d9-8f4c-3f963d064ae0}">
+        <p14:section name="Conclusiones" id="{df56ac5d-39db-629f-5a68-6d275af68ad3}">
           <p14:sldIdLst>
             <p14:sldId id="278"/>
           </p14:sldIdLst>
@@ -1123,7 +1123,7 @@
           <a:p>
             <a:r>
               <a:rPr lang="en-US" dirty="0"/>
-              <a:t>Presentar el objetivo: implementar multiplicación naive de matrices en 4 lenguajes y obtener primeros resultados de benchmark.</a:t>
+              <a:t>Bienvenidos. En esta presentación mostramos el trabajo de Semana 2: la implementación y ejecución del experimento de benchmark de multiplicación de matrices. Partimos con un breve resumen de lo definido en Semana 1 y luego entramos de lleno en el código, las decisiones de diseño y los primeros resultados.</a:t>
             </a:r>
             <a:endParaRPr lang="en-US" dirty="0"/>
           </a:p>
@@ -1211,7 +1211,7 @@
           <a:p>
             <a:r>
               <a:rPr lang="en-US" dirty="0"/>
-              <a:t/>
+              <a:t>Para que la comparación entre lenguajes sea válida, tomamos varias decisiones de diseño que controlan las variables confusoras. Veamos cuáles y por qué.</a:t>
             </a:r>
             <a:endParaRPr lang="en-US" dirty="0"/>
           </a:p>
@@ -1299,7 +1299,7 @@
           <a:p>
             <a:r>
               <a:rPr lang="en-US" dirty="0"/>
-              <a:t>Tres decisiones clave: Docker para aislamiento, -O0 para no beneficiar a C++, y medir solo la multiplicación.</a:t>
+              <a:t>Tres decisiones fundamentales. Primero, Docker: cada lenguaje corre en su imagen oficial, eliminando conflictos de dependencias. Segundo, compilar C++ con -O0 para que el compilador no optimice el algoritmo y la comparación sea del lenguaje puro. Tercero, medir solo la multiplicación, excluyendo la generación de matrices para eliminar varianza por I/O.</a:t>
             </a:r>
             <a:endParaRPr lang="en-US" dirty="0"/>
           </a:p>
@@ -1387,7 +1387,7 @@
           <a:p>
             <a:r>
               <a:rPr lang="en-US" dirty="0"/>
-              <a:t>Snakemake automatiza todo el pipeline. El formato CSV estándar con 4 columnas facilita el análisis posterior.</a:t>
+              <a:t>Todo el flujo está automatizado con Snakemake: desde construir las imágenes Docker hasta generar el CSV consolidado. El formato de salida es simple: 4 columnas, 120 filas. Esto facilita el análisis estadístico que haremos en semanas posteriores. Veamos ahora en qué máquina corrimos el experimento.</a:t>
             </a:r>
             <a:endParaRPr lang="en-US" dirty="0"/>
           </a:p>
@@ -1475,7 +1475,7 @@
           <a:p>
             <a:r>
               <a:rPr lang="en-US" dirty="0"/>
-              <a:t/>
+              <a:t>Documentar el entorno es requisito para la reproducibilidad. Cualquier persona que quiera replicar debe saber exactamente en qué hardware y software se ejecutó.</a:t>
             </a:r>
             <a:endParaRPr lang="en-US" dirty="0"/>
           </a:p>
@@ -1563,7 +1563,7 @@
           <a:p>
             <a:r>
               <a:rPr lang="en-US" dirty="0"/>
-              <a:t>Documentar el entorno es clave para la reproducibilidad. Imágenes Docker oficiales con versiones fijas.</a:t>
+              <a:t>Un notebook con i7-1255U y 16 GB de RAM corriendo Ubuntu. Cada lenguaje usa su imagen Docker oficial con versiones fijas: gcc 13 para C++, golang 1.22, eclipse-temurin 21 para Java, y python 3.12-slim. Esto asegura que cualquiera pueda replicar el experimento con el mismo entorno. Ahora pasemos a lo más interesante: los resultados.</a:t>
             </a:r>
             <a:endParaRPr lang="en-US" dirty="0"/>
           </a:p>
@@ -1651,7 +1651,7 @@
           <a:p>
             <a:r>
               <a:rPr lang="en-US" dirty="0"/>
-              <a:t/>
+              <a:t>Llegamos a los primeros resultados. Todo lo que mostraremos aquí es análisis descriptivo: medias, desviaciones, gráficos de distribución. El análisis inferencial con ANOVA y Tukey lo haremos en Semana 4.</a:t>
             </a:r>
             <a:endParaRPr lang="en-US" dirty="0"/>
           </a:p>
@@ -1739,7 +1739,7 @@
           <a:p>
             <a:r>
               <a:rPr lang="en-US" dirty="0"/>
-              <a:t>Tabla resumen de estadísticas descriptivas. Go y Java lideran, Python es el más lento. C++ con -O0 no puede optimizar.</a:t>
+              <a:t>Aquí tenemos la tabla completa con media y desviación estándar por cada combinación lenguaje-tamaño. Tres cosas saltan a la vista: Go y Java son los más rápidos, C++ con -O0 queda en el medio, y Python es muy lento. Fíjense que las desviaciones estándar son pequeñas, lo que indica mediciones estables.</a:t>
             </a:r>
             <a:endParaRPr lang="en-US" dirty="0"/>
           </a:p>
@@ -1827,7 +1827,7 @@
           <a:p>
             <a:r>
               <a:rPr lang="en-US" dirty="0"/>
-              <a:t>Gráfico de barras agrupado mostrando tiempos medios. Python domina visualmente por sus tiempos mucho mayores.</a:t>
+              <a:t>Este gráfico de barras muestra visualmente lo que vimos en la tabla. Noten cómo Python domina la escala, haciendo que las barras de Go y Java casi no se vean en N=1500. Esto sugiere diferencias muy grandes, pero necesitamos cuantificarlo mejor.</a:t>
             </a:r>
             <a:endParaRPr lang="en-US" dirty="0"/>
           </a:p>
@@ -1915,7 +1915,7 @@
           <a:p>
             <a:r>
               <a:rPr lang="en-US" dirty="0"/>
-              <a:t>Ratios de rendimiento para N=1500. La baja variabilidad confirma que el experimento es estable.</a:t>
+              <a:t>Aquí cuantificamos las diferencias para N=1500. Python es 16 veces más lento que Go, C++ sin optimizaciones es 4.6 veces más lento, y Java solo 1.3 veces. Además, todos los coeficientes de variación están bajo el 5%, confirmando que nuestras mediciones son estables y confiables.</a:t>
             </a:r>
             <a:endParaRPr lang="en-US" dirty="0"/>
           </a:p>
@@ -2003,7 +2003,7 @@
           <a:p>
             <a:r>
               <a:rPr lang="en-US" dirty="0"/>
-              <a:t>Boxplots separados por tamaño de matriz. Se observa baja variabilidad y outliers mínimos.</a:t>
+              <a:t>Los boxplots confirman lo que dijimos: baja dispersión en todos los grupos, medianas representativas y prácticamente sin outliers. Esto nos da confianza en que los datos son de buena calidad para un análisis estadístico posterior.</a:t>
             </a:r>
             <a:endParaRPr lang="en-US" dirty="0"/>
           </a:p>
@@ -2091,7 +2091,7 @@
           <a:p>
             <a:r>
               <a:rPr lang="en-US" dirty="0"/>
-              <a:t>Resumen de los temas a cubrir en esta presentación.</a:t>
+              <a:t>Estos son los 5 bloques que vamos a recorrer. Primero un resumen rápido de Semana 1 para dar contexto, después las implementaciones, las decisiones que tomamos para que la comparación sea justa, el entorno donde corrimos todo, y finalmente los primeros resultados con gráficos y observaciones.</a:t>
             </a:r>
             <a:endParaRPr lang="en-US" dirty="0"/>
           </a:p>
@@ -2179,7 +2179,7 @@
           <a:p>
             <a:r>
               <a:rPr lang="en-US" dirty="0"/>
-              <a:t>Las curvas NO son paralelas: la brecha entre Python y los demás se amplifica con N. Esto sugiere interacción entre factores, a confirmar con ANOVA en Semana 4.</a:t>
+              <a:t>Este gráfico es clave: muestra cómo el efecto del lenguaje cambia según el tamaño de la matriz. Las curvas NO son paralelas — la brecha entre Python y los demás se amplifica al crecer N. Esto sugiere una interacción entre los factores lenguaje y tamaño, que confirmaremos formalmente con ANOVA de dos factores en Semana 4.</a:t>
             </a:r>
             <a:endParaRPr lang="en-US" dirty="0"/>
           </a:p>
@@ -2267,7 +2267,7 @@
           <a:p>
             <a:r>
               <a:rPr lang="en-US" dirty="0"/>
-              <a:t>Izquierda: mapa de calor con tiempos absolutos. Derecha: speedup relativo a Python. Go y Java superan ampliamente a Python en todos los tamaños.</a:t>
+              <a:t>A la izquierda, el mapa de calor muestra los tiempos absolutos — los colores oscuros indican tiempos altos. Python en N=1500 alcanza 342 segundos. A la derecha, el speedup relativo a Python: Go llega a casi 40x más rápido en N=500. Estos gráficos complementan la tabla numérica con una vista más intuitiva.</a:t>
             </a:r>
             <a:endParaRPr lang="en-US" dirty="0"/>
           </a:p>
@@ -2355,7 +2355,7 @@
           <a:p>
             <a:r>
               <a:rPr lang="en-US" dirty="0"/>
-              <a:t>Gráfico de barras con barras de error (media ± desviación estándar). La baja dispersión confirma estabilidad experimental.</a:t>
+              <a:t>Finalmente, este gráfico con barras de error muestra media más/menos una desviación estándar. Las barras de error son pequeñas en todos los casos, lo que confirma una vez más la estabilidad del experimento. Con toda esta evidencia descriptiva, pasemos a las conclusiones.</a:t>
             </a:r>
             <a:endParaRPr lang="en-US" dirty="0"/>
           </a:p>
@@ -2443,7 +2443,7 @@
           <a:p>
             <a:r>
               <a:rPr lang="en-US" dirty="0"/>
-              <a:t>Conclusiones descriptivas y próximos pasos: ANOVA y Tukey HSD se aplicarán en Semana 4 para confirmar estadísticamente las diferencias observadas.</a:t>
+              <a:t>Para cerrar: descriptivamente, Go y Java lideran, C++ sin optimizaciones queda en medio, y Python es consistentemente el más lento. Pero estas son observaciones descriptivas. Para poder afirmar que las diferencias son estadísticamente significativas necesitamos ANOVA de dos factores, y para saber exactamente cuáles pares difieren, Tukey HSD. Eso viene en Semana 4, junto con la automatización completa con Snakemake. Gracias.</a:t>
             </a:r>
             <a:endParaRPr lang="en-US" dirty="0"/>
           </a:p>
@@ -2531,7 +2531,7 @@
           <a:p>
             <a:r>
               <a:rPr lang="en-US" dirty="0"/>
-              <a:t/>
+              <a:t>Antes de entrar en la implementación, recordemos brevemente qué definimos en Semana 1: la pregunta de investigación, las hipótesis y las variables del experimento.</a:t>
             </a:r>
             <a:endParaRPr lang="en-US" dirty="0"/>
           </a:p>
@@ -2619,7 +2619,7 @@
           <a:p>
             <a:r>
               <a:rPr lang="en-US" dirty="0"/>
-              <a:t>Resumen del diseño experimental definido en Semana 1: pregunta, hipótesis, variables y plan de 120 observaciones.</a:t>
+              <a:t>Nuestra pregunta es si existen diferencias significativas entre los 4 lenguajes. Tenemos dos factores independientes —lenguaje y tamaño—, una variable dependiente —el tiempo—, y controles como la semilla fija y 10 repeticiones. En total son 120 mediciones. Con esto claro, pasamos a ver cómo se organizó el repositorio.</a:t>
             </a:r>
             <a:endParaRPr lang="en-US" dirty="0"/>
           </a:p>
@@ -2707,7 +2707,7 @@
           <a:p>
             <a:r>
               <a:rPr lang="en-US" dirty="0"/>
-              <a:t>Repositorio creado en GitHub con README.md que documenta el diseño experimental, siguiendo ACM Artifact Review &amp; Badging.</a:t>
+              <a:t>Todo el proyecto vive en GitHub. El README documenta el diseño experimental completo, las instrucciones de reproducción y el entorno. Seguimos el marco ACM Artifact Review and Badging para ir hacia los badges Functional, Reusable y Available. Con el contexto de Semana 1 claro, pasemos ahora a las implementaciones.</a:t>
             </a:r>
             <a:endParaRPr lang="en-US" dirty="0"/>
           </a:p>
@@ -2795,7 +2795,7 @@
           <a:p>
             <a:r>
               <a:rPr lang="en-US" dirty="0"/>
-              <a:t/>
+              <a:t>Entramos en el corazón de Semana 2: qué algoritmo implementamos, en qué lenguajes y cómo garantizamos que las matrices sean idénticas en todos.</a:t>
             </a:r>
             <a:endParaRPr lang="en-US" dirty="0"/>
           </a:p>
@@ -2883,7 +2883,7 @@
           <a:p>
             <a:r>
               <a:rPr lang="en-US" dirty="0"/>
-              <a:t>Algoritmo naive: triple bucle, sin optimizaciones. El mismo algoritmo se implementa de forma idéntica en los 4 lenguajes.</a:t>
+              <a:t>Usamos el algoritmo naive de triple bucle: complejidad O(n³), sin optimizaciones de cache, SIMD ni paralelismo. Esto es deliberado: queremos medir el lenguaje, no trucos de optimización. Veamos ahora cómo se ve en cada lenguaje.</a:t>
             </a:r>
             <a:endParaRPr lang="en-US" dirty="0"/>
           </a:p>
@@ -2971,7 +2971,7 @@
           <a:p>
             <a:r>
               <a:rPr lang="en-US" dirty="0"/>
-              <a:t>Cada implementación usa el mismo algoritmo naive con triple bucle. Las diferencias son sintácticas.</a:t>
+              <a:t>Cuatro lenguajes, un solo algoritmo. Las diferencias son solo sintácticas: cada uno usa su tipo nativo de arreglo bidimensional y su función de medición de tiempo. Ahora, ¿cómo aseguramos que las matrices de entrada sean exactamente las mismas?</a:t>
             </a:r>
             <a:endParaRPr lang="en-US" dirty="0"/>
           </a:p>
@@ -3059,7 +3059,7 @@
           <a:p>
             <a:r>
               <a:rPr lang="en-US" dirty="0"/>
-              <a:t>El generador lineal congruencial (LCG) asegura reproducibilidad: mismas semillas = mismas matrices = mismos resultados.</a:t>
+              <a:t>La clave de la reproducibilidad es el generador LCG con semilla fija 42. Al implementar el mismo generador en los 4 lenguajes, garantizamos que las matrices A y B son idénticas bit a bit. Así cualquier diferencia de tiempo es atribuible al lenguaje, no a los datos. Ahora veamos las decisiones de diseño para que la comparación sea justa.</a:t>
             </a:r>
             <a:endParaRPr lang="en-US" dirty="0"/>
           </a:p>
